--- a/project_folder/COMP5564_PRESENTATION.pptx
+++ b/project_folder/COMP5564_PRESENTATION.pptx
@@ -16,9 +16,6 @@
     <p:sldId id="264" r:id="rId16"/>
     <p:sldId id="265" r:id="rId17"/>
     <p:sldId id="266" r:id="rId18"/>
-    <p:sldId id="267" r:id="rId19"/>
-    <p:sldId id="268" r:id="rId20"/>
-    <p:sldId id="269" r:id="rId21"/>
   </p:sldIdLst>
   <p:sldSz cx="12191695" cy="6858000" type="screen4x3"/>
   <p:notesSz cx="6858000" cy="9144000"/>
@@ -515,7 +512,7 @@
           <a:lstStyle/>
           <a:p>
             <a:r>
-              <a:t>Title slide. Introduce yourself and state the course project topic: dual-task ML system for S&amp;P 500 stock price regression and cluster analysis.</a:t>
+              <a:t>Open with the core thesis: two implementation designs, one system. Explain this is a deployment-focused ML in finance project.</a:t>
             </a:r>
           </a:p>
         </p:txBody>
@@ -585,7 +582,7 @@
           <a:lstStyle/>
           <a:p>
             <a:r>
-              <a:t>Summary of all key results across three dimensions: regression accuracy, clustering quality, and trading utility. Highlight that AMZN/GOOG benefit most from cluster sentiment (46-47% MAE drop). The meta-signal beats buy-and-hold with Sharpe 8.10 and minimal drawdown.</a:t>
+              <a:t>Close with one message: architecture-level coupling of clustering and forecasting is the source of edge, but deployment must remain risk-controlled.</a:t>
             </a:r>
           </a:p>
         </p:txBody>
@@ -655,217 +652,7 @@
           <a:lstStyle/>
           <a:p>
             <a:r>
-              <a:t>Show the equity curve comparison. The Learned Meta Ridge (green) shows the smoothest compounding and shallowest drawdown. Emphasise that even after transaction costs would reduce reported Sharpe, the directional advantage of multi-horizon combination remains clear.</a:t>
-            </a:r>
-          </a:p>
-        </p:txBody>
-      </p:sp>
-      <p:sp>
-        <p:nvSpPr>
-          <p:cNvPr id="4" name="Slide Number Placeholder 3"/>
-          <p:cNvSpPr>
-            <a:spLocks noGrp="1"/>
-          </p:cNvSpPr>
-          <p:nvPr>
-            <p:ph type="sldNum" idx="5" sz="quarter"/>
-          </p:nvPr>
-        </p:nvSpPr>
-        <p:spPr/>
-      </p:sp>
-    </p:spTree>
-  </p:cSld>
-  <p:clrMapOvr>
-    <a:masterClrMapping/>
-  </p:clrMapOvr>
-</p:notes>
-</file>
-
-<file path=ppt/notesSlides/notesSlide12.xml><?xml version="1.0" encoding="utf-8"?>
-<p:notes xmlns:a="http://schemas.openxmlformats.org/drawingml/2006/main" xmlns:p="http://schemas.openxmlformats.org/presentationml/2006/main" xmlns:r="http://schemas.openxmlformats.org/officeDocument/2006/relationships">
-  <p:cSld>
-    <p:spTree>
-      <p:nvGrpSpPr>
-        <p:cNvPr id="1" name=""/>
-        <p:cNvGrpSpPr/>
-        <p:nvPr/>
-      </p:nvGrpSpPr>
-      <p:grpSpPr>
-        <a:xfrm>
-          <a:off x="0" y="0"/>
-          <a:ext cx="0" cy="0"/>
-          <a:chOff x="0" y="0"/>
-          <a:chExt cx="0" cy="0"/>
-        </a:xfrm>
-      </p:grpSpPr>
-      <p:sp>
-        <p:nvSpPr>
-          <p:cNvPr id="2" name="Slide Image Placeholder 1"/>
-          <p:cNvSpPr>
-            <a:spLocks noGrp="1"/>
-          </p:cNvSpPr>
-          <p:nvPr>
-            <p:ph type="sldImg" idx="2"/>
-          </p:nvPr>
-        </p:nvSpPr>
-        <p:spPr/>
-      </p:sp>
-      <p:sp>
-        <p:nvSpPr>
-          <p:cNvPr id="3" name="Notes Placeholder 2"/>
-          <p:cNvSpPr>
-            <a:spLocks noGrp="1"/>
-          </p:cNvSpPr>
-          <p:nvPr>
-            <p:ph type="body" idx="3" sz="quarter"/>
-          </p:nvPr>
-        </p:nvSpPr>
-        <p:spPr/>
-        <p:txBody>
-          <a:bodyPr/>
-          <a:lstStyle/>
-          <a:p>
-            <a:r>
-              <a:t>Be honest about limitations: no transaction costs, static clusters, bullish test window. For future work, highlight dynamic clustering and regime-adaptive decay as the most impactful. If asked about Hong Kong applicability, mention A/H share dynamics and regional sentiment sources.</a:t>
-            </a:r>
-          </a:p>
-        </p:txBody>
-      </p:sp>
-      <p:sp>
-        <p:nvSpPr>
-          <p:cNvPr id="4" name="Slide Number Placeholder 3"/>
-          <p:cNvSpPr>
-            <a:spLocks noGrp="1"/>
-          </p:cNvSpPr>
-          <p:nvPr>
-            <p:ph type="sldNum" idx="5" sz="quarter"/>
-          </p:nvPr>
-        </p:nvSpPr>
-        <p:spPr/>
-      </p:sp>
-    </p:spTree>
-  </p:cSld>
-  <p:clrMapOvr>
-    <a:masterClrMapping/>
-  </p:clrMapOvr>
-</p:notes>
-</file>
-
-<file path=ppt/notesSlides/notesSlide13.xml><?xml version="1.0" encoding="utf-8"?>
-<p:notes xmlns:a="http://schemas.openxmlformats.org/drawingml/2006/main" xmlns:p="http://schemas.openxmlformats.org/presentationml/2006/main" xmlns:r="http://schemas.openxmlformats.org/officeDocument/2006/relationships">
-  <p:cSld>
-    <p:spTree>
-      <p:nvGrpSpPr>
-        <p:cNvPr id="1" name=""/>
-        <p:cNvGrpSpPr/>
-        <p:nvPr/>
-      </p:nvGrpSpPr>
-      <p:grpSpPr>
-        <a:xfrm>
-          <a:off x="0" y="0"/>
-          <a:ext cx="0" cy="0"/>
-          <a:chOff x="0" y="0"/>
-          <a:chExt cx="0" cy="0"/>
-        </a:xfrm>
-      </p:grpSpPr>
-      <p:sp>
-        <p:nvSpPr>
-          <p:cNvPr id="2" name="Slide Image Placeholder 1"/>
-          <p:cNvSpPr>
-            <a:spLocks noGrp="1"/>
-          </p:cNvSpPr>
-          <p:nvPr>
-            <p:ph type="sldImg" idx="2"/>
-          </p:nvPr>
-        </p:nvSpPr>
-        <p:spPr/>
-      </p:sp>
-      <p:sp>
-        <p:nvSpPr>
-          <p:cNvPr id="3" name="Notes Placeholder 2"/>
-          <p:cNvSpPr>
-            <a:spLocks noGrp="1"/>
-          </p:cNvSpPr>
-          <p:nvPr>
-            <p:ph type="body" idx="3" sz="quarter"/>
-          </p:nvPr>
-        </p:nvSpPr>
-        <p:spPr/>
-        <p:txBody>
-          <a:bodyPr/>
-          <a:lstStyle/>
-          <a:p>
-            <a:r>
-              <a:t>Restate the core thesis: clustering as signal router. Summarise both innovations with numbers. Emphasise the dual evaluation: we measure both prediction accuracy AND trading utility, preventing metric-singleton optimisation that could mislead deployment decisions.</a:t>
-            </a:r>
-          </a:p>
-        </p:txBody>
-      </p:sp>
-      <p:sp>
-        <p:nvSpPr>
-          <p:cNvPr id="4" name="Slide Number Placeholder 3"/>
-          <p:cNvSpPr>
-            <a:spLocks noGrp="1"/>
-          </p:cNvSpPr>
-          <p:nvPr>
-            <p:ph type="sldNum" idx="5" sz="quarter"/>
-          </p:nvPr>
-        </p:nvSpPr>
-        <p:spPr/>
-      </p:sp>
-    </p:spTree>
-  </p:cSld>
-  <p:clrMapOvr>
-    <a:masterClrMapping/>
-  </p:clrMapOvr>
-</p:notes>
-</file>
-
-<file path=ppt/notesSlides/notesSlide14.xml><?xml version="1.0" encoding="utf-8"?>
-<p:notes xmlns:a="http://schemas.openxmlformats.org/drawingml/2006/main" xmlns:p="http://schemas.openxmlformats.org/presentationml/2006/main" xmlns:r="http://schemas.openxmlformats.org/officeDocument/2006/relationships">
-  <p:cSld>
-    <p:spTree>
-      <p:nvGrpSpPr>
-        <p:cNvPr id="1" name=""/>
-        <p:cNvGrpSpPr/>
-        <p:nvPr/>
-      </p:nvGrpSpPr>
-      <p:grpSpPr>
-        <a:xfrm>
-          <a:off x="0" y="0"/>
-          <a:ext cx="0" cy="0"/>
-          <a:chOff x="0" y="0"/>
-          <a:chExt cx="0" cy="0"/>
-        </a:xfrm>
-      </p:grpSpPr>
-      <p:sp>
-        <p:nvSpPr>
-          <p:cNvPr id="2" name="Slide Image Placeholder 1"/>
-          <p:cNvSpPr>
-            <a:spLocks noGrp="1"/>
-          </p:cNvSpPr>
-          <p:nvPr>
-            <p:ph type="sldImg" idx="2"/>
-          </p:nvPr>
-        </p:nvSpPr>
-        <p:spPr/>
-      </p:sp>
-      <p:sp>
-        <p:nvSpPr>
-          <p:cNvPr id="3" name="Notes Placeholder 2"/>
-          <p:cNvSpPr>
-            <a:spLocks noGrp="1"/>
-          </p:cNvSpPr>
-          <p:nvPr>
-            <p:ph type="body" idx="3" sz="quarter"/>
-          </p:nvPr>
-        </p:nvSpPr>
-        <p:spPr/>
-        <p:txBody>
-          <a:bodyPr/>
-          <a:lstStyle/>
-          <a:p>
-            <a:r>
-              <a:t>Q&amp;A slide. Be prepared to answer about: transaction cost impact on Sharpe, why DBSCAN was rejected (noise ratio), how the meta-signal handles regime changes, and applicability to Hong Kong equities. Backup numbers are on screen for reference.</a:t>
+              <a:t>Use this slide to answer detail questions on assumptions, metrics, and robustness checks.</a:t>
             </a:r>
           </a:p>
         </p:txBody>
@@ -935,7 +722,7 @@
           <a:lstStyle/>
           <a:p>
             <a:r>
-              <a:t>Motivate the problem: financial markets are hard to predict, classical methods are limited. ML enables combining price, volume, and NLP-derived sentiment. Introduce the 5 focal stocks and dataset.</a:t>
+              <a:t>State the business problem and what this deck will prove: not only prediction accuracy but portfolio-level utility.</a:t>
             </a:r>
           </a:p>
         </p:txBody>
@@ -1005,7 +792,7 @@
           <a:lstStyle/>
           <a:p>
             <a:r>
-              <a:t>Explain the dual-task design. Task 1 is supervised regression, Task 2 is unsupervised clustering. The key insight is that Task 2 feeds Task 1 through cluster-routed sentiment. Mention the two innovations: cluster news prediction and multi-horizon meta-signal.</a:t>
+              <a:t>Explain the system-level idea: unsupervised structure feeds supervised learning through cluster-aware information routing.</a:t>
             </a:r>
           </a:p>
         </p:txBody>
@@ -1075,7 +862,7 @@
           <a:lstStyle/>
           <a:p>
             <a:r>
-              <a:t>Walk through the 7 feature categories. Emphasise the temporal decay mechanism: instead of hand-picking lag, we grid-search L and λ on validation set. The near-flat optimum region means the result is robust.</a:t>
+              <a:t>Present Design A as the first core innovation. Highlight sparsity conversion: cluster peers provide signal when direct ticker news is absent.</a:t>
             </a:r>
           </a:p>
         </p:txBody>
@@ -1145,7 +932,7 @@
           <a:lstStyle/>
           <a:p>
             <a:r>
-              <a:t>Explain model selection. 4 families evaluated under identical temporal protocol. XGBoost selected because deep models overfit with small per-ticker samples. Optuna used for hyperparameter tuning with 50 Bayesian trials.</a:t>
+              <a:t>Present Design B as the second core innovation. Emphasize that horizon fusion changes position conviction, not just forecast error.</a:t>
             </a:r>
           </a:p>
         </p:txBody>
@@ -1215,7 +1002,7 @@
           <a:lstStyle/>
           <a:p>
             <a:r>
-              <a:t>6 clustering methods compared. K-Means wins on composite score. DBSCAN has high silhouette but 9.3% noise means some stocks get no peer sentiment. PCA scatter shows clear cluster separability. K=6 chosen at elbow point.</a:t>
+              <a:t>Summarize performance on three layers: prediction, structure, and trading. Keep this slide quantitative and fast.</a:t>
             </a:r>
           </a:p>
         </p:txBody>
@@ -1285,7 +1072,7 @@
           <a:lstStyle/>
           <a:p>
             <a:r>
-              <a:t>This slide is the new report Section 3.5 in PPT form. Explain that 02B adds cluster context at both feature level and model level. The largest gain comes from cluster-specific specialization: MAE improves from 3.7405 to 2.5557 (31.68%). The blended setup keeps robustness while retaining this gain.</a:t>
+              <a:t>Use this as the institutional validation slide: equity behavior, drawdown control, WFO realism, and IC/ICIR signal diagnostics.</a:t>
             </a:r>
           </a:p>
         </p:txBody>
@@ -1355,7 +1142,7 @@
           <a:lstStyle/>
           <a:p>
             <a:r>
-              <a:t>Innovation 1: cluster news prediction. The key insight is treating clustering as an information routing mechanism. When a stock has no direct news, peer cluster sentiment fills the gap. AMZN and GOOG show the largest MAE reductions (46-47%) because they benefit most from peer intelligence. Mention the Chinese term: 聚類感知 (cluster-aware) and 情緒衰減 (sentiment decay).</a:t>
+              <a:t>Balance strengths and open risks. This slide demonstrates institutional-grade skepticism and control awareness.</a:t>
             </a:r>
           </a:p>
         </p:txBody>
@@ -1425,7 +1212,7 @@
           <a:lstStyle/>
           <a:p>
             <a:r>
-              <a:t>Innovation 2: multi-horizon meta-signal. The T+15 forecast acts as a directional confidence modifier for T+1. When horizons agree, conviction is amplified; when they disagree, it's suppressed. Learned Meta Ridge achieves Sharpe 8.10, beating buy-and-hold (6.09) with only -0.8% max drawdown.</a:t>
+              <a:t>Present a credible roadmap. Prioritize what would be done before any real capital deployment.</a:t>
             </a:r>
           </a:p>
         </p:txBody>
@@ -4533,8 +4320,8 @@
         </p:nvSpPr>
         <p:spPr>
           <a:xfrm>
-            <a:off x="731520" y="1371600"/>
-            <a:ext cx="10515600" cy="1463040"/>
+            <a:off x="731520" y="1280160"/>
+            <a:ext cx="10972800" cy="1280160"/>
           </a:xfrm>
           <a:prstGeom prst="rect">
             <a:avLst/>
@@ -4569,8 +4356,8 @@
         </p:nvSpPr>
         <p:spPr>
           <a:xfrm>
-            <a:off x="731520" y="2651760"/>
-            <a:ext cx="10515600" cy="914400"/>
+            <a:off x="731520" y="2560320"/>
+            <a:ext cx="10972800" cy="731520"/>
           </a:xfrm>
           <a:prstGeom prst="rect">
             <a:avLst/>
@@ -4584,7 +4371,7 @@
           <a:lstStyle/>
           <a:p>
             <a:pPr algn="l">
-              <a:defRPr sz="2800" b="0">
+              <a:defRPr sz="2600" b="0">
                 <a:solidFill>
                   <a:srgbClr val="BBDDFF"/>
                 </a:solidFill>
@@ -4592,51 +4379,44 @@
               </a:defRPr>
             </a:pPr>
             <a:r>
-              <a:t>Stock Price Regression &amp; Cluster-Aware Sentiment Analysis</a:t>
-            </a:r>
-          </a:p>
-        </p:txBody>
-      </p:sp>
-      <p:sp>
-        <p:nvSpPr>
-          <p:cNvPr id="6" name="Rectangle 5"/>
-          <p:cNvSpPr/>
+              <a:t>Cluster-Aware Sentiment and Multi-Meta Prediction for S&amp;P 500</a:t>
+            </a:r>
+          </a:p>
+        </p:txBody>
+      </p:sp>
+      <p:sp>
+        <p:nvSpPr>
+          <p:cNvPr id="6" name="TextBox 5"/>
+          <p:cNvSpPr txBox="1"/>
           <p:nvPr/>
         </p:nvSpPr>
         <p:spPr>
           <a:xfrm>
-            <a:off x="731520" y="3840480"/>
-            <a:ext cx="2743200" cy="36576"/>
-          </a:xfrm>
-          <a:prstGeom prst="rect">
-            <a:avLst/>
-          </a:prstGeom>
-          <a:solidFill>
-            <a:srgbClr val="D4A01E"/>
-          </a:solidFill>
-          <a:ln>
-            <a:noFill/>
-          </a:ln>
-        </p:spPr>
-        <p:style>
-          <a:lnRef idx="1">
-            <a:schemeClr val="accent1"/>
-          </a:lnRef>
-          <a:fillRef idx="3">
-            <a:schemeClr val="accent1"/>
-          </a:fillRef>
-          <a:effectRef idx="2">
-            <a:schemeClr val="accent1"/>
-          </a:effectRef>
-          <a:fontRef idx="minor">
-            <a:schemeClr val="lt1"/>
-          </a:fontRef>
-        </p:style>
-        <p:txBody>
-          <a:bodyPr rtlCol="0" anchor="ctr"/>
-          <a:lstStyle/>
-          <a:p>
-            <a:pPr algn="ctr"/>
+            <a:off x="731520" y="4206240"/>
+            <a:ext cx="7315200" cy="457200"/>
+          </a:xfrm>
+          <a:prstGeom prst="rect">
+            <a:avLst/>
+          </a:prstGeom>
+          <a:noFill/>
+        </p:spPr>
+        <p:txBody>
+          <a:bodyPr wrap="square">
+            <a:spAutoFit/>
+          </a:bodyPr>
+          <a:lstStyle/>
+          <a:p>
+            <a:pPr algn="l">
+              <a:defRPr sz="1800" b="0">
+                <a:solidFill>
+                  <a:srgbClr val="FFFFFF"/>
+                </a:solidFill>
+                <a:latin typeface="Calibri"/>
+              </a:defRPr>
+            </a:pPr>
+            <a:r>
+              <a:t>COMP5564 | CHIU Yee Lok (25012923G)</a:t>
+            </a:r>
           </a:p>
         </p:txBody>
       </p:sp>
@@ -4648,8 +4428,8 @@
         </p:nvSpPr>
         <p:spPr>
           <a:xfrm>
-            <a:off x="731520" y="4114800"/>
-            <a:ext cx="10058400" cy="457200"/>
+            <a:off x="731520" y="5669280"/>
+            <a:ext cx="7315200" cy="365760"/>
           </a:xfrm>
           <a:prstGeom prst="rect">
             <a:avLst/>
@@ -4663,79 +4443,7 @@
           <a:lstStyle/>
           <a:p>
             <a:pPr algn="l">
-              <a:defRPr sz="1800" b="0">
-                <a:solidFill>
-                  <a:srgbClr val="99BBDD"/>
-                </a:solidFill>
-                <a:latin typeface="Calibri"/>
-              </a:defRPr>
-            </a:pPr>
-            <a:r>
-              <a:t>COMP5564 – ML in Finance  |  S&amp;P 500 Dual-Task Framework</a:t>
-            </a:r>
-          </a:p>
-        </p:txBody>
-      </p:sp>
-      <p:sp>
-        <p:nvSpPr>
-          <p:cNvPr id="8" name="TextBox 7"/>
-          <p:cNvSpPr txBox="1"/>
-          <p:nvPr/>
-        </p:nvSpPr>
-        <p:spPr>
-          <a:xfrm>
-            <a:off x="731520" y="5669280"/>
-            <a:ext cx="4572000" cy="365760"/>
-          </a:xfrm>
-          <a:prstGeom prst="rect">
-            <a:avLst/>
-          </a:prstGeom>
-          <a:noFill/>
-        </p:spPr>
-        <p:txBody>
-          <a:bodyPr wrap="square">
-            <a:spAutoFit/>
-          </a:bodyPr>
-          <a:lstStyle/>
-          <a:p>
-            <a:pPr algn="l">
-              <a:defRPr sz="2000" b="1">
-                <a:solidFill>
-                  <a:srgbClr val="FFFFFF"/>
-                </a:solidFill>
-                <a:latin typeface="Calibri"/>
-              </a:defRPr>
-            </a:pPr>
-            <a:r>
-              <a:t>CHIU Yee Lok  (25012923G)</a:t>
-            </a:r>
-          </a:p>
-        </p:txBody>
-      </p:sp>
-      <p:sp>
-        <p:nvSpPr>
-          <p:cNvPr id="9" name="TextBox 8"/>
-          <p:cNvSpPr txBox="1"/>
-          <p:nvPr/>
-        </p:nvSpPr>
-        <p:spPr>
-          <a:xfrm>
-            <a:off x="731520" y="6080760"/>
-            <a:ext cx="4572000" cy="365760"/>
-          </a:xfrm>
-          <a:prstGeom prst="rect">
-            <a:avLst/>
-          </a:prstGeom>
-          <a:noFill/>
-        </p:spPr>
-        <p:txBody>
-          <a:bodyPr wrap="square">
-            <a:spAutoFit/>
-          </a:bodyPr>
-          <a:lstStyle/>
-          <a:p>
-            <a:pPr algn="l">
-              <a:defRPr sz="1600" b="0">
+              <a:defRPr sz="1500" b="0">
                 <a:solidFill>
                   <a:srgbClr val="AAAAAA"/>
                 </a:solidFill>
@@ -4757,1711 +4465,6 @@
 </file>
 
 <file path=ppt/slides/slide10.xml><?xml version="1.0" encoding="utf-8"?>
-<p:sld xmlns:a="http://schemas.openxmlformats.org/drawingml/2006/main" xmlns:p="http://schemas.openxmlformats.org/presentationml/2006/main" xmlns:r="http://schemas.openxmlformats.org/officeDocument/2006/relationships">
-  <p:cSld>
-    <p:bg>
-      <p:bgPr>
-        <a:solidFill>
-          <a:srgbClr val="FFFFFF"/>
-        </a:solidFill>
-        <a:effectLst/>
-      </p:bgPr>
-    </p:bg>
-    <p:spTree>
-      <p:nvGrpSpPr>
-        <p:cNvPr id="1" name=""/>
-        <p:cNvGrpSpPr/>
-        <p:nvPr/>
-      </p:nvGrpSpPr>
-      <p:grpSpPr/>
-      <p:sp>
-        <p:nvSpPr>
-          <p:cNvPr id="2" name="Rectangle 1"/>
-          <p:cNvSpPr/>
-          <p:nvPr/>
-        </p:nvSpPr>
-        <p:spPr>
-          <a:xfrm>
-            <a:off x="0" y="0"/>
-            <a:ext cx="12191695" cy="914400"/>
-          </a:xfrm>
-          <a:prstGeom prst="rect">
-            <a:avLst/>
-          </a:prstGeom>
-          <a:solidFill>
-            <a:srgbClr val="1B3A5C"/>
-          </a:solidFill>
-          <a:ln>
-            <a:noFill/>
-          </a:ln>
-        </p:spPr>
-        <p:style>
-          <a:lnRef idx="1">
-            <a:schemeClr val="accent1"/>
-          </a:lnRef>
-          <a:fillRef idx="3">
-            <a:schemeClr val="accent1"/>
-          </a:fillRef>
-          <a:effectRef idx="2">
-            <a:schemeClr val="accent1"/>
-          </a:effectRef>
-          <a:fontRef idx="minor">
-            <a:schemeClr val="lt1"/>
-          </a:fontRef>
-        </p:style>
-        <p:txBody>
-          <a:bodyPr rtlCol="0" anchor="ctr"/>
-          <a:lstStyle/>
-          <a:p>
-            <a:pPr algn="ctr"/>
-          </a:p>
-        </p:txBody>
-      </p:sp>
-      <p:sp>
-        <p:nvSpPr>
-          <p:cNvPr id="3" name="TextBox 2"/>
-          <p:cNvSpPr txBox="1"/>
-          <p:nvPr/>
-        </p:nvSpPr>
-        <p:spPr>
-          <a:xfrm>
-            <a:off x="548640" y="137160"/>
-            <a:ext cx="10058400" cy="640080"/>
-          </a:xfrm>
-          <a:prstGeom prst="rect">
-            <a:avLst/>
-          </a:prstGeom>
-          <a:noFill/>
-        </p:spPr>
-        <p:txBody>
-          <a:bodyPr wrap="square">
-            <a:spAutoFit/>
-          </a:bodyPr>
-          <a:lstStyle/>
-          <a:p>
-            <a:pPr algn="l">
-              <a:defRPr sz="2600" b="1">
-                <a:solidFill>
-                  <a:srgbClr val="FFFFFF"/>
-                </a:solidFill>
-                <a:latin typeface="Calibri"/>
-              </a:defRPr>
-            </a:pPr>
-            <a:r>
-              <a:t>Results at a Glance</a:t>
-            </a:r>
-          </a:p>
-        </p:txBody>
-      </p:sp>
-      <p:sp>
-        <p:nvSpPr>
-          <p:cNvPr id="4" name="Rectangle 3"/>
-          <p:cNvSpPr/>
-          <p:nvPr/>
-        </p:nvSpPr>
-        <p:spPr>
-          <a:xfrm>
-            <a:off x="0" y="914400"/>
-            <a:ext cx="12191695" cy="36576"/>
-          </a:xfrm>
-          <a:prstGeom prst="rect">
-            <a:avLst/>
-          </a:prstGeom>
-          <a:solidFill>
-            <a:srgbClr val="D4A01E"/>
-          </a:solidFill>
-          <a:ln>
-            <a:noFill/>
-          </a:ln>
-        </p:spPr>
-        <p:style>
-          <a:lnRef idx="1">
-            <a:schemeClr val="accent1"/>
-          </a:lnRef>
-          <a:fillRef idx="3">
-            <a:schemeClr val="accent1"/>
-          </a:fillRef>
-          <a:effectRef idx="2">
-            <a:schemeClr val="accent1"/>
-          </a:effectRef>
-          <a:fontRef idx="minor">
-            <a:schemeClr val="lt1"/>
-          </a:fontRef>
-        </p:style>
-        <p:txBody>
-          <a:bodyPr rtlCol="0" anchor="ctr"/>
-          <a:lstStyle/>
-          <a:p>
-            <a:pPr algn="ctr"/>
-          </a:p>
-        </p:txBody>
-      </p:sp>
-      <p:sp>
-        <p:nvSpPr>
-          <p:cNvPr id="5" name="Rectangle 4"/>
-          <p:cNvSpPr/>
-          <p:nvPr/>
-        </p:nvSpPr>
-        <p:spPr>
-          <a:xfrm>
-            <a:off x="457200" y="1188720"/>
-            <a:ext cx="3474720" cy="3200400"/>
-          </a:xfrm>
-          <a:prstGeom prst="rect">
-            <a:avLst/>
-          </a:prstGeom>
-          <a:solidFill>
-            <a:srgbClr val="E8F0FE"/>
-          </a:solidFill>
-          <a:ln>
-            <a:noFill/>
-          </a:ln>
-        </p:spPr>
-        <p:style>
-          <a:lnRef idx="1">
-            <a:schemeClr val="accent1"/>
-          </a:lnRef>
-          <a:fillRef idx="3">
-            <a:schemeClr val="accent1"/>
-          </a:fillRef>
-          <a:effectRef idx="2">
-            <a:schemeClr val="accent1"/>
-          </a:effectRef>
-          <a:fontRef idx="minor">
-            <a:schemeClr val="lt1"/>
-          </a:fontRef>
-        </p:style>
-        <p:txBody>
-          <a:bodyPr rtlCol="0" anchor="ctr"/>
-          <a:lstStyle/>
-          <a:p>
-            <a:pPr algn="ctr"/>
-          </a:p>
-        </p:txBody>
-      </p:sp>
-      <p:sp>
-        <p:nvSpPr>
-          <p:cNvPr id="6" name="TextBox 5"/>
-          <p:cNvSpPr txBox="1"/>
-          <p:nvPr/>
-        </p:nvSpPr>
-        <p:spPr>
-          <a:xfrm>
-            <a:off x="640080" y="1280160"/>
-            <a:ext cx="3108960" cy="365760"/>
-          </a:xfrm>
-          <a:prstGeom prst="rect">
-            <a:avLst/>
-          </a:prstGeom>
-          <a:noFill/>
-        </p:spPr>
-        <p:txBody>
-          <a:bodyPr wrap="square">
-            <a:spAutoFit/>
-          </a:bodyPr>
-          <a:lstStyle/>
-          <a:p>
-            <a:pPr algn="l">
-              <a:defRPr sz="1600" b="1">
-                <a:solidFill>
-                  <a:srgbClr val="1B3A5C"/>
-                </a:solidFill>
-                <a:latin typeface="Calibri"/>
-              </a:defRPr>
-            </a:pPr>
-            <a:r>
-              <a:t>Regression (02D Stacked)</a:t>
-            </a:r>
-          </a:p>
-        </p:txBody>
-      </p:sp>
-      <p:sp>
-        <p:nvSpPr>
-          <p:cNvPr id="7" name="TextBox 6"/>
-          <p:cNvSpPr txBox="1"/>
-          <p:nvPr/>
-        </p:nvSpPr>
-        <p:spPr>
-          <a:xfrm>
-            <a:off x="640080" y="1737360"/>
-            <a:ext cx="3108960" cy="2286000"/>
-          </a:xfrm>
-          <a:prstGeom prst="rect">
-            <a:avLst/>
-          </a:prstGeom>
-          <a:noFill/>
-        </p:spPr>
-        <p:txBody>
-          <a:bodyPr wrap="square">
-            <a:spAutoFit/>
-          </a:bodyPr>
-          <a:lstStyle/>
-          <a:p>
-            <a:pPr>
-              <a:spcBef>
-                <a:spcPts val="400"/>
-              </a:spcBef>
-              <a:spcAft>
-                <a:spcPts val="200"/>
-              </a:spcAft>
-            </a:pPr>
-            <a:r>
-              <a:rPr sz="1400">
-                <a:solidFill>
-                  <a:srgbClr val="2C2C2C"/>
-                </a:solidFill>
-                <a:latin typeface="Calibri"/>
-              </a:rPr>
-              <a:t>• MAE = 0.918</a:t>
-            </a:r>
-          </a:p>
-          <a:p>
-            <a:pPr>
-              <a:spcBef>
-                <a:spcPts val="400"/>
-              </a:spcBef>
-              <a:spcAft>
-                <a:spcPts val="200"/>
-              </a:spcAft>
-            </a:pPr>
-            <a:r>
-              <a:rPr sz="1400">
-                <a:solidFill>
-                  <a:srgbClr val="2C2C2C"/>
-                </a:solidFill>
-                <a:latin typeface="Calibri"/>
-              </a:rPr>
-              <a:t>• R² = 0.999688</a:t>
-            </a:r>
-          </a:p>
-          <a:p>
-            <a:pPr>
-              <a:spcBef>
-                <a:spcPts val="400"/>
-              </a:spcBef>
-              <a:spcAft>
-                <a:spcPts val="200"/>
-              </a:spcAft>
-            </a:pPr>
-            <a:r>
-              <a:rPr sz="1400">
-                <a:solidFill>
-                  <a:srgbClr val="2C2C2C"/>
-                </a:solidFill>
-                <a:latin typeface="Calibri"/>
-              </a:rPr>
-              <a:t>• Dir. Accuracy = 0.515</a:t>
-            </a:r>
-          </a:p>
-          <a:p>
-            <a:pPr>
-              <a:spcBef>
-                <a:spcPts val="400"/>
-              </a:spcBef>
-              <a:spcAft>
-                <a:spcPts val="200"/>
-              </a:spcAft>
-            </a:pPr>
-            <a:r>
-              <a:rPr sz="1400">
-                <a:solidFill>
-                  <a:srgbClr val="2C2C2C"/>
-                </a:solidFill>
-                <a:latin typeface="Calibri"/>
-              </a:rPr>
-              <a:t>• MSFT best: MAE = 0.594</a:t>
-            </a:r>
-          </a:p>
-          <a:p>
-            <a:pPr>
-              <a:spcBef>
-                <a:spcPts val="400"/>
-              </a:spcBef>
-              <a:spcAft>
-                <a:spcPts val="200"/>
-              </a:spcAft>
-            </a:pPr>
-            <a:r>
-              <a:rPr sz="1400">
-                <a:solidFill>
-                  <a:srgbClr val="2C2C2C"/>
-                </a:solidFill>
-                <a:latin typeface="Calibri"/>
-              </a:rPr>
-              <a:t>• AMZN/GOOG: 46-47% improvement</a:t>
-            </a:r>
-          </a:p>
-        </p:txBody>
-      </p:sp>
-      <p:sp>
-        <p:nvSpPr>
-          <p:cNvPr id="8" name="Rectangle 7"/>
-          <p:cNvSpPr/>
-          <p:nvPr/>
-        </p:nvSpPr>
-        <p:spPr>
-          <a:xfrm>
-            <a:off x="4297680" y="1188720"/>
-            <a:ext cx="3474720" cy="3200400"/>
-          </a:xfrm>
-          <a:prstGeom prst="rect">
-            <a:avLst/>
-          </a:prstGeom>
-          <a:solidFill>
-            <a:srgbClr val="FEF5E7"/>
-          </a:solidFill>
-          <a:ln>
-            <a:noFill/>
-          </a:ln>
-        </p:spPr>
-        <p:style>
-          <a:lnRef idx="1">
-            <a:schemeClr val="accent1"/>
-          </a:lnRef>
-          <a:fillRef idx="3">
-            <a:schemeClr val="accent1"/>
-          </a:fillRef>
-          <a:effectRef idx="2">
-            <a:schemeClr val="accent1"/>
-          </a:effectRef>
-          <a:fontRef idx="minor">
-            <a:schemeClr val="lt1"/>
-          </a:fontRef>
-        </p:style>
-        <p:txBody>
-          <a:bodyPr rtlCol="0" anchor="ctr"/>
-          <a:lstStyle/>
-          <a:p>
-            <a:pPr algn="ctr"/>
-          </a:p>
-        </p:txBody>
-      </p:sp>
-      <p:sp>
-        <p:nvSpPr>
-          <p:cNvPr id="9" name="TextBox 8"/>
-          <p:cNvSpPr txBox="1"/>
-          <p:nvPr/>
-        </p:nvSpPr>
-        <p:spPr>
-          <a:xfrm>
-            <a:off x="4480560" y="1280160"/>
-            <a:ext cx="3108960" cy="365760"/>
-          </a:xfrm>
-          <a:prstGeom prst="rect">
-            <a:avLst/>
-          </a:prstGeom>
-          <a:noFill/>
-        </p:spPr>
-        <p:txBody>
-          <a:bodyPr wrap="square">
-            <a:spAutoFit/>
-          </a:bodyPr>
-          <a:lstStyle/>
-          <a:p>
-            <a:pPr algn="l">
-              <a:defRPr sz="1600" b="1">
-                <a:solidFill>
-                  <a:srgbClr val="D4A01E"/>
-                </a:solidFill>
-                <a:latin typeface="Calibri"/>
-              </a:defRPr>
-            </a:pPr>
-            <a:r>
-              <a:t>Clustering (K-Means)</a:t>
-            </a:r>
-          </a:p>
-        </p:txBody>
-      </p:sp>
-      <p:sp>
-        <p:nvSpPr>
-          <p:cNvPr id="10" name="TextBox 9"/>
-          <p:cNvSpPr txBox="1"/>
-          <p:nvPr/>
-        </p:nvSpPr>
-        <p:spPr>
-          <a:xfrm>
-            <a:off x="4480560" y="1737360"/>
-            <a:ext cx="3108960" cy="2286000"/>
-          </a:xfrm>
-          <a:prstGeom prst="rect">
-            <a:avLst/>
-          </a:prstGeom>
-          <a:noFill/>
-        </p:spPr>
-        <p:txBody>
-          <a:bodyPr wrap="square">
-            <a:spAutoFit/>
-          </a:bodyPr>
-          <a:lstStyle/>
-          <a:p>
-            <a:pPr>
-              <a:spcBef>
-                <a:spcPts val="400"/>
-              </a:spcBef>
-              <a:spcAft>
-                <a:spcPts val="200"/>
-              </a:spcAft>
-            </a:pPr>
-            <a:r>
-              <a:rPr sz="1400">
-                <a:solidFill>
-                  <a:srgbClr val="2C2C2C"/>
-                </a:solidFill>
-                <a:latin typeface="Calibri"/>
-              </a:rPr>
-              <a:t>• K = 6 (Elbow + Silhouette)</a:t>
-            </a:r>
-          </a:p>
-          <a:p>
-            <a:pPr>
-              <a:spcBef>
-                <a:spcPts val="400"/>
-              </a:spcBef>
-              <a:spcAft>
-                <a:spcPts val="200"/>
-              </a:spcAft>
-            </a:pPr>
-            <a:r>
-              <a:rPr sz="1400">
-                <a:solidFill>
-                  <a:srgbClr val="2C2C2C"/>
-                </a:solidFill>
-                <a:latin typeface="Calibri"/>
-              </a:rPr>
-              <a:t>• Composite Score = 0.577 (Rank 1)</a:t>
-            </a:r>
-          </a:p>
-          <a:p>
-            <a:pPr>
-              <a:spcBef>
-                <a:spcPts val="400"/>
-              </a:spcBef>
-              <a:spcAft>
-                <a:spcPts val="200"/>
-              </a:spcAft>
-            </a:pPr>
-            <a:r>
-              <a:rPr sz="1400">
-                <a:solidFill>
-                  <a:srgbClr val="2C2C2C"/>
-                </a:solidFill>
-                <a:latin typeface="Calibri"/>
-              </a:rPr>
-              <a:t>• Silhouette = 0.250</a:t>
-            </a:r>
-          </a:p>
-          <a:p>
-            <a:pPr>
-              <a:spcBef>
-                <a:spcPts val="400"/>
-              </a:spcBef>
-              <a:spcAft>
-                <a:spcPts val="200"/>
-              </a:spcAft>
-            </a:pPr>
-            <a:r>
-              <a:rPr sz="1400">
-                <a:solidFill>
-                  <a:srgbClr val="2C2C2C"/>
-                </a:solidFill>
-                <a:latin typeface="Calibri"/>
-              </a:rPr>
-              <a:t>• Zero noise ratio</a:t>
-            </a:r>
-          </a:p>
-          <a:p>
-            <a:pPr>
-              <a:spcBef>
-                <a:spcPts val="400"/>
-              </a:spcBef>
-              <a:spcAft>
-                <a:spcPts val="200"/>
-              </a:spcAft>
-            </a:pPr>
-            <a:r>
-              <a:rPr sz="1400">
-                <a:solidFill>
-                  <a:srgbClr val="2C2C2C"/>
-                </a:solidFill>
-                <a:latin typeface="Calibri"/>
-              </a:rPr>
-              <a:t>• Financially coherent peer groups</a:t>
-            </a:r>
-          </a:p>
-        </p:txBody>
-      </p:sp>
-      <p:sp>
-        <p:nvSpPr>
-          <p:cNvPr id="11" name="Rectangle 10"/>
-          <p:cNvSpPr/>
-          <p:nvPr/>
-        </p:nvSpPr>
-        <p:spPr>
-          <a:xfrm>
-            <a:off x="8138160" y="1188720"/>
-            <a:ext cx="3474720" cy="3200400"/>
-          </a:xfrm>
-          <a:prstGeom prst="rect">
-            <a:avLst/>
-          </a:prstGeom>
-          <a:solidFill>
-            <a:srgbClr val="E6F4EA"/>
-          </a:solidFill>
-          <a:ln>
-            <a:noFill/>
-          </a:ln>
-        </p:spPr>
-        <p:style>
-          <a:lnRef idx="1">
-            <a:schemeClr val="accent1"/>
-          </a:lnRef>
-          <a:fillRef idx="3">
-            <a:schemeClr val="accent1"/>
-          </a:fillRef>
-          <a:effectRef idx="2">
-            <a:schemeClr val="accent1"/>
-          </a:effectRef>
-          <a:fontRef idx="minor">
-            <a:schemeClr val="lt1"/>
-          </a:fontRef>
-        </p:style>
-        <p:txBody>
-          <a:bodyPr rtlCol="0" anchor="ctr"/>
-          <a:lstStyle/>
-          <a:p>
-            <a:pPr algn="ctr"/>
-          </a:p>
-        </p:txBody>
-      </p:sp>
-      <p:sp>
-        <p:nvSpPr>
-          <p:cNvPr id="12" name="TextBox 11"/>
-          <p:cNvSpPr txBox="1"/>
-          <p:nvPr/>
-        </p:nvSpPr>
-        <p:spPr>
-          <a:xfrm>
-            <a:off x="8321040" y="1280160"/>
-            <a:ext cx="3108960" cy="365760"/>
-          </a:xfrm>
-          <a:prstGeom prst="rect">
-            <a:avLst/>
-          </a:prstGeom>
-          <a:noFill/>
-        </p:spPr>
-        <p:txBody>
-          <a:bodyPr wrap="square">
-            <a:spAutoFit/>
-          </a:bodyPr>
-          <a:lstStyle/>
-          <a:p>
-            <a:pPr algn="l">
-              <a:defRPr sz="1600" b="1">
-                <a:solidFill>
-                  <a:srgbClr val="27AE60"/>
-                </a:solidFill>
-                <a:latin typeface="Calibri"/>
-              </a:defRPr>
-            </a:pPr>
-            <a:r>
-              <a:t>Trading (Meta Ridge)</a:t>
-            </a:r>
-          </a:p>
-        </p:txBody>
-      </p:sp>
-      <p:sp>
-        <p:nvSpPr>
-          <p:cNvPr id="13" name="TextBox 12"/>
-          <p:cNvSpPr txBox="1"/>
-          <p:nvPr/>
-        </p:nvSpPr>
-        <p:spPr>
-          <a:xfrm>
-            <a:off x="8321040" y="1737360"/>
-            <a:ext cx="3108960" cy="2286000"/>
-          </a:xfrm>
-          <a:prstGeom prst="rect">
-            <a:avLst/>
-          </a:prstGeom>
-          <a:noFill/>
-        </p:spPr>
-        <p:txBody>
-          <a:bodyPr wrap="square">
-            <a:spAutoFit/>
-          </a:bodyPr>
-          <a:lstStyle/>
-          <a:p>
-            <a:pPr>
-              <a:spcBef>
-                <a:spcPts val="400"/>
-              </a:spcBef>
-              <a:spcAft>
-                <a:spcPts val="200"/>
-              </a:spcAft>
-            </a:pPr>
-            <a:r>
-              <a:rPr sz="1400">
-                <a:solidFill>
-                  <a:srgbClr val="2C2C2C"/>
-                </a:solidFill>
-                <a:latin typeface="Calibri"/>
-              </a:rPr>
-              <a:t>• Sharpe Ratio = 8.10</a:t>
-            </a:r>
-          </a:p>
-          <a:p>
-            <a:pPr>
-              <a:spcBef>
-                <a:spcPts val="400"/>
-              </a:spcBef>
-              <a:spcAft>
-                <a:spcPts val="200"/>
-              </a:spcAft>
-            </a:pPr>
-            <a:r>
-              <a:rPr sz="1400">
-                <a:solidFill>
-                  <a:srgbClr val="2C2C2C"/>
-                </a:solidFill>
-                <a:latin typeface="Calibri"/>
-              </a:rPr>
-              <a:t>• Max Drawdown = −0.8%</a:t>
-            </a:r>
-          </a:p>
-          <a:p>
-            <a:pPr>
-              <a:spcBef>
-                <a:spcPts val="400"/>
-              </a:spcBef>
-              <a:spcAft>
-                <a:spcPts val="200"/>
-              </a:spcAft>
-            </a:pPr>
-            <a:r>
-              <a:rPr sz="1400">
-                <a:solidFill>
-                  <a:srgbClr val="2C2C2C"/>
-                </a:solidFill>
-                <a:latin typeface="Calibri"/>
-              </a:rPr>
-              <a:t>• Total Return = 10.5%</a:t>
-            </a:r>
-          </a:p>
-          <a:p>
-            <a:pPr>
-              <a:spcBef>
-                <a:spcPts val="400"/>
-              </a:spcBef>
-              <a:spcAft>
-                <a:spcPts val="200"/>
-              </a:spcAft>
-            </a:pPr>
-            <a:r>
-              <a:rPr sz="1400">
-                <a:solidFill>
-                  <a:srgbClr val="2C2C2C"/>
-                </a:solidFill>
-                <a:latin typeface="Calibri"/>
-              </a:rPr>
-              <a:t>• DHR = 0.681</a:t>
-            </a:r>
-          </a:p>
-          <a:p>
-            <a:pPr>
-              <a:spcBef>
-                <a:spcPts val="400"/>
-              </a:spcBef>
-              <a:spcAft>
-                <a:spcPts val="200"/>
-              </a:spcAft>
-            </a:pPr>
-            <a:r>
-              <a:rPr sz="1400">
-                <a:solidFill>
-                  <a:srgbClr val="2C2C2C"/>
-                </a:solidFill>
-                <a:latin typeface="Calibri"/>
-              </a:rPr>
-              <a:t>• Beats Buy-and-Hold (6.09)</a:t>
-            </a:r>
-          </a:p>
-        </p:txBody>
-      </p:sp>
-      <p:sp>
-        <p:nvSpPr>
-          <p:cNvPr id="14" name="TextBox 13"/>
-          <p:cNvSpPr txBox="1"/>
-          <p:nvPr/>
-        </p:nvSpPr>
-        <p:spPr>
-          <a:xfrm>
-            <a:off x="548640" y="4846320"/>
-            <a:ext cx="10972800" cy="365760"/>
-          </a:xfrm>
-          <a:prstGeom prst="rect">
-            <a:avLst/>
-          </a:prstGeom>
-          <a:noFill/>
-        </p:spPr>
-        <p:txBody>
-          <a:bodyPr wrap="square">
-            <a:spAutoFit/>
-          </a:bodyPr>
-          <a:lstStyle/>
-          <a:p>
-            <a:pPr algn="l">
-              <a:defRPr sz="1800" b="1">
-                <a:solidFill>
-                  <a:srgbClr val="1B3A5C"/>
-                </a:solidFill>
-                <a:latin typeface="Calibri"/>
-              </a:defRPr>
-            </a:pPr>
-            <a:r>
-              <a:t>Per-Stock Highlights</a:t>
-            </a:r>
-          </a:p>
-        </p:txBody>
-      </p:sp>
-      <p:sp>
-        <p:nvSpPr>
-          <p:cNvPr id="15" name="TextBox 14"/>
-          <p:cNvSpPr txBox="1"/>
-          <p:nvPr/>
-        </p:nvSpPr>
-        <p:spPr>
-          <a:xfrm>
-            <a:off x="548640" y="5303520"/>
-            <a:ext cx="10972800" cy="1371600"/>
-          </a:xfrm>
-          <a:prstGeom prst="rect">
-            <a:avLst/>
-          </a:prstGeom>
-          <a:noFill/>
-        </p:spPr>
-        <p:txBody>
-          <a:bodyPr wrap="square">
-            <a:spAutoFit/>
-          </a:bodyPr>
-          <a:lstStyle/>
-          <a:p>
-            <a:pPr>
-              <a:spcBef>
-                <a:spcPts val="400"/>
-              </a:spcBef>
-              <a:spcAft>
-                <a:spcPts val="200"/>
-              </a:spcAft>
-            </a:pPr>
-            <a:r>
-              <a:rPr b="1" sz="1400">
-                <a:solidFill>
-                  <a:srgbClr val="2C2C2C"/>
-                </a:solidFill>
-                <a:latin typeface="Calibri"/>
-              </a:rPr>
-              <a:t>AAPL: </a:t>
-            </a:r>
-            <a:r>
-              <a:rPr sz="1400">
-                <a:solidFill>
-                  <a:srgbClr val="2C2C2C"/>
-                </a:solidFill>
-                <a:latin typeface="Calibri"/>
-              </a:rPr>
-              <a:t>Best under 02D stacked (MAE=1.331) — cluster peers fill news gaps</a:t>
-            </a:r>
-          </a:p>
-          <a:p>
-            <a:pPr>
-              <a:spcBef>
-                <a:spcPts val="400"/>
-              </a:spcBef>
-              <a:spcAft>
-                <a:spcPts val="200"/>
-              </a:spcAft>
-            </a:pPr>
-            <a:r>
-              <a:rPr b="1" sz="1400">
-                <a:solidFill>
-                  <a:srgbClr val="2C2C2C"/>
-                </a:solidFill>
-                <a:latin typeface="Calibri"/>
-              </a:rPr>
-              <a:t>AMZN/GOOG: </a:t>
-            </a:r>
-            <a:r>
-              <a:rPr sz="1400">
-                <a:solidFill>
-                  <a:srgbClr val="2C2C2C"/>
-                </a:solidFill>
-                <a:latin typeface="Calibri"/>
-              </a:rPr>
-              <a:t>Largest MAE drops via cluster-specific sentiment (↓46-47%)</a:t>
-            </a:r>
-          </a:p>
-          <a:p>
-            <a:pPr>
-              <a:spcBef>
-                <a:spcPts val="400"/>
-              </a:spcBef>
-              <a:spcAft>
-                <a:spcPts val="200"/>
-              </a:spcAft>
-            </a:pPr>
-            <a:r>
-              <a:rPr b="1" sz="1400">
-                <a:solidFill>
-                  <a:srgbClr val="2C2C2C"/>
-                </a:solidFill>
-                <a:latin typeface="Calibri"/>
-              </a:rPr>
-              <a:t>MSFT: </a:t>
-            </a:r>
-            <a:r>
-              <a:rPr sz="1400">
-                <a:solidFill>
-                  <a:srgbClr val="2C2C2C"/>
-                </a:solidFill>
-                <a:latin typeface="Calibri"/>
-              </a:rPr>
-              <a:t>Lowest absolute MAE (0.594) — smooth trend, consistent coverage</a:t>
-            </a:r>
-          </a:p>
-          <a:p>
-            <a:pPr>
-              <a:spcBef>
-                <a:spcPts val="400"/>
-              </a:spcBef>
-              <a:spcAft>
-                <a:spcPts val="200"/>
-              </a:spcAft>
-            </a:pPr>
-            <a:r>
-              <a:rPr b="1" sz="1400">
-                <a:solidFill>
-                  <a:srgbClr val="2C2C2C"/>
-                </a:solidFill>
-                <a:latin typeface="Calibri"/>
-              </a:rPr>
-              <a:t>NVDA: </a:t>
-            </a:r>
-            <a:r>
-              <a:rPr sz="1400">
-                <a:solidFill>
-                  <a:srgbClr val="2C2C2C"/>
-                </a:solidFill>
-                <a:latin typeface="Calibri"/>
-              </a:rPr>
-              <a:t>Highest R² (0.9886) — semiconductor peer group boosts fit</a:t>
-            </a:r>
-          </a:p>
-        </p:txBody>
-      </p:sp>
-    </p:spTree>
-  </p:cSld>
-  <p:clrMapOvr>
-    <a:masterClrMapping/>
-  </p:clrMapOvr>
-</p:sld>
-</file>
-
-<file path=ppt/slides/slide11.xml><?xml version="1.0" encoding="utf-8"?>
-<p:sld xmlns:a="http://schemas.openxmlformats.org/drawingml/2006/main" xmlns:p="http://schemas.openxmlformats.org/presentationml/2006/main" xmlns:r="http://schemas.openxmlformats.org/officeDocument/2006/relationships">
-  <p:cSld>
-    <p:bg>
-      <p:bgPr>
-        <a:solidFill>
-          <a:srgbClr val="FFFFFF"/>
-        </a:solidFill>
-        <a:effectLst/>
-      </p:bgPr>
-    </p:bg>
-    <p:spTree>
-      <p:nvGrpSpPr>
-        <p:cNvPr id="1" name=""/>
-        <p:cNvGrpSpPr/>
-        <p:nvPr/>
-      </p:nvGrpSpPr>
-      <p:grpSpPr/>
-      <p:sp>
-        <p:nvSpPr>
-          <p:cNvPr id="2" name="Rectangle 1"/>
-          <p:cNvSpPr/>
-          <p:nvPr/>
-        </p:nvSpPr>
-        <p:spPr>
-          <a:xfrm>
-            <a:off x="0" y="0"/>
-            <a:ext cx="12191695" cy="914400"/>
-          </a:xfrm>
-          <a:prstGeom prst="rect">
-            <a:avLst/>
-          </a:prstGeom>
-          <a:solidFill>
-            <a:srgbClr val="1B3A5C"/>
-          </a:solidFill>
-          <a:ln>
-            <a:noFill/>
-          </a:ln>
-        </p:spPr>
-        <p:style>
-          <a:lnRef idx="1">
-            <a:schemeClr val="accent1"/>
-          </a:lnRef>
-          <a:fillRef idx="3">
-            <a:schemeClr val="accent1"/>
-          </a:fillRef>
-          <a:effectRef idx="2">
-            <a:schemeClr val="accent1"/>
-          </a:effectRef>
-          <a:fontRef idx="minor">
-            <a:schemeClr val="lt1"/>
-          </a:fontRef>
-        </p:style>
-        <p:txBody>
-          <a:bodyPr rtlCol="0" anchor="ctr"/>
-          <a:lstStyle/>
-          <a:p>
-            <a:pPr algn="ctr"/>
-          </a:p>
-        </p:txBody>
-      </p:sp>
-      <p:sp>
-        <p:nvSpPr>
-          <p:cNvPr id="3" name="TextBox 2"/>
-          <p:cNvSpPr txBox="1"/>
-          <p:nvPr/>
-        </p:nvSpPr>
-        <p:spPr>
-          <a:xfrm>
-            <a:off x="548640" y="137160"/>
-            <a:ext cx="10058400" cy="640080"/>
-          </a:xfrm>
-          <a:prstGeom prst="rect">
-            <a:avLst/>
-          </a:prstGeom>
-          <a:noFill/>
-        </p:spPr>
-        <p:txBody>
-          <a:bodyPr wrap="square">
-            <a:spAutoFit/>
-          </a:bodyPr>
-          <a:lstStyle/>
-          <a:p>
-            <a:pPr algn="l">
-              <a:defRPr sz="2600" b="1">
-                <a:solidFill>
-                  <a:srgbClr val="FFFFFF"/>
-                </a:solidFill>
-                <a:latin typeface="Calibri"/>
-              </a:defRPr>
-            </a:pPr>
-            <a:r>
-              <a:t>Trading Utility: Equity Curve &amp; Drawdown</a:t>
-            </a:r>
-          </a:p>
-        </p:txBody>
-      </p:sp>
-      <p:sp>
-        <p:nvSpPr>
-          <p:cNvPr id="4" name="Rectangle 3"/>
-          <p:cNvSpPr/>
-          <p:nvPr/>
-        </p:nvSpPr>
-        <p:spPr>
-          <a:xfrm>
-            <a:off x="0" y="914400"/>
-            <a:ext cx="12191695" cy="36576"/>
-          </a:xfrm>
-          <a:prstGeom prst="rect">
-            <a:avLst/>
-          </a:prstGeom>
-          <a:solidFill>
-            <a:srgbClr val="D4A01E"/>
-          </a:solidFill>
-          <a:ln>
-            <a:noFill/>
-          </a:ln>
-        </p:spPr>
-        <p:style>
-          <a:lnRef idx="1">
-            <a:schemeClr val="accent1"/>
-          </a:lnRef>
-          <a:fillRef idx="3">
-            <a:schemeClr val="accent1"/>
-          </a:fillRef>
-          <a:effectRef idx="2">
-            <a:schemeClr val="accent1"/>
-          </a:effectRef>
-          <a:fontRef idx="minor">
-            <a:schemeClr val="lt1"/>
-          </a:fontRef>
-        </p:style>
-        <p:txBody>
-          <a:bodyPr rtlCol="0" anchor="ctr"/>
-          <a:lstStyle/>
-          <a:p>
-            <a:pPr algn="ctr"/>
-          </a:p>
-        </p:txBody>
-      </p:sp>
-      <p:pic>
-        <p:nvPicPr>
-          <p:cNvPr id="5" name="Picture 4" descr="02F_01_cumulative_returns.png"/>
-          <p:cNvPicPr>
-            <a:picLocks noChangeAspect="1"/>
-          </p:cNvPicPr>
-          <p:nvPr/>
-        </p:nvPicPr>
-        <p:blipFill>
-          <a:blip r:embed="rId2"/>
-          <a:stretch>
-            <a:fillRect/>
-          </a:stretch>
-        </p:blipFill>
-        <p:spPr>
-          <a:xfrm>
-            <a:off x="457200" y="1188720"/>
-            <a:ext cx="5486400" cy="2162612"/>
-          </a:xfrm>
-          <a:prstGeom prst="rect">
-            <a:avLst/>
-          </a:prstGeom>
-        </p:spPr>
-      </p:pic>
-      <p:pic>
-        <p:nvPicPr>
-          <p:cNvPr id="6" name="Picture 5" descr="02F_02_drawdown.png"/>
-          <p:cNvPicPr>
-            <a:picLocks noChangeAspect="1"/>
-          </p:cNvPicPr>
-          <p:nvPr/>
-        </p:nvPicPr>
-        <p:blipFill>
-          <a:blip r:embed="rId3"/>
-          <a:stretch>
-            <a:fillRect/>
-          </a:stretch>
-        </p:blipFill>
-        <p:spPr>
-          <a:xfrm>
-            <a:off x="6217920" y="1188720"/>
-            <a:ext cx="5486400" cy="1797057"/>
-          </a:xfrm>
-          <a:prstGeom prst="rect">
-            <a:avLst/>
-          </a:prstGeom>
-        </p:spPr>
-      </p:pic>
-      <p:sp>
-        <p:nvSpPr>
-          <p:cNvPr id="7" name="Rectangle 6"/>
-          <p:cNvSpPr/>
-          <p:nvPr/>
-        </p:nvSpPr>
-        <p:spPr>
-          <a:xfrm>
-            <a:off x="457200" y="5120640"/>
-            <a:ext cx="11155680" cy="1097280"/>
-          </a:xfrm>
-          <a:prstGeom prst="rect">
-            <a:avLst/>
-          </a:prstGeom>
-          <a:solidFill>
-            <a:srgbClr val="1B3A5C"/>
-          </a:solidFill>
-          <a:ln>
-            <a:noFill/>
-          </a:ln>
-        </p:spPr>
-        <p:style>
-          <a:lnRef idx="1">
-            <a:schemeClr val="accent1"/>
-          </a:lnRef>
-          <a:fillRef idx="3">
-            <a:schemeClr val="accent1"/>
-          </a:fillRef>
-          <a:effectRef idx="2">
-            <a:schemeClr val="accent1"/>
-          </a:effectRef>
-          <a:fontRef idx="minor">
-            <a:schemeClr val="lt1"/>
-          </a:fontRef>
-        </p:style>
-        <p:txBody>
-          <a:bodyPr rtlCol="0" anchor="ctr"/>
-          <a:lstStyle/>
-          <a:p>
-            <a:pPr algn="ctr"/>
-          </a:p>
-        </p:txBody>
-      </p:sp>
-      <p:sp>
-        <p:nvSpPr>
-          <p:cNvPr id="8" name="TextBox 7"/>
-          <p:cNvSpPr txBox="1"/>
-          <p:nvPr/>
-        </p:nvSpPr>
-        <p:spPr>
-          <a:xfrm>
-            <a:off x="640080" y="5212080"/>
-            <a:ext cx="10789920" cy="914400"/>
-          </a:xfrm>
-          <a:prstGeom prst="rect">
-            <a:avLst/>
-          </a:prstGeom>
-          <a:noFill/>
-        </p:spPr>
-        <p:txBody>
-          <a:bodyPr wrap="square">
-            <a:spAutoFit/>
-          </a:bodyPr>
-          <a:lstStyle/>
-          <a:p>
-            <a:pPr algn="ctr">
-              <a:defRPr sz="1800" b="1">
-                <a:solidFill>
-                  <a:srgbClr val="FFFFFF"/>
-                </a:solidFill>
-                <a:latin typeface="Calibri"/>
-              </a:defRPr>
-            </a:pPr>
-            <a:r>
-              <a:t>Learned Meta Ridge: Sharpe 8.10  |  Return +10.5%  |  Max DD −0.8%  |  DHR 0.681</a:t>
-            </a:r>
-            <a:br/>
-            <a:r>
-              <a:t>Buy-and-Hold: Sharpe 6.09  |  Return +8.2%  →  Meta-Signal beats passive benchmark</a:t>
-            </a:r>
-          </a:p>
-        </p:txBody>
-      </p:sp>
-    </p:spTree>
-  </p:cSld>
-  <p:clrMapOvr>
-    <a:masterClrMapping/>
-  </p:clrMapOvr>
-</p:sld>
-</file>
-
-<file path=ppt/slides/slide12.xml><?xml version="1.0" encoding="utf-8"?>
-<p:sld xmlns:a="http://schemas.openxmlformats.org/drawingml/2006/main" xmlns:p="http://schemas.openxmlformats.org/presentationml/2006/main" xmlns:r="http://schemas.openxmlformats.org/officeDocument/2006/relationships">
-  <p:cSld>
-    <p:bg>
-      <p:bgPr>
-        <a:solidFill>
-          <a:srgbClr val="FFFFFF"/>
-        </a:solidFill>
-        <a:effectLst/>
-      </p:bgPr>
-    </p:bg>
-    <p:spTree>
-      <p:nvGrpSpPr>
-        <p:cNvPr id="1" name=""/>
-        <p:cNvGrpSpPr/>
-        <p:nvPr/>
-      </p:nvGrpSpPr>
-      <p:grpSpPr/>
-      <p:sp>
-        <p:nvSpPr>
-          <p:cNvPr id="2" name="Rectangle 1"/>
-          <p:cNvSpPr/>
-          <p:nvPr/>
-        </p:nvSpPr>
-        <p:spPr>
-          <a:xfrm>
-            <a:off x="0" y="0"/>
-            <a:ext cx="12191695" cy="914400"/>
-          </a:xfrm>
-          <a:prstGeom prst="rect">
-            <a:avLst/>
-          </a:prstGeom>
-          <a:solidFill>
-            <a:srgbClr val="1B3A5C"/>
-          </a:solidFill>
-          <a:ln>
-            <a:noFill/>
-          </a:ln>
-        </p:spPr>
-        <p:style>
-          <a:lnRef idx="1">
-            <a:schemeClr val="accent1"/>
-          </a:lnRef>
-          <a:fillRef idx="3">
-            <a:schemeClr val="accent1"/>
-          </a:fillRef>
-          <a:effectRef idx="2">
-            <a:schemeClr val="accent1"/>
-          </a:effectRef>
-          <a:fontRef idx="minor">
-            <a:schemeClr val="lt1"/>
-          </a:fontRef>
-        </p:style>
-        <p:txBody>
-          <a:bodyPr rtlCol="0" anchor="ctr"/>
-          <a:lstStyle/>
-          <a:p>
-            <a:pPr algn="ctr"/>
-          </a:p>
-        </p:txBody>
-      </p:sp>
-      <p:sp>
-        <p:nvSpPr>
-          <p:cNvPr id="3" name="TextBox 2"/>
-          <p:cNvSpPr txBox="1"/>
-          <p:nvPr/>
-        </p:nvSpPr>
-        <p:spPr>
-          <a:xfrm>
-            <a:off x="548640" y="137160"/>
-            <a:ext cx="10058400" cy="640080"/>
-          </a:xfrm>
-          <a:prstGeom prst="rect">
-            <a:avLst/>
-          </a:prstGeom>
-          <a:noFill/>
-        </p:spPr>
-        <p:txBody>
-          <a:bodyPr wrap="square">
-            <a:spAutoFit/>
-          </a:bodyPr>
-          <a:lstStyle/>
-          <a:p>
-            <a:pPr algn="l">
-              <a:defRPr sz="2600" b="1">
-                <a:solidFill>
-                  <a:srgbClr val="FFFFFF"/>
-                </a:solidFill>
-                <a:latin typeface="Calibri"/>
-              </a:defRPr>
-            </a:pPr>
-            <a:r>
-              <a:t>Limitations &amp; Future Work</a:t>
-            </a:r>
-          </a:p>
-        </p:txBody>
-      </p:sp>
-      <p:sp>
-        <p:nvSpPr>
-          <p:cNvPr id="4" name="Rectangle 3"/>
-          <p:cNvSpPr/>
-          <p:nvPr/>
-        </p:nvSpPr>
-        <p:spPr>
-          <a:xfrm>
-            <a:off x="0" y="914400"/>
-            <a:ext cx="12191695" cy="36576"/>
-          </a:xfrm>
-          <a:prstGeom prst="rect">
-            <a:avLst/>
-          </a:prstGeom>
-          <a:solidFill>
-            <a:srgbClr val="D4A01E"/>
-          </a:solidFill>
-          <a:ln>
-            <a:noFill/>
-          </a:ln>
-        </p:spPr>
-        <p:style>
-          <a:lnRef idx="1">
-            <a:schemeClr val="accent1"/>
-          </a:lnRef>
-          <a:fillRef idx="3">
-            <a:schemeClr val="accent1"/>
-          </a:fillRef>
-          <a:effectRef idx="2">
-            <a:schemeClr val="accent1"/>
-          </a:effectRef>
-          <a:fontRef idx="minor">
-            <a:schemeClr val="lt1"/>
-          </a:fontRef>
-        </p:style>
-        <p:txBody>
-          <a:bodyPr rtlCol="0" anchor="ctr"/>
-          <a:lstStyle/>
-          <a:p>
-            <a:pPr algn="ctr"/>
-          </a:p>
-        </p:txBody>
-      </p:sp>
-      <p:sp>
-        <p:nvSpPr>
-          <p:cNvPr id="5" name="TextBox 4"/>
-          <p:cNvSpPr txBox="1"/>
-          <p:nvPr/>
-        </p:nvSpPr>
-        <p:spPr>
-          <a:xfrm>
-            <a:off x="548640" y="1188720"/>
-            <a:ext cx="5029200" cy="365760"/>
-          </a:xfrm>
-          <a:prstGeom prst="rect">
-            <a:avLst/>
-          </a:prstGeom>
-          <a:noFill/>
-        </p:spPr>
-        <p:txBody>
-          <a:bodyPr wrap="square">
-            <a:spAutoFit/>
-          </a:bodyPr>
-          <a:lstStyle/>
-          <a:p>
-            <a:pPr algn="l">
-              <a:defRPr sz="2000" b="1">
-                <a:solidFill>
-                  <a:srgbClr val="C0392B"/>
-                </a:solidFill>
-                <a:latin typeface="Calibri"/>
-              </a:defRPr>
-            </a:pPr>
-            <a:r>
-              <a:t>Limitations</a:t>
-            </a:r>
-          </a:p>
-        </p:txBody>
-      </p:sp>
-      <p:sp>
-        <p:nvSpPr>
-          <p:cNvPr id="6" name="TextBox 5"/>
-          <p:cNvSpPr txBox="1"/>
-          <p:nvPr/>
-        </p:nvSpPr>
-        <p:spPr>
-          <a:xfrm>
-            <a:off x="548640" y="1645920"/>
-            <a:ext cx="5029200" cy="3200400"/>
-          </a:xfrm>
-          <a:prstGeom prst="rect">
-            <a:avLst/>
-          </a:prstGeom>
-          <a:noFill/>
-        </p:spPr>
-        <p:txBody>
-          <a:bodyPr wrap="square">
-            <a:spAutoFit/>
-          </a:bodyPr>
-          <a:lstStyle/>
-          <a:p>
-            <a:pPr>
-              <a:spcBef>
-                <a:spcPts val="400"/>
-              </a:spcBef>
-              <a:spcAft>
-                <a:spcPts val="200"/>
-              </a:spcAft>
-            </a:pPr>
-            <a:r>
-              <a:rPr sz="1600">
-                <a:solidFill>
-                  <a:srgbClr val="2C2C2C"/>
-                </a:solidFill>
-                <a:latin typeface="Calibri"/>
-              </a:rPr>
-              <a:t>• No transaction costs/slippage in backtest → Sharpe overstated in live trading</a:t>
-            </a:r>
-          </a:p>
-          <a:p>
-            <a:pPr>
-              <a:spcBef>
-                <a:spcPts val="400"/>
-              </a:spcBef>
-              <a:spcAft>
-                <a:spcPts val="200"/>
-              </a:spcAft>
-            </a:pPr>
-            <a:r>
-              <a:rPr sz="1600">
-                <a:solidFill>
-                  <a:srgbClr val="2C2C2C"/>
-                </a:solidFill>
-                <a:latin typeface="Calibri"/>
-              </a:rPr>
-              <a:t>• Static cluster topology — correlations evolve over time</a:t>
-            </a:r>
-          </a:p>
-          <a:p>
-            <a:pPr>
-              <a:spcBef>
-                <a:spcPts val="400"/>
-              </a:spcBef>
-              <a:spcAft>
-                <a:spcPts val="200"/>
-              </a:spcAft>
-            </a:pPr>
-            <a:r>
-              <a:rPr sz="1600">
-                <a:solidFill>
-                  <a:srgbClr val="2C2C2C"/>
-                </a:solidFill>
-                <a:latin typeface="Calibri"/>
-              </a:rPr>
-              <a:t>• Headline API coverage uneven vs institutional feeds</a:t>
-            </a:r>
-          </a:p>
-          <a:p>
-            <a:pPr>
-              <a:spcBef>
-                <a:spcPts val="400"/>
-              </a:spcBef>
-              <a:spcAft>
-                <a:spcPts val="200"/>
-              </a:spcAft>
-            </a:pPr>
-            <a:r>
-              <a:rPr sz="1600">
-                <a:solidFill>
-                  <a:srgbClr val="2C2C2C"/>
-                </a:solidFill>
-                <a:latin typeface="Calibri"/>
-              </a:rPr>
-              <a:t>• Test period = broadly bullish — bear regime performance untested</a:t>
-            </a:r>
-          </a:p>
-        </p:txBody>
-      </p:sp>
-      <p:sp>
-        <p:nvSpPr>
-          <p:cNvPr id="7" name="TextBox 6"/>
-          <p:cNvSpPr txBox="1"/>
-          <p:nvPr/>
-        </p:nvSpPr>
-        <p:spPr>
-          <a:xfrm>
-            <a:off x="6400800" y="1188720"/>
-            <a:ext cx="5303520" cy="365760"/>
-          </a:xfrm>
-          <a:prstGeom prst="rect">
-            <a:avLst/>
-          </a:prstGeom>
-          <a:noFill/>
-        </p:spPr>
-        <p:txBody>
-          <a:bodyPr wrap="square">
-            <a:spAutoFit/>
-          </a:bodyPr>
-          <a:lstStyle/>
-          <a:p>
-            <a:pPr algn="l">
-              <a:defRPr sz="2000" b="1">
-                <a:solidFill>
-                  <a:srgbClr val="27AE60"/>
-                </a:solidFill>
-                <a:latin typeface="Calibri"/>
-              </a:defRPr>
-            </a:pPr>
-            <a:r>
-              <a:t>Future Work</a:t>
-            </a:r>
-          </a:p>
-        </p:txBody>
-      </p:sp>
-      <p:sp>
-        <p:nvSpPr>
-          <p:cNvPr id="8" name="TextBox 7"/>
-          <p:cNvSpPr txBox="1"/>
-          <p:nvPr/>
-        </p:nvSpPr>
-        <p:spPr>
-          <a:xfrm>
-            <a:off x="6400800" y="1645920"/>
-            <a:ext cx="5303520" cy="3200400"/>
-          </a:xfrm>
-          <a:prstGeom prst="rect">
-            <a:avLst/>
-          </a:prstGeom>
-          <a:noFill/>
-        </p:spPr>
-        <p:txBody>
-          <a:bodyPr wrap="square">
-            <a:spAutoFit/>
-          </a:bodyPr>
-          <a:lstStyle/>
-          <a:p>
-            <a:pPr>
-              <a:spcBef>
-                <a:spcPts val="400"/>
-              </a:spcBef>
-              <a:spcAft>
-                <a:spcPts val="200"/>
-              </a:spcAft>
-            </a:pPr>
-            <a:r>
-              <a:rPr sz="1600">
-                <a:solidFill>
-                  <a:srgbClr val="2C2C2C"/>
-                </a:solidFill>
-                <a:latin typeface="Calibri"/>
-              </a:rPr>
-              <a:t>• Dynamic/online clustering — rolling-window K-Means updates</a:t>
-            </a:r>
-          </a:p>
-          <a:p>
-            <a:pPr>
-              <a:spcBef>
-                <a:spcPts val="400"/>
-              </a:spcBef>
-              <a:spcAft>
-                <a:spcPts val="200"/>
-              </a:spcAft>
-            </a:pPr>
-            <a:r>
-              <a:rPr sz="1600">
-                <a:solidFill>
-                  <a:srgbClr val="2C2C2C"/>
-                </a:solidFill>
-                <a:latin typeface="Calibri"/>
-              </a:rPr>
-              <a:t>• Regime-adaptive decay — VIX-conditioned λ function</a:t>
-            </a:r>
-          </a:p>
-          <a:p>
-            <a:pPr>
-              <a:spcBef>
-                <a:spcPts val="400"/>
-              </a:spcBef>
-              <a:spcAft>
-                <a:spcPts val="200"/>
-              </a:spcAft>
-            </a:pPr>
-            <a:r>
-              <a:rPr sz="1600">
-                <a:solidFill>
-                  <a:srgbClr val="2C2C2C"/>
-                </a:solidFill>
-                <a:latin typeface="Calibri"/>
-              </a:rPr>
-              <a:t>• Uncertainty-aware predictions — conformal intervals for position sizing</a:t>
-            </a:r>
-          </a:p>
-          <a:p>
-            <a:pPr>
-              <a:spcBef>
-                <a:spcPts val="400"/>
-              </a:spcBef>
-              <a:spcAft>
-                <a:spcPts val="200"/>
-              </a:spcAft>
-            </a:pPr>
-            <a:r>
-              <a:rPr sz="1600">
-                <a:solidFill>
-                  <a:srgbClr val="2C2C2C"/>
-                </a:solidFill>
-                <a:latin typeface="Calibri"/>
-              </a:rPr>
-              <a:t>• Latency-aware sentiment — intraday news timestamp modelling</a:t>
-            </a:r>
-          </a:p>
-          <a:p>
-            <a:pPr>
-              <a:spcBef>
-                <a:spcPts val="400"/>
-              </a:spcBef>
-              <a:spcAft>
-                <a:spcPts val="200"/>
-              </a:spcAft>
-            </a:pPr>
-            <a:r>
-              <a:rPr sz="1600">
-                <a:solidFill>
-                  <a:srgbClr val="2C2C2C"/>
-                </a:solidFill>
-                <a:latin typeface="Calibri"/>
-              </a:rPr>
-              <a:t>• Alternative data — earnings transcripts, satellite, options IV</a:t>
-            </a:r>
-          </a:p>
-        </p:txBody>
-      </p:sp>
-      <p:sp>
-        <p:nvSpPr>
-          <p:cNvPr id="9" name="Rectangle 8"/>
-          <p:cNvSpPr/>
-          <p:nvPr/>
-        </p:nvSpPr>
-        <p:spPr>
-          <a:xfrm>
-            <a:off x="457200" y="5120640"/>
-            <a:ext cx="11155680" cy="914400"/>
-          </a:xfrm>
-          <a:prstGeom prst="rect">
-            <a:avLst/>
-          </a:prstGeom>
-          <a:solidFill>
-            <a:srgbClr val="FEF5E7"/>
-          </a:solidFill>
-          <a:ln>
-            <a:noFill/>
-          </a:ln>
-        </p:spPr>
-        <p:style>
-          <a:lnRef idx="1">
-            <a:schemeClr val="accent1"/>
-          </a:lnRef>
-          <a:fillRef idx="3">
-            <a:schemeClr val="accent1"/>
-          </a:fillRef>
-          <a:effectRef idx="2">
-            <a:schemeClr val="accent1"/>
-          </a:effectRef>
-          <a:fontRef idx="minor">
-            <a:schemeClr val="lt1"/>
-          </a:fontRef>
-        </p:style>
-        <p:txBody>
-          <a:bodyPr rtlCol="0" anchor="ctr"/>
-          <a:lstStyle/>
-          <a:p>
-            <a:pPr algn="ctr"/>
-          </a:p>
-        </p:txBody>
-      </p:sp>
-      <p:sp>
-        <p:nvSpPr>
-          <p:cNvPr id="10" name="TextBox 9"/>
-          <p:cNvSpPr txBox="1"/>
-          <p:nvPr/>
-        </p:nvSpPr>
-        <p:spPr>
-          <a:xfrm>
-            <a:off x="640080" y="5212080"/>
-            <a:ext cx="10789920" cy="731520"/>
-          </a:xfrm>
-          <a:prstGeom prst="rect">
-            <a:avLst/>
-          </a:prstGeom>
-          <a:noFill/>
-        </p:spPr>
-        <p:txBody>
-          <a:bodyPr wrap="square">
-            <a:spAutoFit/>
-          </a:bodyPr>
-          <a:lstStyle/>
-          <a:p>
-            <a:pPr algn="l">
-              <a:defRPr sz="1400" b="0">
-                <a:solidFill>
-                  <a:srgbClr val="2C2C2C"/>
-                </a:solidFill>
-                <a:latin typeface="Calibri"/>
-              </a:defRPr>
-            </a:pPr>
-            <a:r>
-              <a:t>Hong Kong Context: This framework is directly applicable to HKEX stocks — cross-listing dynamics (A/H shares), Hang Seng Index constituents, and regional sentiment from SCMP/Caixin news feeds could strengthen the cluster routing layer.</a:t>
-            </a:r>
-          </a:p>
-        </p:txBody>
-      </p:sp>
-    </p:spTree>
-  </p:cSld>
-  <p:clrMapOvr>
-    <a:masterClrMapping/>
-  </p:clrMapOvr>
-</p:sld>
-</file>
-
-<file path=ppt/slides/slide13.xml><?xml version="1.0" encoding="utf-8"?>
 <p:sld xmlns:a="http://schemas.openxmlformats.org/drawingml/2006/main" xmlns:p="http://schemas.openxmlformats.org/presentationml/2006/main" xmlns:r="http://schemas.openxmlformats.org/officeDocument/2006/relationships">
   <p:cSld>
     <p:bg>
@@ -6487,8 +4490,8 @@
         </p:nvSpPr>
         <p:spPr>
           <a:xfrm>
-            <a:off x="731520" y="731520"/>
-            <a:ext cx="10515600" cy="731520"/>
+            <a:off x="731520" y="822960"/>
+            <a:ext cx="10789920" cy="731520"/>
           </a:xfrm>
           <a:prstGeom prst="rect">
             <a:avLst/>
@@ -6523,7 +4526,7 @@
         </p:nvSpPr>
         <p:spPr>
           <a:xfrm>
-            <a:off x="731520" y="1554480"/>
+            <a:off x="731520" y="1600200"/>
             <a:ext cx="2743200" cy="36576"/>
           </a:xfrm>
           <a:prstGeom prst="rect">
@@ -6566,8 +4569,8 @@
         </p:nvSpPr>
         <p:spPr>
           <a:xfrm>
-            <a:off x="731520" y="1828800"/>
-            <a:ext cx="10515600" cy="4114800"/>
+            <a:off x="731520" y="1920240"/>
+            <a:ext cx="10789920" cy="3291840"/>
           </a:xfrm>
           <a:prstGeom prst="rect">
             <a:avLst/>
@@ -6581,97 +4584,66 @@
           <a:lstStyle/>
           <a:p>
             <a:pPr>
-              <a:spcBef>
-                <a:spcPts val="400"/>
-              </a:spcBef>
               <a:spcAft>
-                <a:spcPts val="200"/>
+                <a:spcPts val="300"/>
               </a:spcAft>
-            </a:pPr>
-            <a:r>
-              <a:rPr sz="1800">
+              <a:defRPr sz="1900">
                 <a:solidFill>
                   <a:srgbClr val="FFFFFF"/>
                 </a:solidFill>
                 <a:latin typeface="Calibri"/>
-              </a:rPr>
-              <a:t>• Core thesis validated: Clustering as signal router measurably improves both accuracy and trading utility</a:t>
+              </a:defRPr>
+            </a:pPr>
+            <a:r>
+              <a:t>- Design A (Cluster News) improves information coverage under sparse news conditions.</a:t>
             </a:r>
           </a:p>
           <a:p>
             <a:pPr>
-              <a:spcBef>
-                <a:spcPts val="400"/>
-              </a:spcBef>
               <a:spcAft>
-                <a:spcPts val="200"/>
+                <a:spcPts val="300"/>
               </a:spcAft>
-            </a:pPr>
-            <a:r>
-              <a:rPr sz="1800">
+              <a:defRPr sz="1900">
                 <a:solidFill>
                   <a:srgbClr val="FFFFFF"/>
                 </a:solidFill>
                 <a:latin typeface="Calibri"/>
-              </a:rPr>
-              <a:t>• Innovation 1: Cluster-routed sentiment fills news-sparse days → 46-47% MAE reduction for AMZN/GOOG</a:t>
+              </a:defRPr>
+            </a:pPr>
+            <a:r>
+              <a:t>- Design B (Multi-Meta Prediction) improves risk-adjusted trading outcomes.</a:t>
             </a:r>
           </a:p>
           <a:p>
             <a:pPr>
-              <a:spcBef>
-                <a:spcPts val="400"/>
-              </a:spcBef>
               <a:spcAft>
-                <a:spcPts val="200"/>
+                <a:spcPts val="300"/>
               </a:spcAft>
-            </a:pPr>
-            <a:r>
-              <a:rPr sz="1800">
+              <a:defRPr sz="1900">
                 <a:solidFill>
                   <a:srgbClr val="FFFFFF"/>
                 </a:solidFill>
                 <a:latin typeface="Calibri"/>
-              </a:rPr>
-              <a:t>• Innovation 2: Multi-horizon meta-signal → Sharpe 8.10 (vs 6.09 buy-and-hold), MaxDD −0.8%</a:t>
+              </a:defRPr>
+            </a:pPr>
+            <a:r>
+              <a:t>- Combined system delivers gains in both predictive and deployment-facing metrics.</a:t>
             </a:r>
           </a:p>
           <a:p>
             <a:pPr>
-              <a:spcBef>
-                <a:spcPts val="400"/>
-              </a:spcBef>
               <a:spcAft>
-                <a:spcPts val="200"/>
+                <a:spcPts val="300"/>
               </a:spcAft>
-            </a:pPr>
-            <a:r>
-              <a:rPr sz="1800">
+              <a:defRPr sz="1900">
                 <a:solidFill>
                   <a:srgbClr val="FFFFFF"/>
                 </a:solidFill>
                 <a:latin typeface="Calibri"/>
-              </a:rPr>
-              <a:t>• XGBoost &gt; LSTM/GRU under financial data constraints (limited per-ticker samples, temporal splitting)</a:t>
-            </a:r>
-          </a:p>
-          <a:p>
-            <a:pPr>
-              <a:spcBef>
-                <a:spcPts val="400"/>
-              </a:spcBef>
-              <a:spcAft>
-                <a:spcPts val="200"/>
-              </a:spcAft>
-            </a:pPr>
-            <a:r>
-              <a:rPr sz="1800">
-                <a:solidFill>
-                  <a:srgbClr val="FFFFFF"/>
-                </a:solidFill>
-                <a:latin typeface="Calibri"/>
-              </a:rPr>
-              <a:t>• Dual evaluation protocol: Point-wise (MAE/R²) + Deployment utility (Sharpe/DHR/Drawdown)</a:t>
+              </a:defRPr>
+            </a:pPr>
+            <a:r>
+              <a:t>- Evidence is promising, but deployment recommendation remains controlled and staged.</a:t>
             </a:r>
           </a:p>
         </p:txBody>
@@ -6684,8 +4656,8 @@
         </p:nvSpPr>
         <p:spPr>
           <a:xfrm>
-            <a:off x="731520" y="5029200"/>
-            <a:ext cx="10515600" cy="914400"/>
+            <a:off x="731520" y="5212080"/>
+            <a:ext cx="10789920" cy="1005840"/>
           </a:xfrm>
           <a:prstGeom prst="rect">
             <a:avLst/>
@@ -6727,8 +4699,8 @@
         </p:nvSpPr>
         <p:spPr>
           <a:xfrm>
-            <a:off x="914400" y="5166360"/>
-            <a:ext cx="10149840" cy="640080"/>
+            <a:off x="914400" y="5440680"/>
+            <a:ext cx="10424160" cy="731520"/>
           </a:xfrm>
           <a:prstGeom prst="rect">
             <a:avLst/>
@@ -6750,11 +4722,7 @@
               </a:defRPr>
             </a:pPr>
             <a:r>
-              <a:t>"Clustering is not only an unsupervised analysis module — it functions as a structural signal router</a:t>
-            </a:r>
-            <a:br/>
-            <a:r>
-              <a:t>that converts sparse individual-news streams into cluster-informed predictive features."</a:t>
+              <a:t>Core thesis: clustering serves as a structural signal router, not only an unsupervised analysis block.</a:t>
             </a:r>
           </a:p>
         </p:txBody>
@@ -6767,7 +4735,7 @@
 </p:sld>
 </file>
 
-<file path=ppt/slides/slide14.xml><?xml version="1.0" encoding="utf-8"?>
+<file path=ppt/slides/slide11.xml><?xml version="1.0" encoding="utf-8"?>
 <p:sld xmlns:a="http://schemas.openxmlformats.org/drawingml/2006/main" xmlns:p="http://schemas.openxmlformats.org/presentationml/2006/main" xmlns:r="http://schemas.openxmlformats.org/officeDocument/2006/relationships">
   <p:cSld>
     <p:bg>
@@ -6793,8 +4761,8 @@
         </p:nvSpPr>
         <p:spPr>
           <a:xfrm>
-            <a:off x="731520" y="1828800"/>
-            <a:ext cx="10515600" cy="1097280"/>
+            <a:off x="731520" y="1645920"/>
+            <a:ext cx="10789920" cy="1005840"/>
           </a:xfrm>
           <a:prstGeom prst="rect">
             <a:avLst/>
@@ -6808,7 +4776,7 @@
           <a:lstStyle/>
           <a:p>
             <a:pPr algn="ctr">
-              <a:defRPr sz="4200" b="1">
+              <a:defRPr sz="4400" b="1">
                 <a:solidFill>
                   <a:srgbClr val="FFFFFF"/>
                 </a:solidFill>
@@ -6816,7 +4784,7 @@
               </a:defRPr>
             </a:pPr>
             <a:r>
-              <a:t>Thank You — Questions?</a:t>
+              <a:t>Thank You - Q&amp;A</a:t>
             </a:r>
           </a:p>
         </p:txBody>
@@ -6829,8 +4797,8 @@
         </p:nvSpPr>
         <p:spPr>
           <a:xfrm>
-            <a:off x="4754880" y="3200400"/>
-            <a:ext cx="2743200" cy="36576"/>
+            <a:off x="4572000" y="3017520"/>
+            <a:ext cx="2926080" cy="36576"/>
           </a:xfrm>
           <a:prstGeom prst="rect">
             <a:avLst/>
@@ -6873,7 +4841,7 @@
         <p:spPr>
           <a:xfrm>
             <a:off x="731520" y="3657600"/>
-            <a:ext cx="10515600" cy="548640"/>
+            <a:ext cx="10789920" cy="457200"/>
           </a:xfrm>
           <a:prstGeom prst="rect">
             <a:avLst/>
@@ -6887,15 +4855,15 @@
           <a:lstStyle/>
           <a:p>
             <a:pPr algn="ctr">
-              <a:defRPr sz="1800" b="0">
-                <a:solidFill>
-                  <a:srgbClr val="AAAAAA"/>
-                </a:solidFill>
-                <a:latin typeface="Calibri"/>
-              </a:defRPr>
-            </a:pPr>
-            <a:r>
-              <a:t>CHIU Yee Lok  |  25012923G  |  COMP5564 ML in Finance  |  April 2026</a:t>
+              <a:defRPr sz="1800" b="1">
+                <a:solidFill>
+                  <a:srgbClr val="D4A01E"/>
+                </a:solidFill>
+                <a:latin typeface="Calibri"/>
+              </a:defRPr>
+            </a:pPr>
+            <a:r>
+              <a:t>Backup metrics for discussion</a:t>
             </a:r>
           </a:p>
         </p:txBody>
@@ -6908,8 +4876,8 @@
         </p:nvSpPr>
         <p:spPr>
           <a:xfrm>
-            <a:off x="731520" y="4754880"/>
-            <a:ext cx="10515600" cy="365760"/>
+            <a:off x="1097280" y="4297680"/>
+            <a:ext cx="9966960" cy="1645920"/>
           </a:xfrm>
           <a:prstGeom prst="rect">
             <a:avLst/>
@@ -6922,96 +4890,51 @@
           </a:bodyPr>
           <a:lstStyle/>
           <a:p>
-            <a:pPr algn="l">
-              <a:defRPr sz="1600" b="1">
-                <a:solidFill>
-                  <a:srgbClr val="D4A01E"/>
-                </a:solidFill>
-                <a:latin typeface="Calibri"/>
-              </a:defRPr>
-            </a:pPr>
-            <a:r>
-              <a:t>Quick Reference (Backup)</a:t>
-            </a:r>
-          </a:p>
-        </p:txBody>
-      </p:sp>
-      <p:sp>
-        <p:nvSpPr>
-          <p:cNvPr id="6" name="TextBox 5"/>
-          <p:cNvSpPr txBox="1"/>
-          <p:nvPr/>
-        </p:nvSpPr>
-        <p:spPr>
-          <a:xfrm>
-            <a:off x="731520" y="5120640"/>
-            <a:ext cx="10515600" cy="1371600"/>
-          </a:xfrm>
-          <a:prstGeom prst="rect">
-            <a:avLst/>
-          </a:prstGeom>
-          <a:noFill/>
-        </p:spPr>
-        <p:txBody>
-          <a:bodyPr wrap="square">
-            <a:spAutoFit/>
-          </a:bodyPr>
-          <a:lstStyle/>
-          <a:p>
             <a:pPr>
-              <a:spcBef>
-                <a:spcPts val="400"/>
-              </a:spcBef>
               <a:spcAft>
-                <a:spcPts val="200"/>
+                <a:spcPts val="300"/>
               </a:spcAft>
-            </a:pPr>
-            <a:r>
-              <a:rPr sz="1300">
+              <a:defRPr sz="1400">
                 <a:solidFill>
                   <a:srgbClr val="CCCCCC"/>
                 </a:solidFill>
                 <a:latin typeface="Calibri"/>
-              </a:rPr>
-              <a:t>• 02D Stacked: MAE=0.918, R²=0.9997, DHR=0.515   |   Best per-stock: MSFT MAE=0.594</a:t>
+              </a:defRPr>
+            </a:pPr>
+            <a:r>
+              <a:t>- Regression: MAE 0.918, R2 0.999688, DHR 0.515.</a:t>
             </a:r>
           </a:p>
           <a:p>
             <a:pPr>
-              <a:spcBef>
-                <a:spcPts val="400"/>
-              </a:spcBef>
               <a:spcAft>
-                <a:spcPts val="200"/>
+                <a:spcPts val="300"/>
               </a:spcAft>
-            </a:pPr>
-            <a:r>
-              <a:rPr sz="1300">
+              <a:defRPr sz="1400">
                 <a:solidFill>
                   <a:srgbClr val="CCCCCC"/>
                 </a:solidFill>
                 <a:latin typeface="Calibri"/>
-              </a:rPr>
-              <a:t>• K-Means K=6: Composite=0.577, Sil=0.250  |  Lag-Decay: L*=10, λ*=0.2, Grid-MAE=4.838</a:t>
+              </a:defRPr>
+            </a:pPr>
+            <a:r>
+              <a:t>- Clustering: K-Means K=6, composite 0.577, zero noise ratio.</a:t>
             </a:r>
           </a:p>
           <a:p>
             <a:pPr>
-              <a:spcBef>
-                <a:spcPts val="400"/>
-              </a:spcBef>
               <a:spcAft>
-                <a:spcPts val="200"/>
+                <a:spcPts val="300"/>
               </a:spcAft>
-            </a:pPr>
-            <a:r>
-              <a:rPr sz="1300">
+              <a:defRPr sz="1400">
                 <a:solidFill>
                   <a:srgbClr val="CCCCCC"/>
                 </a:solidFill>
                 <a:latin typeface="Calibri"/>
-              </a:rPr>
-              <a:t>• Meta Ridge: Sharpe=8.10, Return=+10.5%, MaxDD=−0.8%, DHR=0.681   |   B&amp;H: Sharpe=6.09</a:t>
+              </a:defRPr>
+            </a:pPr>
+            <a:r>
+              <a:t>- Trading: Meta Ridge Sharpe 8.10, return +10.5 percent, max drawdown -0.8 percent.</a:t>
             </a:r>
           </a:p>
         </p:txBody>
@@ -7051,7 +4974,7 @@
         <p:spPr>
           <a:xfrm>
             <a:off x="0" y="0"/>
-            <a:ext cx="12191695" cy="914400"/>
+            <a:ext cx="12191695" cy="868680"/>
           </a:xfrm>
           <a:prstGeom prst="rect">
             <a:avLst/>
@@ -7087,49 +5010,13 @@
       </p:sp>
       <p:sp>
         <p:nvSpPr>
-          <p:cNvPr id="3" name="TextBox 2"/>
-          <p:cNvSpPr txBox="1"/>
-          <p:nvPr/>
-        </p:nvSpPr>
-        <p:spPr>
-          <a:xfrm>
-            <a:off x="548640" y="137160"/>
-            <a:ext cx="10058400" cy="640080"/>
-          </a:xfrm>
-          <a:prstGeom prst="rect">
-            <a:avLst/>
-          </a:prstGeom>
-          <a:noFill/>
-        </p:spPr>
-        <p:txBody>
-          <a:bodyPr wrap="square">
-            <a:spAutoFit/>
-          </a:bodyPr>
-          <a:lstStyle/>
-          <a:p>
-            <a:pPr algn="l">
-              <a:defRPr sz="2600" b="1">
-                <a:solidFill>
-                  <a:srgbClr val="FFFFFF"/>
-                </a:solidFill>
-                <a:latin typeface="Calibri"/>
-              </a:defRPr>
-            </a:pPr>
-            <a:r>
-              <a:t>Introduction &amp; Motivation</a:t>
-            </a:r>
-          </a:p>
-        </p:txBody>
-      </p:sp>
-      <p:sp>
-        <p:nvSpPr>
-          <p:cNvPr id="4" name="Rectangle 3"/>
+          <p:cNvPr id="3" name="Rectangle 2"/>
           <p:cNvSpPr/>
           <p:nvPr/>
         </p:nvSpPr>
         <p:spPr>
           <a:xfrm>
-            <a:off x="0" y="914400"/>
+            <a:off x="0" y="868680"/>
             <a:ext cx="12191695" cy="36576"/>
           </a:xfrm>
           <a:prstGeom prst="rect">
@@ -7166,14 +5053,50 @@
       </p:sp>
       <p:sp>
         <p:nvSpPr>
+          <p:cNvPr id="4" name="TextBox 3"/>
+          <p:cNvSpPr txBox="1"/>
+          <p:nvPr/>
+        </p:nvSpPr>
+        <p:spPr>
+          <a:xfrm>
+            <a:off x="548640" y="109728"/>
+            <a:ext cx="10972800" cy="548640"/>
+          </a:xfrm>
+          <a:prstGeom prst="rect">
+            <a:avLst/>
+          </a:prstGeom>
+          <a:noFill/>
+        </p:spPr>
+        <p:txBody>
+          <a:bodyPr wrap="square">
+            <a:spAutoFit/>
+          </a:bodyPr>
+          <a:lstStyle/>
+          <a:p>
+            <a:pPr algn="l">
+              <a:defRPr sz="2500" b="1">
+                <a:solidFill>
+                  <a:srgbClr val="FFFFFF"/>
+                </a:solidFill>
+                <a:latin typeface="Calibri"/>
+              </a:defRPr>
+            </a:pPr>
+            <a:r>
+              <a:t>Problem, Goal, and Presentation Blueprint</a:t>
+            </a:r>
+          </a:p>
+        </p:txBody>
+      </p:sp>
+      <p:sp>
+        <p:nvSpPr>
           <p:cNvPr id="5" name="TextBox 4"/>
           <p:cNvSpPr txBox="1"/>
           <p:nvPr/>
         </p:nvSpPr>
         <p:spPr>
           <a:xfrm>
-            <a:off x="548640" y="1188720"/>
-            <a:ext cx="5943600" cy="5029200"/>
+            <a:off x="548640" y="1097280"/>
+            <a:ext cx="5760720" cy="2926080"/>
           </a:xfrm>
           <a:prstGeom prst="rect">
             <a:avLst/>
@@ -7187,97 +5110,82 @@
           <a:lstStyle/>
           <a:p>
             <a:pPr>
-              <a:spcBef>
-                <a:spcPts val="400"/>
-              </a:spcBef>
               <a:spcAft>
-                <a:spcPts val="200"/>
+                <a:spcPts val="300"/>
               </a:spcAft>
-            </a:pPr>
-            <a:r>
-              <a:rPr sz="1700">
+              <a:defRPr sz="1600">
                 <a:solidFill>
                   <a:srgbClr val="2C2C2C"/>
                 </a:solidFill>
                 <a:latin typeface="Calibri"/>
-              </a:rPr>
-              <a:t>• S&amp;P 500 large-caps: abundant data, high news coverage, yet hard to predict</a:t>
+              </a:defRPr>
+            </a:pPr>
+            <a:r>
+              <a:t>- S&amp;P 500 prediction is nonlinear, noisy, and regime-sensitive.</a:t>
             </a:r>
           </a:p>
           <a:p>
             <a:pPr>
-              <a:spcBef>
-                <a:spcPts val="400"/>
-              </a:spcBef>
               <a:spcAft>
-                <a:spcPts val="200"/>
+                <a:spcPts val="300"/>
               </a:spcAft>
-            </a:pPr>
-            <a:r>
-              <a:rPr sz="1700">
+              <a:defRPr sz="1600">
                 <a:solidFill>
                   <a:srgbClr val="2C2C2C"/>
                 </a:solidFill>
                 <a:latin typeface="Calibri"/>
-              </a:rPr>
-              <a:t>• Classical econometrics (ARIMA, GARCH) cannot capture nonlinear dynamics</a:t>
+              </a:defRPr>
+            </a:pPr>
+            <a:r>
+              <a:t>- Classical econometrics underfits mixed technical + news signals.</a:t>
             </a:r>
           </a:p>
           <a:p>
             <a:pPr>
-              <a:spcBef>
-                <a:spcPts val="400"/>
-              </a:spcBef>
               <a:spcAft>
-                <a:spcPts val="200"/>
+                <a:spcPts val="300"/>
               </a:spcAft>
-            </a:pPr>
-            <a:r>
-              <a:rPr sz="1700">
+              <a:defRPr sz="1600">
                 <a:solidFill>
                   <a:srgbClr val="2C2C2C"/>
                 </a:solidFill>
                 <a:latin typeface="Calibri"/>
-              </a:rPr>
-              <a:t>• ML methods combine heterogeneous signals: OHLCV, sentiment, cross-sectional structure</a:t>
+              </a:defRPr>
+            </a:pPr>
+            <a:r>
+              <a:t>- Goal: improve predictive utility and tradable signal quality.</a:t>
             </a:r>
           </a:p>
           <a:p>
             <a:pPr>
-              <a:spcBef>
-                <a:spcPts val="400"/>
-              </a:spcBef>
               <a:spcAft>
-                <a:spcPts val="200"/>
+                <a:spcPts val="300"/>
               </a:spcAft>
-            </a:pPr>
-            <a:r>
-              <a:rPr sz="1700">
+              <a:defRPr sz="1600">
                 <a:solidFill>
                   <a:srgbClr val="2C2C2C"/>
                 </a:solidFill>
                 <a:latin typeface="Calibri"/>
-              </a:rPr>
-              <a:t>• Focus on 5 mega-cap stocks: AAPL, AMZN, GOOG, MSFT, NVDA</a:t>
+              </a:defRPr>
+            </a:pPr>
+            <a:r>
+              <a:t>- Scope stock universe: 505 names; focus examples: AAPL, AMZN, GOOG, MSFT, NVDA.</a:t>
             </a:r>
           </a:p>
           <a:p>
             <a:pPr>
-              <a:spcBef>
-                <a:spcPts val="400"/>
-              </a:spcBef>
               <a:spcAft>
-                <a:spcPts val="200"/>
+                <a:spcPts val="300"/>
               </a:spcAft>
-            </a:pPr>
-            <a:r>
-              <a:rPr sz="1700">
+              <a:defRPr sz="1600">
                 <a:solidFill>
                   <a:srgbClr val="2C2C2C"/>
                 </a:solidFill>
                 <a:latin typeface="Calibri"/>
-              </a:rPr>
-              <a:t>• Key question: Can cluster-aware sentiment routing improve both accuracy and trading utility?</a:t>
+              </a:defRPr>
+            </a:pPr>
+            <a:r>
+              <a:t>- Strict temporal protocol and lagged features to avoid leakage.</a:t>
             </a:r>
           </a:p>
         </p:txBody>
@@ -7290,8 +5198,8 @@
         </p:nvSpPr>
         <p:spPr>
           <a:xfrm>
-            <a:off x="6858000" y="1371600"/>
-            <a:ext cx="4754880" cy="4114800"/>
+            <a:off x="6492240" y="1097280"/>
+            <a:ext cx="5120640" cy="4114800"/>
           </a:xfrm>
           <a:prstGeom prst="rect">
             <a:avLst/>
@@ -7333,8 +5241,8 @@
         </p:nvSpPr>
         <p:spPr>
           <a:xfrm>
-            <a:off x="7040880" y="1463040"/>
-            <a:ext cx="4389120" cy="457200"/>
+            <a:off x="6675120" y="1280160"/>
+            <a:ext cx="4754880" cy="457200"/>
           </a:xfrm>
           <a:prstGeom prst="rect">
             <a:avLst/>
@@ -7356,7 +5264,7 @@
               </a:defRPr>
             </a:pPr>
             <a:r>
-              <a:t>Dataset Overview</a:t>
+              <a:t>Talk Flow</a:t>
             </a:r>
           </a:p>
         </p:txBody>
@@ -7369,8 +5277,8 @@
         </p:nvSpPr>
         <p:spPr>
           <a:xfrm>
-            <a:off x="7040880" y="2011680"/>
-            <a:ext cx="4389120" cy="3200400"/>
+            <a:off x="6675120" y="1828800"/>
+            <a:ext cx="4754880" cy="3108960"/>
           </a:xfrm>
           <a:prstGeom prst="rect">
             <a:avLst/>
@@ -7384,97 +5292,82 @@
           <a:lstStyle/>
           <a:p>
             <a:pPr>
-              <a:spcBef>
-                <a:spcPts val="400"/>
-              </a:spcBef>
               <a:spcAft>
-                <a:spcPts val="200"/>
+                <a:spcPts val="300"/>
               </a:spcAft>
-            </a:pPr>
-            <a:r>
-              <a:rPr sz="1500">
+              <a:defRPr sz="1400">
                 <a:solidFill>
                   <a:srgbClr val="2C2C2C"/>
                 </a:solidFill>
                 <a:latin typeface="Calibri"/>
-              </a:rPr>
-              <a:t>• 505 S&amp;P 500 stocks (full universe)</a:t>
+              </a:defRPr>
+            </a:pPr>
+            <a:r>
+              <a:t>- Dual-task architecture</a:t>
             </a:r>
           </a:p>
           <a:p>
             <a:pPr>
-              <a:spcBef>
-                <a:spcPts val="400"/>
-              </a:spcBef>
               <a:spcAft>
-                <a:spcPts val="200"/>
+                <a:spcPts val="300"/>
               </a:spcAft>
-            </a:pPr>
-            <a:r>
-              <a:rPr sz="1500">
+              <a:defRPr sz="1400">
                 <a:solidFill>
                   <a:srgbClr val="2C2C2C"/>
                 </a:solidFill>
                 <a:latin typeface="Calibri"/>
-              </a:rPr>
-              <a:t>• Daily OHLCV + multi-source news headlines</a:t>
+              </a:defRPr>
+            </a:pPr>
+            <a:r>
+              <a:t>- Implementation A: Cluster News design</a:t>
             </a:r>
           </a:p>
           <a:p>
             <a:pPr>
-              <a:spcBef>
-                <a:spcPts val="400"/>
-              </a:spcBef>
               <a:spcAft>
-                <a:spcPts val="200"/>
+                <a:spcPts val="300"/>
               </a:spcAft>
-            </a:pPr>
-            <a:r>
-              <a:rPr sz="1500">
+              <a:defRPr sz="1400">
                 <a:solidFill>
                   <a:srgbClr val="2C2C2C"/>
                 </a:solidFill>
                 <a:latin typeface="Calibri"/>
-              </a:rPr>
-              <a:t>• 228 test samples per stock</a:t>
+              </a:defRPr>
+            </a:pPr>
+            <a:r>
+              <a:t>- Implementation B: Multi-Meta Prediction design</a:t>
             </a:r>
           </a:p>
           <a:p>
             <a:pPr>
-              <a:spcBef>
-                <a:spcPts val="400"/>
-              </a:spcBef>
               <a:spcAft>
-                <a:spcPts val="200"/>
+                <a:spcPts val="300"/>
               </a:spcAft>
-            </a:pPr>
-            <a:r>
-              <a:rPr sz="1500">
+              <a:defRPr sz="1400">
                 <a:solidFill>
                   <a:srgbClr val="2C2C2C"/>
                 </a:solidFill>
                 <a:latin typeface="Calibri"/>
-              </a:rPr>
-              <a:t>• 70 / 15 / 15 temporal split</a:t>
+              </a:defRPr>
+            </a:pPr>
+            <a:r>
+              <a:t>- Results and robustness checks</a:t>
             </a:r>
           </a:p>
           <a:p>
             <a:pPr>
-              <a:spcBef>
-                <a:spcPts val="400"/>
-              </a:spcBef>
               <a:spcAft>
-                <a:spcPts val="200"/>
+                <a:spcPts val="300"/>
               </a:spcAft>
-            </a:pPr>
-            <a:r>
-              <a:rPr sz="1500">
+              <a:defRPr sz="1400">
                 <a:solidFill>
                   <a:srgbClr val="2C2C2C"/>
                 </a:solidFill>
                 <a:latin typeface="Calibri"/>
-              </a:rPr>
-              <a:t>• Strict no-leakage: all features lagged ≥ 1 day</a:t>
+              </a:defRPr>
+            </a:pPr>
+            <a:r>
+              <a:t>- Limitations, controls, and deployment stance</a:t>
             </a:r>
           </a:p>
         </p:txBody>
@@ -7514,7 +5407,7 @@
         <p:spPr>
           <a:xfrm>
             <a:off x="0" y="0"/>
-            <a:ext cx="12191695" cy="914400"/>
+            <a:ext cx="12191695" cy="868680"/>
           </a:xfrm>
           <a:prstGeom prst="rect">
             <a:avLst/>
@@ -7550,49 +5443,13 @@
       </p:sp>
       <p:sp>
         <p:nvSpPr>
-          <p:cNvPr id="3" name="TextBox 2"/>
-          <p:cNvSpPr txBox="1"/>
-          <p:nvPr/>
-        </p:nvSpPr>
-        <p:spPr>
-          <a:xfrm>
-            <a:off x="548640" y="137160"/>
-            <a:ext cx="10058400" cy="640080"/>
-          </a:xfrm>
-          <a:prstGeom prst="rect">
-            <a:avLst/>
-          </a:prstGeom>
-          <a:noFill/>
-        </p:spPr>
-        <p:txBody>
-          <a:bodyPr wrap="square">
-            <a:spAutoFit/>
-          </a:bodyPr>
-          <a:lstStyle/>
-          <a:p>
-            <a:pPr algn="l">
-              <a:defRPr sz="2600" b="1">
-                <a:solidFill>
-                  <a:srgbClr val="FFFFFF"/>
-                </a:solidFill>
-                <a:latin typeface="Calibri"/>
-              </a:defRPr>
-            </a:pPr>
-            <a:r>
-              <a:t>Dual-Task Framework: Regression × Clustering</a:t>
-            </a:r>
-          </a:p>
-        </p:txBody>
-      </p:sp>
-      <p:sp>
-        <p:nvSpPr>
-          <p:cNvPr id="4" name="Rectangle 3"/>
+          <p:cNvPr id="3" name="Rectangle 2"/>
           <p:cNvSpPr/>
           <p:nvPr/>
         </p:nvSpPr>
         <p:spPr>
           <a:xfrm>
-            <a:off x="0" y="914400"/>
+            <a:off x="0" y="868680"/>
             <a:ext cx="12191695" cy="36576"/>
           </a:xfrm>
           <a:prstGeom prst="rect">
@@ -7629,14 +5486,50 @@
       </p:sp>
       <p:sp>
         <p:nvSpPr>
+          <p:cNvPr id="4" name="TextBox 3"/>
+          <p:cNvSpPr txBox="1"/>
+          <p:nvPr/>
+        </p:nvSpPr>
+        <p:spPr>
+          <a:xfrm>
+            <a:off x="548640" y="109728"/>
+            <a:ext cx="10972800" cy="548640"/>
+          </a:xfrm>
+          <a:prstGeom prst="rect">
+            <a:avLst/>
+          </a:prstGeom>
+          <a:noFill/>
+        </p:spPr>
+        <p:txBody>
+          <a:bodyPr wrap="square">
+            <a:spAutoFit/>
+          </a:bodyPr>
+          <a:lstStyle/>
+          <a:p>
+            <a:pPr algn="l">
+              <a:defRPr sz="2500" b="1">
+                <a:solidFill>
+                  <a:srgbClr val="FFFFFF"/>
+                </a:solidFill>
+                <a:latin typeface="Calibri"/>
+              </a:defRPr>
+            </a:pPr>
+            <a:r>
+              <a:t>Dual-Task Architecture: Regression x Clustering</a:t>
+            </a:r>
+          </a:p>
+        </p:txBody>
+      </p:sp>
+      <p:sp>
+        <p:nvSpPr>
           <p:cNvPr id="5" name="Rectangle 4"/>
           <p:cNvSpPr/>
           <p:nvPr/>
         </p:nvSpPr>
         <p:spPr>
           <a:xfrm>
-            <a:off x="457200" y="1188720"/>
-            <a:ext cx="5303520" cy="2286000"/>
+            <a:off x="457200" y="1097280"/>
+            <a:ext cx="5394960" cy="2286000"/>
           </a:xfrm>
           <a:prstGeom prst="rect">
             <a:avLst/>
@@ -7678,8 +5571,8 @@
         </p:nvSpPr>
         <p:spPr>
           <a:xfrm>
-            <a:off x="640080" y="1280160"/>
-            <a:ext cx="4937760" cy="457200"/>
+            <a:off x="640080" y="1188720"/>
+            <a:ext cx="4937760" cy="365760"/>
           </a:xfrm>
           <a:prstGeom prst="rect">
             <a:avLst/>
@@ -7693,7 +5586,7 @@
           <a:lstStyle/>
           <a:p>
             <a:pPr algn="l">
-              <a:defRPr sz="2000" b="1">
+              <a:defRPr sz="1900" b="1">
                 <a:solidFill>
                   <a:srgbClr val="1B3A5C"/>
                 </a:solidFill>
@@ -7701,7 +5594,7 @@
               </a:defRPr>
             </a:pPr>
             <a:r>
-              <a:t>Task 1 — Stock Price Regression</a:t>
+              <a:t>Task 1: Stock Price Regression</a:t>
             </a:r>
           </a:p>
         </p:txBody>
@@ -7714,7 +5607,7 @@
         </p:nvSpPr>
         <p:spPr>
           <a:xfrm>
-            <a:off x="640080" y="1737360"/>
+            <a:off x="640080" y="1645920"/>
             <a:ext cx="4937760" cy="1645920"/>
           </a:xfrm>
           <a:prstGeom prst="rect">
@@ -7729,59 +5622,50 @@
           <a:lstStyle/>
           <a:p>
             <a:pPr>
-              <a:spcBef>
-                <a:spcPts val="400"/>
-              </a:spcBef>
               <a:spcAft>
-                <a:spcPts val="200"/>
+                <a:spcPts val="300"/>
               </a:spcAft>
-            </a:pPr>
-            <a:r>
-              <a:rPr sz="1500">
+              <a:defRPr sz="1400">
                 <a:solidFill>
                   <a:srgbClr val="2C2C2C"/>
                 </a:solidFill>
                 <a:latin typeface="Calibri"/>
-              </a:rPr>
-              <a:t>• Predict next-day close price ŷ_{i,t+1}</a:t>
+              </a:defRPr>
+            </a:pPr>
+            <a:r>
+              <a:t>- Predict next-day close with XGBoost.</a:t>
             </a:r>
           </a:p>
           <a:p>
             <a:pPr>
-              <a:spcBef>
-                <a:spcPts val="400"/>
-              </a:spcBef>
               <a:spcAft>
-                <a:spcPts val="200"/>
+                <a:spcPts val="300"/>
               </a:spcAft>
-            </a:pPr>
-            <a:r>
-              <a:rPr sz="1500">
+              <a:defRPr sz="1400">
                 <a:solidFill>
                   <a:srgbClr val="2C2C2C"/>
                 </a:solidFill>
                 <a:latin typeface="Calibri"/>
-              </a:rPr>
-              <a:t>• XGBoost with technical + sentiment features</a:t>
+              </a:defRPr>
+            </a:pPr>
+            <a:r>
+              <a:t>- Features: technicals, sentiment, volatility, momentum.</a:t>
             </a:r>
           </a:p>
           <a:p>
             <a:pPr>
-              <a:spcBef>
-                <a:spcPts val="400"/>
-              </a:spcBef>
               <a:spcAft>
-                <a:spcPts val="200"/>
+                <a:spcPts val="300"/>
               </a:spcAft>
-            </a:pPr>
-            <a:r>
-              <a:rPr sz="1500">
+              <a:defRPr sz="1400">
                 <a:solidFill>
                   <a:srgbClr val="2C2C2C"/>
                 </a:solidFill>
                 <a:latin typeface="Calibri"/>
-              </a:rPr>
-              <a:t>• Evaluate: MAE, RMSE, R², Directional Hit Ratio</a:t>
+              </a:defRPr>
+            </a:pPr>
+            <a:r>
+              <a:t>- Metrics: MAE, RMSE, R2, directional hit ratio.</a:t>
             </a:r>
           </a:p>
         </p:txBody>
@@ -7794,8 +5678,8 @@
         </p:nvSpPr>
         <p:spPr>
           <a:xfrm>
-            <a:off x="6400800" y="1188720"/>
-            <a:ext cx="5303520" cy="2286000"/>
+            <a:off x="6309360" y="1097280"/>
+            <a:ext cx="5394960" cy="2286000"/>
           </a:xfrm>
           <a:prstGeom prst="rect">
             <a:avLst/>
@@ -7837,8 +5721,8 @@
         </p:nvSpPr>
         <p:spPr>
           <a:xfrm>
-            <a:off x="6583680" y="1280160"/>
-            <a:ext cx="4937760" cy="457200"/>
+            <a:off x="6492240" y="1188720"/>
+            <a:ext cx="4937760" cy="365760"/>
           </a:xfrm>
           <a:prstGeom prst="rect">
             <a:avLst/>
@@ -7852,7 +5736,7 @@
           <a:lstStyle/>
           <a:p>
             <a:pPr algn="l">
-              <a:defRPr sz="2000" b="1">
+              <a:defRPr sz="1900" b="1">
                 <a:solidFill>
                   <a:srgbClr val="D4A01E"/>
                 </a:solidFill>
@@ -7860,7 +5744,7 @@
               </a:defRPr>
             </a:pPr>
             <a:r>
-              <a:t>Task 2 — Stock Clustering</a:t>
+              <a:t>Task 2: Stock Clustering</a:t>
             </a:r>
           </a:p>
         </p:txBody>
@@ -7873,7 +5757,7 @@
         </p:nvSpPr>
         <p:spPr>
           <a:xfrm>
-            <a:off x="6583680" y="1737360"/>
+            <a:off x="6492240" y="1645920"/>
             <a:ext cx="4937760" cy="1645920"/>
           </a:xfrm>
           <a:prstGeom prst="rect">
@@ -7888,59 +5772,50 @@
           <a:lstStyle/>
           <a:p>
             <a:pPr>
-              <a:spcBef>
-                <a:spcPts val="400"/>
-              </a:spcBef>
               <a:spcAft>
-                <a:spcPts val="200"/>
+                <a:spcPts val="300"/>
               </a:spcAft>
-            </a:pPr>
-            <a:r>
-              <a:rPr sz="1500">
+              <a:defRPr sz="1400">
                 <a:solidFill>
                   <a:srgbClr val="2C2C2C"/>
                 </a:solidFill>
                 <a:latin typeface="Calibri"/>
-              </a:rPr>
-              <a:t>• Partition 505 stocks into behavioural peer groups</a:t>
+              </a:defRPr>
+            </a:pPr>
+            <a:r>
+              <a:t>- Cluster 505 stocks by behavior.</a:t>
             </a:r>
           </a:p>
           <a:p>
             <a:pPr>
-              <a:spcBef>
-                <a:spcPts val="400"/>
-              </a:spcBef>
               <a:spcAft>
-                <a:spcPts val="200"/>
+                <a:spcPts val="300"/>
               </a:spcAft>
-            </a:pPr>
-            <a:r>
-              <a:rPr sz="1500">
+              <a:defRPr sz="1400">
                 <a:solidFill>
                   <a:srgbClr val="2C2C2C"/>
                 </a:solidFill>
                 <a:latin typeface="Calibri"/>
-              </a:rPr>
-              <a:t>• 6 methods: K-Means, Hierarchical, DBSCAN, GMM, AE+KM, t-SNE+KM</a:t>
+              </a:defRPr>
+            </a:pPr>
+            <a:r>
+              <a:t>- K-Means (K=6) selected by composite score.</a:t>
             </a:r>
           </a:p>
           <a:p>
             <a:pPr>
-              <a:spcBef>
-                <a:spcPts val="400"/>
-              </a:spcBef>
               <a:spcAft>
-                <a:spcPts val="200"/>
+                <a:spcPts val="300"/>
               </a:spcAft>
-            </a:pPr>
-            <a:r>
-              <a:rPr sz="1500">
+              <a:defRPr sz="1400">
                 <a:solidFill>
                   <a:srgbClr val="2C2C2C"/>
                 </a:solidFill>
                 <a:latin typeface="Calibri"/>
-              </a:rPr>
-              <a:t>• Winner: K-Means (K=6), Composite Score = 0.577</a:t>
+              </a:defRPr>
+            </a:pPr>
+            <a:r>
+              <a:t>- Cluster IDs used as signal routing structure.</a:t>
             </a:r>
           </a:p>
         </p:txBody>
@@ -7953,8 +5828,8 @@
         </p:nvSpPr>
         <p:spPr>
           <a:xfrm>
-            <a:off x="3200400" y="3931920"/>
-            <a:ext cx="5760720" cy="54864"/>
+            <a:off x="2560320" y="3703320"/>
+            <a:ext cx="7132320" cy="54864"/>
           </a:xfrm>
           <a:prstGeom prst="rect">
             <a:avLst/>
@@ -7996,8 +5871,8 @@
         </p:nvSpPr>
         <p:spPr>
           <a:xfrm>
-            <a:off x="2286000" y="4114800"/>
-            <a:ext cx="7589520" cy="1645920"/>
+            <a:off x="1645920" y="3931920"/>
+            <a:ext cx="8961120" cy="914400"/>
           </a:xfrm>
           <a:prstGeom prst="rect">
             <a:avLst/>
@@ -8019,177 +5894,7 @@
               </a:defRPr>
             </a:pPr>
             <a:r>
-              <a:t>Coupling: Cluster membership → Peer sentiment pooling → Feature enrichment</a:t>
-            </a:r>
-            <a:br/>
-            <a:r>
-              <a:t>"Clustering is not just analysis — it is a structural signal router."</a:t>
-            </a:r>
-          </a:p>
-        </p:txBody>
-      </p:sp>
-      <p:sp>
-        <p:nvSpPr>
-          <p:cNvPr id="13" name="Rectangle 12"/>
-          <p:cNvSpPr/>
-          <p:nvPr/>
-        </p:nvSpPr>
-        <p:spPr>
-          <a:xfrm>
-            <a:off x="457200" y="5943600"/>
-            <a:ext cx="5303520" cy="914400"/>
-          </a:xfrm>
-          <a:prstGeom prst="rect">
-            <a:avLst/>
-          </a:prstGeom>
-          <a:solidFill>
-            <a:srgbClr val="1B3A5C"/>
-          </a:solidFill>
-          <a:ln>
-            <a:noFill/>
-          </a:ln>
-        </p:spPr>
-        <p:style>
-          <a:lnRef idx="1">
-            <a:schemeClr val="accent1"/>
-          </a:lnRef>
-          <a:fillRef idx="3">
-            <a:schemeClr val="accent1"/>
-          </a:fillRef>
-          <a:effectRef idx="2">
-            <a:schemeClr val="accent1"/>
-          </a:effectRef>
-          <a:fontRef idx="minor">
-            <a:schemeClr val="lt1"/>
-          </a:fontRef>
-        </p:style>
-        <p:txBody>
-          <a:bodyPr rtlCol="0" anchor="ctr"/>
-          <a:lstStyle/>
-          <a:p>
-            <a:pPr algn="ctr"/>
-          </a:p>
-        </p:txBody>
-      </p:sp>
-      <p:sp>
-        <p:nvSpPr>
-          <p:cNvPr id="14" name="TextBox 13"/>
-          <p:cNvSpPr txBox="1"/>
-          <p:nvPr/>
-        </p:nvSpPr>
-        <p:spPr>
-          <a:xfrm>
-            <a:off x="640080" y="6080760"/>
-            <a:ext cx="4937760" cy="640080"/>
-          </a:xfrm>
-          <a:prstGeom prst="rect">
-            <a:avLst/>
-          </a:prstGeom>
-          <a:noFill/>
-        </p:spPr>
-        <p:txBody>
-          <a:bodyPr wrap="square">
-            <a:spAutoFit/>
-          </a:bodyPr>
-          <a:lstStyle/>
-          <a:p>
-            <a:pPr algn="ctr">
-              <a:defRPr sz="1400" b="1">
-                <a:solidFill>
-                  <a:srgbClr val="FFFFFF"/>
-                </a:solidFill>
-                <a:latin typeface="Calibri"/>
-              </a:defRPr>
-            </a:pPr>
-            <a:r>
-              <a:t>Innovation 1: Cluster News Prediction</a:t>
-            </a:r>
-            <a:br/>
-            <a:r>
-              <a:t>(情緒衰減 Sentiment Decay + 聚類感知 Cluster-Aware)</a:t>
-            </a:r>
-          </a:p>
-        </p:txBody>
-      </p:sp>
-      <p:sp>
-        <p:nvSpPr>
-          <p:cNvPr id="15" name="Rectangle 14"/>
-          <p:cNvSpPr/>
-          <p:nvPr/>
-        </p:nvSpPr>
-        <p:spPr>
-          <a:xfrm>
-            <a:off x="6400800" y="5943600"/>
-            <a:ext cx="5303520" cy="914400"/>
-          </a:xfrm>
-          <a:prstGeom prst="rect">
-            <a:avLst/>
-          </a:prstGeom>
-          <a:solidFill>
-            <a:srgbClr val="2C2C2C"/>
-          </a:solidFill>
-          <a:ln>
-            <a:noFill/>
-          </a:ln>
-        </p:spPr>
-        <p:style>
-          <a:lnRef idx="1">
-            <a:schemeClr val="accent1"/>
-          </a:lnRef>
-          <a:fillRef idx="3">
-            <a:schemeClr val="accent1"/>
-          </a:fillRef>
-          <a:effectRef idx="2">
-            <a:schemeClr val="accent1"/>
-          </a:effectRef>
-          <a:fontRef idx="minor">
-            <a:schemeClr val="lt1"/>
-          </a:fontRef>
-        </p:style>
-        <p:txBody>
-          <a:bodyPr rtlCol="0" anchor="ctr"/>
-          <a:lstStyle/>
-          <a:p>
-            <a:pPr algn="ctr"/>
-          </a:p>
-        </p:txBody>
-      </p:sp>
-      <p:sp>
-        <p:nvSpPr>
-          <p:cNvPr id="16" name="TextBox 15"/>
-          <p:cNvSpPr txBox="1"/>
-          <p:nvPr/>
-        </p:nvSpPr>
-        <p:spPr>
-          <a:xfrm>
-            <a:off x="6583680" y="6080760"/>
-            <a:ext cx="4937760" cy="640080"/>
-          </a:xfrm>
-          <a:prstGeom prst="rect">
-            <a:avLst/>
-          </a:prstGeom>
-          <a:noFill/>
-        </p:spPr>
-        <p:txBody>
-          <a:bodyPr wrap="square">
-            <a:spAutoFit/>
-          </a:bodyPr>
-          <a:lstStyle/>
-          <a:p>
-            <a:pPr algn="ctr">
-              <a:defRPr sz="1400" b="1">
-                <a:solidFill>
-                  <a:srgbClr val="FFFFFF"/>
-                </a:solidFill>
-                <a:latin typeface="Calibri"/>
-              </a:defRPr>
-            </a:pPr>
-            <a:r>
-              <a:t>Innovation 2: Multi-Horizon Meta-Signal</a:t>
-            </a:r>
-            <a:br/>
-            <a:r>
-              <a:t>(Future Prediction for Overall Strategy)</a:t>
+              <a:t>Coupling insight: clustering is not an appendix. It routes sentiment information into prediction.</a:t>
             </a:r>
           </a:p>
         </p:txBody>
@@ -8229,7 +5934,7 @@
         <p:spPr>
           <a:xfrm>
             <a:off x="0" y="0"/>
-            <a:ext cx="12191695" cy="914400"/>
+            <a:ext cx="12191695" cy="868680"/>
           </a:xfrm>
           <a:prstGeom prst="rect">
             <a:avLst/>
@@ -8265,49 +5970,13 @@
       </p:sp>
       <p:sp>
         <p:nvSpPr>
-          <p:cNvPr id="3" name="TextBox 2"/>
-          <p:cNvSpPr txBox="1"/>
-          <p:nvPr/>
-        </p:nvSpPr>
-        <p:spPr>
-          <a:xfrm>
-            <a:off x="548640" y="137160"/>
-            <a:ext cx="10058400" cy="640080"/>
-          </a:xfrm>
-          <a:prstGeom prst="rect">
-            <a:avLst/>
-          </a:prstGeom>
-          <a:noFill/>
-        </p:spPr>
-        <p:txBody>
-          <a:bodyPr wrap="square">
-            <a:spAutoFit/>
-          </a:bodyPr>
-          <a:lstStyle/>
-          <a:p>
-            <a:pPr algn="l">
-              <a:defRPr sz="2600" b="1">
-                <a:solidFill>
-                  <a:srgbClr val="FFFFFF"/>
-                </a:solidFill>
-                <a:latin typeface="Calibri"/>
-              </a:defRPr>
-            </a:pPr>
-            <a:r>
-              <a:t>Feature Engineering &amp; Sentiment Decay</a:t>
-            </a:r>
-          </a:p>
-        </p:txBody>
-      </p:sp>
-      <p:sp>
-        <p:nvSpPr>
-          <p:cNvPr id="4" name="Rectangle 3"/>
+          <p:cNvPr id="3" name="Rectangle 2"/>
           <p:cNvSpPr/>
           <p:nvPr/>
         </p:nvSpPr>
         <p:spPr>
           <a:xfrm>
-            <a:off x="0" y="914400"/>
+            <a:off x="0" y="868680"/>
             <a:ext cx="12191695" cy="36576"/>
           </a:xfrm>
           <a:prstGeom prst="rect">
@@ -8344,14 +6013,50 @@
       </p:sp>
       <p:sp>
         <p:nvSpPr>
+          <p:cNvPr id="4" name="TextBox 3"/>
+          <p:cNvSpPr txBox="1"/>
+          <p:nvPr/>
+        </p:nvSpPr>
+        <p:spPr>
+          <a:xfrm>
+            <a:off x="548640" y="109728"/>
+            <a:ext cx="10972800" cy="548640"/>
+          </a:xfrm>
+          <a:prstGeom prst="rect">
+            <a:avLst/>
+          </a:prstGeom>
+          <a:noFill/>
+        </p:spPr>
+        <p:txBody>
+          <a:bodyPr wrap="square">
+            <a:spAutoFit/>
+          </a:bodyPr>
+          <a:lstStyle/>
+          <a:p>
+            <a:pPr algn="l">
+              <a:defRPr sz="2500" b="1">
+                <a:solidFill>
+                  <a:srgbClr val="FFFFFF"/>
+                </a:solidFill>
+                <a:latin typeface="Calibri"/>
+              </a:defRPr>
+            </a:pPr>
+            <a:r>
+              <a:t>Implementation Design A: Cluster News Prediction</a:t>
+            </a:r>
+          </a:p>
+        </p:txBody>
+      </p:sp>
+      <p:sp>
+        <p:nvSpPr>
           <p:cNvPr id="5" name="TextBox 4"/>
           <p:cNvSpPr txBox="1"/>
           <p:nvPr/>
         </p:nvSpPr>
         <p:spPr>
           <a:xfrm>
-            <a:off x="548640" y="1188720"/>
-            <a:ext cx="5486400" cy="2286000"/>
+            <a:off x="548640" y="1097280"/>
+            <a:ext cx="5669280" cy="3017520"/>
           </a:xfrm>
           <a:prstGeom prst="rect">
             <a:avLst/>
@@ -8365,198 +6070,82 @@
           <a:lstStyle/>
           <a:p>
             <a:pPr>
-              <a:spcBef>
-                <a:spcPts val="400"/>
-              </a:spcBef>
               <a:spcAft>
-                <a:spcPts val="200"/>
+                <a:spcPts val="300"/>
               </a:spcAft>
-            </a:pPr>
-            <a:r>
-              <a:rPr b="1" sz="1500">
+              <a:defRPr sz="1500">
                 <a:solidFill>
                   <a:srgbClr val="2C2C2C"/>
                 </a:solidFill>
                 <a:latin typeface="Calibri"/>
-              </a:rPr>
-              <a:t>Lagged Returns: </a:t>
-            </a:r>
-            <a:r>
-              <a:rPr sz="1500">
+              </a:defRPr>
+            </a:pPr>
+            <a:r>
+              <a:t>- Problem: direct ticker news is sparse and uneven across names.</a:t>
+            </a:r>
+          </a:p>
+          <a:p>
+            <a:pPr>
+              <a:spcAft>
+                <a:spcPts val="300"/>
+              </a:spcAft>
+              <a:defRPr sz="1500">
                 <a:solidFill>
                   <a:srgbClr val="2C2C2C"/>
                 </a:solidFill>
                 <a:latin typeface="Calibri"/>
-              </a:rPr>
-              <a:t>Return_{t-1}, t-2, t-5 — momentum/mean-reversion</a:t>
+              </a:defRPr>
+            </a:pPr>
+            <a:r>
+              <a:t>- Design: aggregate peer-cluster news when direct news is missing.</a:t>
             </a:r>
           </a:p>
           <a:p>
             <a:pPr>
-              <a:spcBef>
-                <a:spcPts val="400"/>
-              </a:spcBef>
               <a:spcAft>
-                <a:spcPts val="200"/>
+                <a:spcPts val="300"/>
               </a:spcAft>
-            </a:pPr>
-            <a:r>
-              <a:rPr b="1" sz="1500">
+              <a:defRPr sz="1500">
                 <a:solidFill>
                   <a:srgbClr val="2C2C2C"/>
                 </a:solidFill>
                 <a:latin typeface="Calibri"/>
-              </a:rPr>
-              <a:t>Moving Averages: </a:t>
-            </a:r>
-            <a:r>
-              <a:rPr sz="1500">
+              </a:defRPr>
+            </a:pPr>
+            <a:r>
+              <a:t>- Scoring: semantic similarity x recency decay x source reliability x sentiment polarity.</a:t>
+            </a:r>
+          </a:p>
+          <a:p>
+            <a:pPr>
+              <a:spcAft>
+                <a:spcPts val="300"/>
+              </a:spcAft>
+              <a:defRPr sz="1500">
                 <a:solidFill>
                   <a:srgbClr val="2C2C2C"/>
                 </a:solidFill>
                 <a:latin typeface="Calibri"/>
-              </a:rPr>
-              <a:t>MA5, MA10, MA20, EMA12, EMA26 — trend</a:t>
+              </a:defRPr>
+            </a:pPr>
+            <a:r>
+              <a:t>- Stacked residual design isolates sentiment contribution over price baseline.</a:t>
             </a:r>
           </a:p>
           <a:p>
             <a:pPr>
-              <a:spcBef>
-                <a:spcPts val="400"/>
-              </a:spcBef>
               <a:spcAft>
-                <a:spcPts val="200"/>
+                <a:spcPts val="300"/>
               </a:spcAft>
-            </a:pPr>
-            <a:r>
-              <a:rPr b="1" sz="1500">
+              <a:defRPr sz="1500">
                 <a:solidFill>
                   <a:srgbClr val="2C2C2C"/>
                 </a:solidFill>
                 <a:latin typeface="Calibri"/>
-              </a:rPr>
-              <a:t>Volatility: </a:t>
-            </a:r>
-            <a:r>
-              <a:rPr sz="1500">
-                <a:solidFill>
-                  <a:srgbClr val="2C2C2C"/>
-                </a:solidFill>
-                <a:latin typeface="Calibri"/>
-              </a:rPr>
-              <a:t>ATR, Bollinger %B, Historical Vol(20d)</a:t>
-            </a:r>
-          </a:p>
-          <a:p>
-            <a:pPr>
-              <a:spcBef>
-                <a:spcPts val="400"/>
-              </a:spcBef>
-              <a:spcAft>
-                <a:spcPts val="200"/>
-              </a:spcAft>
-            </a:pPr>
-            <a:r>
-              <a:rPr b="1" sz="1500">
-                <a:solidFill>
-                  <a:srgbClr val="2C2C2C"/>
-                </a:solidFill>
-                <a:latin typeface="Calibri"/>
-              </a:rPr>
-              <a:t>Volume: </a:t>
-            </a:r>
-            <a:r>
-              <a:rPr sz="1500">
-                <a:solidFill>
-                  <a:srgbClr val="2C2C2C"/>
-                </a:solidFill>
-                <a:latin typeface="Calibri"/>
-              </a:rPr>
-              <a:t>Volume ratio, OBV, Volume MA — liquidity</a:t>
-            </a:r>
-          </a:p>
-          <a:p>
-            <a:pPr>
-              <a:spcBef>
-                <a:spcPts val="400"/>
-              </a:spcBef>
-              <a:spcAft>
-                <a:spcPts val="200"/>
-              </a:spcAft>
-            </a:pPr>
-            <a:r>
-              <a:rPr b="1" sz="1500">
-                <a:solidFill>
-                  <a:srgbClr val="2C2C2C"/>
-                </a:solidFill>
-                <a:latin typeface="Calibri"/>
-              </a:rPr>
-              <a:t>Momentum: </a:t>
-            </a:r>
-            <a:r>
-              <a:rPr sz="1500">
-                <a:solidFill>
-                  <a:srgbClr val="2C2C2C"/>
-                </a:solidFill>
-                <a:latin typeface="Calibri"/>
-              </a:rPr>
-              <a:t>RSI(14), MACD, Stochastic %K</a:t>
-            </a:r>
-          </a:p>
-          <a:p>
-            <a:pPr>
-              <a:spcBef>
-                <a:spcPts val="400"/>
-              </a:spcBef>
-              <a:spcAft>
-                <a:spcPts val="200"/>
-              </a:spcAft>
-            </a:pPr>
-            <a:r>
-              <a:rPr b="1" sz="1500">
-                <a:solidFill>
-                  <a:srgbClr val="2C2C2C"/>
-                </a:solidFill>
-                <a:latin typeface="Calibri"/>
-              </a:rPr>
-              <a:t>Direct Sentiment: </a:t>
-            </a:r>
-            <a:r>
-              <a:rPr sz="1500">
-                <a:solidFill>
-                  <a:srgbClr val="2C2C2C"/>
-                </a:solidFill>
-                <a:latin typeface="Calibri"/>
-              </a:rPr>
-              <a:t>Decay-weighted ticker news (FinBERT)</a:t>
-            </a:r>
-          </a:p>
-          <a:p>
-            <a:pPr>
-              <a:spcBef>
-                <a:spcPts val="400"/>
-              </a:spcBef>
-              <a:spcAft>
-                <a:spcPts val="200"/>
-              </a:spcAft>
-            </a:pPr>
-            <a:r>
-              <a:rPr b="1" sz="1500">
-                <a:solidFill>
-                  <a:srgbClr val="2C2C2C"/>
-                </a:solidFill>
-                <a:latin typeface="Calibri"/>
-              </a:rPr>
-              <a:t>Cluster Sentiment: </a:t>
-            </a:r>
-            <a:r>
-              <a:rPr sz="1500">
-                <a:solidFill>
-                  <a:srgbClr val="2C2C2C"/>
-                </a:solidFill>
-                <a:latin typeface="Calibri"/>
-              </a:rPr>
-              <a:t>Peer-pooled sentiment — fills sparse days</a:t>
+              </a:defRPr>
+            </a:pPr>
+            <a:r>
+              <a:t>- Grid-searched decay remains stable around L=10 and lambda=0.2.</a:t>
             </a:r>
           </a:p>
         </p:txBody>
@@ -8569,14 +6158,14 @@
         </p:nvSpPr>
         <p:spPr>
           <a:xfrm>
-            <a:off x="457200" y="3931920"/>
-            <a:ext cx="5669280" cy="2377440"/>
+            <a:off x="457200" y="4251960"/>
+            <a:ext cx="5760720" cy="2103120"/>
           </a:xfrm>
           <a:prstGeom prst="rect">
             <a:avLst/>
           </a:prstGeom>
           <a:solidFill>
-            <a:srgbClr val="F7F7F7"/>
+            <a:srgbClr val="E6F4EA"/>
           </a:solidFill>
           <a:ln>
             <a:noFill/>
@@ -8612,8 +6201,8 @@
         </p:nvSpPr>
         <p:spPr>
           <a:xfrm>
-            <a:off x="640080" y="4023360"/>
-            <a:ext cx="5303520" cy="457200"/>
+            <a:off x="640080" y="4389120"/>
+            <a:ext cx="5394960" cy="365760"/>
           </a:xfrm>
           <a:prstGeom prst="rect">
             <a:avLst/>
@@ -8627,15 +6216,15 @@
           <a:lstStyle/>
           <a:p>
             <a:pPr algn="l">
-              <a:defRPr sz="1700" b="1">
-                <a:solidFill>
-                  <a:srgbClr val="1B3A5C"/>
-                </a:solidFill>
-                <a:latin typeface="Calibri"/>
-              </a:defRPr>
-            </a:pPr>
-            <a:r>
-              <a:t>Temporal Sentiment Decay (Grid-Searched)</a:t>
+              <a:defRPr sz="1600" b="1">
+                <a:solidFill>
+                  <a:srgbClr val="27AE60"/>
+                </a:solidFill>
+                <a:latin typeface="Calibri"/>
+              </a:defRPr>
+            </a:pPr>
+            <a:r>
+              <a:t>Observed impact</a:t>
             </a:r>
           </a:p>
         </p:txBody>
@@ -8648,8 +6237,8 @@
         </p:nvSpPr>
         <p:spPr>
           <a:xfrm>
-            <a:off x="640080" y="4572000"/>
-            <a:ext cx="5303520" cy="1645920"/>
+            <a:off x="640080" y="4846319"/>
+            <a:ext cx="5394960" cy="1371600"/>
           </a:xfrm>
           <a:prstGeom prst="rect">
             <a:avLst/>
@@ -8663,106 +6252,74 @@
           <a:lstStyle/>
           <a:p>
             <a:pPr>
-              <a:spcBef>
-                <a:spcPts val="400"/>
-              </a:spcBef>
               <a:spcAft>
-                <a:spcPts val="200"/>
+                <a:spcPts val="300"/>
               </a:spcAft>
-            </a:pPr>
-            <a:r>
-              <a:rPr sz="1400">
+              <a:defRPr sz="1300">
                 <a:solidFill>
                   <a:srgbClr val="2C2C2C"/>
                 </a:solidFill>
                 <a:latin typeface="Calibri"/>
-              </a:rPr>
-              <a:t>• Weight: w_k = exp(-λ(k-1)) / Σ exp(-λ(m-1))</a:t>
+              </a:defRPr>
+            </a:pPr>
+            <a:r>
+              <a:t>- AMZN MAE down about 47 percent; GOOG MAE down about 46 percent.</a:t>
             </a:r>
           </a:p>
           <a:p>
             <a:pPr>
-              <a:spcBef>
-                <a:spcPts val="400"/>
-              </a:spcBef>
               <a:spcAft>
-                <a:spcPts val="200"/>
+                <a:spcPts val="300"/>
               </a:spcAft>
-            </a:pPr>
-            <a:r>
-              <a:rPr sz="1400">
+              <a:defRPr sz="1300">
                 <a:solidFill>
                   <a:srgbClr val="2C2C2C"/>
                 </a:solidFill>
                 <a:latin typeface="Calibri"/>
-              </a:rPr>
-              <a:t>• Optimal: L* = 10 days, λ* = 0.2</a:t>
-            </a:r>
-          </a:p>
-          <a:p>
-            <a:pPr>
-              <a:spcBef>
-                <a:spcPts val="400"/>
-              </a:spcBef>
-              <a:spcAft>
-                <a:spcPts val="200"/>
-              </a:spcAft>
-            </a:pPr>
-            <a:r>
-              <a:rPr sz="1400">
-                <a:solidFill>
-                  <a:srgbClr val="2C2C2C"/>
-                </a:solidFill>
-                <a:latin typeface="Calibri"/>
-              </a:rPr>
-              <a:t>• Grid-Search MAE = 4.8383</a:t>
-            </a:r>
-          </a:p>
-          <a:p>
-            <a:pPr>
-              <a:spcBef>
-                <a:spcPts val="400"/>
-              </a:spcBef>
-              <a:spcAft>
-                <a:spcPts val="200"/>
-              </a:spcAft>
-            </a:pPr>
-            <a:r>
-              <a:rPr sz="1400">
-                <a:solidFill>
-                  <a:srgbClr val="2C2C2C"/>
-                </a:solidFill>
-                <a:latin typeface="Calibri"/>
-              </a:rPr>
-              <a:t>• Near-flat optimum → robust, not fragile artefact</a:t>
-            </a:r>
-          </a:p>
-        </p:txBody>
-      </p:sp>
-      <p:pic>
-        <p:nvPicPr>
-          <p:cNvPr id="9" name="Picture 8" descr="02_feature_correlation_regression.png"/>
-          <p:cNvPicPr>
-            <a:picLocks noChangeAspect="1"/>
-          </p:cNvPicPr>
+              </a:defRPr>
+            </a:pPr>
+            <a:r>
+              <a:t>- Best stacked run: MAE 0.918, R2 0.999688, DHR 0.515.</a:t>
+            </a:r>
+          </a:p>
+        </p:txBody>
+      </p:sp>
+      <p:sp>
+        <p:nvSpPr>
+          <p:cNvPr id="9" name="TextBox 8"/>
+          <p:cNvSpPr txBox="1"/>
           <p:nvPr/>
-        </p:nvPicPr>
-        <p:blipFill>
-          <a:blip r:embed="rId2"/>
-          <a:stretch>
-            <a:fillRect/>
-          </a:stretch>
-        </p:blipFill>
-        <p:spPr>
-          <a:xfrm>
-            <a:off x="6583680" y="1188720"/>
-            <a:ext cx="5029200" cy="4502976"/>
-          </a:xfrm>
-          <a:prstGeom prst="rect">
-            <a:avLst/>
-          </a:prstGeom>
-        </p:spPr>
-      </p:pic>
+        </p:nvSpPr>
+        <p:spPr>
+          <a:xfrm>
+            <a:off x="6400800" y="1097280"/>
+            <a:ext cx="3657600" cy="365760"/>
+          </a:xfrm>
+          <a:prstGeom prst="rect">
+            <a:avLst/>
+          </a:prstGeom>
+          <a:noFill/>
+        </p:spPr>
+        <p:txBody>
+          <a:bodyPr wrap="square">
+            <a:spAutoFit/>
+          </a:bodyPr>
+          <a:lstStyle/>
+          <a:p>
+            <a:pPr algn="l">
+              <a:defRPr sz="1100" b="0">
+                <a:solidFill>
+                  <a:srgbClr val="2E86C1"/>
+                </a:solidFill>
+                <a:latin typeface="Calibri"/>
+              </a:defRPr>
+            </a:pPr>
+            <a:r>
+              <a:t>[Missing image: 02D_prediction_vs_actual_close_GOOG.png]</a:t>
+            </a:r>
+          </a:p>
+        </p:txBody>
+      </p:sp>
     </p:spTree>
   </p:cSld>
   <p:clrMapOvr>
@@ -8798,7 +6355,7 @@
         <p:spPr>
           <a:xfrm>
             <a:off x="0" y="0"/>
-            <a:ext cx="12191695" cy="914400"/>
+            <a:ext cx="12191695" cy="868680"/>
           </a:xfrm>
           <a:prstGeom prst="rect">
             <a:avLst/>
@@ -8834,49 +6391,13 @@
       </p:sp>
       <p:sp>
         <p:nvSpPr>
-          <p:cNvPr id="3" name="TextBox 2"/>
-          <p:cNvSpPr txBox="1"/>
-          <p:nvPr/>
-        </p:nvSpPr>
-        <p:spPr>
-          <a:xfrm>
-            <a:off x="548640" y="137160"/>
-            <a:ext cx="10058400" cy="640080"/>
-          </a:xfrm>
-          <a:prstGeom prst="rect">
-            <a:avLst/>
-          </a:prstGeom>
-          <a:noFill/>
-        </p:spPr>
-        <p:txBody>
-          <a:bodyPr wrap="square">
-            <a:spAutoFit/>
-          </a:bodyPr>
-          <a:lstStyle/>
-          <a:p>
-            <a:pPr algn="l">
-              <a:defRPr sz="2600" b="1">
-                <a:solidFill>
-                  <a:srgbClr val="FFFFFF"/>
-                </a:solidFill>
-                <a:latin typeface="Calibri"/>
-              </a:defRPr>
-            </a:pPr>
-            <a:r>
-              <a:t>Model Selection: Why XGBoost?</a:t>
-            </a:r>
-          </a:p>
-        </p:txBody>
-      </p:sp>
-      <p:sp>
-        <p:nvSpPr>
-          <p:cNvPr id="4" name="Rectangle 3"/>
+          <p:cNvPr id="3" name="Rectangle 2"/>
           <p:cNvSpPr/>
           <p:nvPr/>
         </p:nvSpPr>
         <p:spPr>
           <a:xfrm>
-            <a:off x="0" y="914400"/>
+            <a:off x="0" y="868680"/>
             <a:ext cx="12191695" cy="36576"/>
           </a:xfrm>
           <a:prstGeom prst="rect">
@@ -8913,14 +6434,50 @@
       </p:sp>
       <p:sp>
         <p:nvSpPr>
+          <p:cNvPr id="4" name="TextBox 3"/>
+          <p:cNvSpPr txBox="1"/>
+          <p:nvPr/>
+        </p:nvSpPr>
+        <p:spPr>
+          <a:xfrm>
+            <a:off x="548640" y="109728"/>
+            <a:ext cx="10972800" cy="548640"/>
+          </a:xfrm>
+          <a:prstGeom prst="rect">
+            <a:avLst/>
+          </a:prstGeom>
+          <a:noFill/>
+        </p:spPr>
+        <p:txBody>
+          <a:bodyPr wrap="square">
+            <a:spAutoFit/>
+          </a:bodyPr>
+          <a:lstStyle/>
+          <a:p>
+            <a:pPr algn="l">
+              <a:defRPr sz="2500" b="1">
+                <a:solidFill>
+                  <a:srgbClr val="FFFFFF"/>
+                </a:solidFill>
+                <a:latin typeface="Calibri"/>
+              </a:defRPr>
+            </a:pPr>
+            <a:r>
+              <a:t>Implementation Design B: Multi-Meta Prediction</a:t>
+            </a:r>
+          </a:p>
+        </p:txBody>
+      </p:sp>
+      <p:sp>
+        <p:nvSpPr>
           <p:cNvPr id="5" name="TextBox 4"/>
           <p:cNvSpPr txBox="1"/>
           <p:nvPr/>
         </p:nvSpPr>
         <p:spPr>
           <a:xfrm>
-            <a:off x="548640" y="1188720"/>
-            <a:ext cx="5029200" cy="3657600"/>
+            <a:off x="548640" y="1097280"/>
+            <a:ext cx="5669280" cy="2834640"/>
           </a:xfrm>
           <a:prstGeom prst="rect">
             <a:avLst/>
@@ -8934,170 +6491,272 @@
           <a:lstStyle/>
           <a:p>
             <a:pPr>
-              <a:spcBef>
-                <a:spcPts val="400"/>
-              </a:spcBef>
               <a:spcAft>
-                <a:spcPts val="200"/>
+                <a:spcPts val="300"/>
               </a:spcAft>
-            </a:pPr>
-            <a:r>
-              <a:rPr b="1" sz="1700">
+              <a:defRPr sz="1500">
                 <a:solidFill>
                   <a:srgbClr val="2C2C2C"/>
                 </a:solidFill>
                 <a:latin typeface="Calibri"/>
-              </a:rPr>
-              <a:t>4 candidates: </a:t>
-            </a:r>
-            <a:r>
-              <a:rPr sz="1700">
+              </a:defRPr>
+            </a:pPr>
+            <a:r>
+              <a:t>- Problem: single-horizon T+1 forecasts are not portfolio-horizon aware.</a:t>
+            </a:r>
+          </a:p>
+          <a:p>
+            <a:pPr>
+              <a:spcAft>
+                <a:spcPts val="300"/>
+              </a:spcAft>
+              <a:defRPr sz="1500">
                 <a:solidFill>
                   <a:srgbClr val="2C2C2C"/>
                 </a:solidFill>
                 <a:latin typeface="Calibri"/>
-              </a:rPr>
-              <a:t>Linear/Ridge, Random Forest, XGBoost, LSTM/GRU</a:t>
+              </a:defRPr>
+            </a:pPr>
+            <a:r>
+              <a:t>- Design: combine T+1, T+5, T+10, T+15 heads through a learned meta layer.</a:t>
             </a:r>
           </a:p>
           <a:p>
             <a:pPr>
-              <a:spcBef>
-                <a:spcPts val="400"/>
-              </a:spcBef>
               <a:spcAft>
-                <a:spcPts val="200"/>
+                <a:spcPts val="300"/>
               </a:spcAft>
-            </a:pPr>
-            <a:r>
-              <a:rPr b="1" sz="1700">
+              <a:defRPr sz="1500">
                 <a:solidFill>
                   <a:srgbClr val="2C2C2C"/>
                 </a:solidFill>
                 <a:latin typeface="Calibri"/>
-              </a:rPr>
-              <a:t>XGBoost wins: </a:t>
-            </a:r>
-            <a:r>
-              <a:rPr sz="1700">
+              </a:defRPr>
+            </a:pPr>
+            <a:r>
+              <a:t>- Meta controls: regime filter, direction agreement, velocity alignment.</a:t>
+            </a:r>
+          </a:p>
+          <a:p>
+            <a:pPr>
+              <a:spcAft>
+                <a:spcPts val="300"/>
+              </a:spcAft>
+              <a:defRPr sz="1500">
                 <a:solidFill>
                   <a:srgbClr val="2C2C2C"/>
                 </a:solidFill>
                 <a:latin typeface="Calibri"/>
-              </a:rPr>
-              <a:t>best tabular fit, handles mixed features, fast, regularised</a:t>
+              </a:defRPr>
+            </a:pPr>
+            <a:r>
+              <a:t>- Ridge meta model prioritized for stability; XGB meta as secondary benchmark.</a:t>
             </a:r>
           </a:p>
           <a:p>
             <a:pPr>
-              <a:spcBef>
-                <a:spcPts val="400"/>
-              </a:spcBef>
               <a:spcAft>
-                <a:spcPts val="200"/>
+                <a:spcPts val="300"/>
               </a:spcAft>
-            </a:pPr>
-            <a:r>
-              <a:rPr b="1" sz="1700">
+              <a:defRPr sz="1500">
                 <a:solidFill>
                   <a:srgbClr val="2C2C2C"/>
                 </a:solidFill>
                 <a:latin typeface="Calibri"/>
-              </a:rPr>
-              <a:t>Deep models fail: </a:t>
-            </a:r>
-            <a:r>
-              <a:rPr sz="1700">
+              </a:defRPr>
+            </a:pPr>
+            <a:r>
+              <a:t>- Outcome: stronger risk-adjusted return with lower drawdown.</a:t>
+            </a:r>
+          </a:p>
+        </p:txBody>
+      </p:sp>
+      <p:sp>
+        <p:nvSpPr>
+          <p:cNvPr id="6" name="Rectangle 5"/>
+          <p:cNvSpPr/>
+          <p:nvPr/>
+        </p:nvSpPr>
+        <p:spPr>
+          <a:xfrm>
+            <a:off x="6400800" y="1097280"/>
+            <a:ext cx="5303520" cy="4023360"/>
+          </a:xfrm>
+          <a:prstGeom prst="rect">
+            <a:avLst/>
+          </a:prstGeom>
+          <a:solidFill>
+            <a:srgbClr val="F2F2F2"/>
+          </a:solidFill>
+          <a:ln>
+            <a:noFill/>
+          </a:ln>
+        </p:spPr>
+        <p:style>
+          <a:lnRef idx="1">
+            <a:schemeClr val="accent1"/>
+          </a:lnRef>
+          <a:fillRef idx="3">
+            <a:schemeClr val="accent1"/>
+          </a:fillRef>
+          <a:effectRef idx="2">
+            <a:schemeClr val="accent1"/>
+          </a:effectRef>
+          <a:fontRef idx="minor">
+            <a:schemeClr val="lt1"/>
+          </a:fontRef>
+        </p:style>
+        <p:txBody>
+          <a:bodyPr rtlCol="0" anchor="ctr"/>
+          <a:lstStyle/>
+          <a:p>
+            <a:pPr algn="ctr"/>
+          </a:p>
+        </p:txBody>
+      </p:sp>
+      <p:sp>
+        <p:nvSpPr>
+          <p:cNvPr id="7" name="TextBox 6"/>
+          <p:cNvSpPr txBox="1"/>
+          <p:nvPr/>
+        </p:nvSpPr>
+        <p:spPr>
+          <a:xfrm>
+            <a:off x="6583680" y="1280160"/>
+            <a:ext cx="4937760" cy="365760"/>
+          </a:xfrm>
+          <a:prstGeom prst="rect">
+            <a:avLst/>
+          </a:prstGeom>
+          <a:noFill/>
+        </p:spPr>
+        <p:txBody>
+          <a:bodyPr wrap="square">
+            <a:spAutoFit/>
+          </a:bodyPr>
+          <a:lstStyle/>
+          <a:p>
+            <a:pPr algn="l">
+              <a:defRPr sz="1600" b="1">
+                <a:solidFill>
+                  <a:srgbClr val="1B3A5C"/>
+                </a:solidFill>
+                <a:latin typeface="Calibri"/>
+              </a:defRPr>
+            </a:pPr>
+            <a:r>
+              <a:t>Performance snapshot</a:t>
+            </a:r>
+          </a:p>
+        </p:txBody>
+      </p:sp>
+      <p:sp>
+        <p:nvSpPr>
+          <p:cNvPr id="8" name="TextBox 7"/>
+          <p:cNvSpPr txBox="1"/>
+          <p:nvPr/>
+        </p:nvSpPr>
+        <p:spPr>
+          <a:xfrm>
+            <a:off x="6583680" y="1828800"/>
+            <a:ext cx="4937760" cy="2926080"/>
+          </a:xfrm>
+          <a:prstGeom prst="rect">
+            <a:avLst/>
+          </a:prstGeom>
+          <a:noFill/>
+        </p:spPr>
+        <p:txBody>
+          <a:bodyPr wrap="square">
+            <a:spAutoFit/>
+          </a:bodyPr>
+          <a:lstStyle/>
+          <a:p>
+            <a:pPr>
+              <a:spcAft>
+                <a:spcPts val="300"/>
+              </a:spcAft>
+              <a:defRPr sz="1300">
                 <a:solidFill>
                   <a:srgbClr val="2C2C2C"/>
                 </a:solidFill>
                 <a:latin typeface="Calibri"/>
-              </a:rPr>
-              <a:t>training-validation divergence under strict temporal splitting</a:t>
+              </a:defRPr>
+            </a:pPr>
+            <a:r>
+              <a:t>- Learned Meta Ridge: Sharpe 8.10, Return +10.5 percent, MaxDD -0.8 percent, DHR 0.681.</a:t>
             </a:r>
           </a:p>
           <a:p>
             <a:pPr>
-              <a:spcBef>
-                <a:spcPts val="400"/>
-              </a:spcBef>
               <a:spcAft>
-                <a:spcPts val="200"/>
+                <a:spcPts val="300"/>
               </a:spcAft>
-            </a:pPr>
-            <a:r>
-              <a:rPr b="1" sz="1700">
+              <a:defRPr sz="1300">
                 <a:solidFill>
                   <a:srgbClr val="2C2C2C"/>
                 </a:solidFill>
                 <a:latin typeface="Calibri"/>
-              </a:rPr>
-              <a:t>Optuna tuning: </a:t>
-            </a:r>
-            <a:r>
-              <a:rPr sz="1700">
+              </a:defRPr>
+            </a:pPr>
+            <a:r>
+              <a:t>- Learned Meta XGB: Sharpe 4.72, Return +6.5 percent.</a:t>
+            </a:r>
+          </a:p>
+          <a:p>
+            <a:pPr>
+              <a:spcAft>
+                <a:spcPts val="300"/>
+              </a:spcAft>
+              <a:defRPr sz="1300">
                 <a:solidFill>
                   <a:srgbClr val="2C2C2C"/>
                 </a:solidFill>
                 <a:latin typeface="Calibri"/>
-              </a:rPr>
-              <a:t>50-trial Bayesian HPO over max_depth, lr, n_estimators, subsample</a:t>
-            </a:r>
-          </a:p>
-          <a:p>
-            <a:pPr>
-              <a:spcBef>
-                <a:spcPts val="400"/>
-              </a:spcBef>
-              <a:spcAft>
-                <a:spcPts val="200"/>
-              </a:spcAft>
-            </a:pPr>
-            <a:r>
-              <a:rPr b="1" sz="1700">
-                <a:solidFill>
-                  <a:srgbClr val="2C2C2C"/>
-                </a:solidFill>
-                <a:latin typeface="Calibri"/>
-              </a:rPr>
-              <a:t>Data regime: </a:t>
-            </a:r>
-            <a:r>
-              <a:rPr sz="1700">
-                <a:solidFill>
-                  <a:srgbClr val="2C2C2C"/>
-                </a:solidFill>
-                <a:latin typeface="Calibri"/>
-              </a:rPr>
-              <a:t>limited per-ticker samples → gradient-boosted trees naturally robust</a:t>
-            </a:r>
-          </a:p>
-        </p:txBody>
-      </p:sp>
-      <p:pic>
-        <p:nvPicPr>
-          <p:cNvPr id="6" name="Picture 5" descr="03_regression_metrics_comparison.png"/>
-          <p:cNvPicPr>
-            <a:picLocks noChangeAspect="1"/>
-          </p:cNvPicPr>
+              </a:defRPr>
+            </a:pPr>
+            <a:r>
+              <a:t>- Buy-and-Hold baseline: Sharpe 6.09, Return +8.2 percent.</a:t>
+            </a:r>
+          </a:p>
+        </p:txBody>
+      </p:sp>
+      <p:sp>
+        <p:nvSpPr>
+          <p:cNvPr id="9" name="TextBox 8"/>
+          <p:cNvSpPr txBox="1"/>
           <p:nvPr/>
-        </p:nvPicPr>
-        <p:blipFill>
-          <a:blip r:embed="rId2"/>
-          <a:stretch>
-            <a:fillRect/>
-          </a:stretch>
-        </p:blipFill>
-        <p:spPr>
-          <a:xfrm>
-            <a:off x="6217920" y="1188720"/>
-            <a:ext cx="5486400" cy="3921877"/>
-          </a:xfrm>
-          <a:prstGeom prst="rect">
-            <a:avLst/>
-          </a:prstGeom>
-        </p:spPr>
-      </p:pic>
+        </p:nvSpPr>
+        <p:spPr>
+          <a:xfrm>
+            <a:off x="548640" y="4297680"/>
+            <a:ext cx="5669280" cy="1645920"/>
+          </a:xfrm>
+          <a:prstGeom prst="rect">
+            <a:avLst/>
+          </a:prstGeom>
+          <a:noFill/>
+        </p:spPr>
+        <p:txBody>
+          <a:bodyPr wrap="square">
+            <a:spAutoFit/>
+          </a:bodyPr>
+          <a:lstStyle/>
+          <a:p>
+            <a:pPr algn="l">
+              <a:defRPr sz="1400" b="1">
+                <a:solidFill>
+                  <a:srgbClr val="1B3A5C"/>
+                </a:solidFill>
+                <a:latin typeface="Calibri"/>
+              </a:defRPr>
+            </a:pPr>
+            <a:r>
+              <a:t>Interpretation: long-horizon heads provide regime confidence to modulate short-horizon exposure.</a:t>
+            </a:r>
+          </a:p>
+        </p:txBody>
+      </p:sp>
     </p:spTree>
   </p:cSld>
   <p:clrMapOvr>
@@ -9133,7 +6792,7 @@
         <p:spPr>
           <a:xfrm>
             <a:off x="0" y="0"/>
-            <a:ext cx="12191695" cy="914400"/>
+            <a:ext cx="12191695" cy="868680"/>
           </a:xfrm>
           <a:prstGeom prst="rect">
             <a:avLst/>
@@ -9169,49 +6828,13 @@
       </p:sp>
       <p:sp>
         <p:nvSpPr>
-          <p:cNvPr id="3" name="TextBox 2"/>
-          <p:cNvSpPr txBox="1"/>
-          <p:nvPr/>
-        </p:nvSpPr>
-        <p:spPr>
-          <a:xfrm>
-            <a:off x="548640" y="137160"/>
-            <a:ext cx="10058400" cy="640080"/>
-          </a:xfrm>
-          <a:prstGeom prst="rect">
-            <a:avLst/>
-          </a:prstGeom>
-          <a:noFill/>
-        </p:spPr>
-        <p:txBody>
-          <a:bodyPr wrap="square">
-            <a:spAutoFit/>
-          </a:bodyPr>
-          <a:lstStyle/>
-          <a:p>
-            <a:pPr algn="l">
-              <a:defRPr sz="2600" b="1">
-                <a:solidFill>
-                  <a:srgbClr val="FFFFFF"/>
-                </a:solidFill>
-                <a:latin typeface="Calibri"/>
-              </a:defRPr>
-            </a:pPr>
-            <a:r>
-              <a:t>Clustering: K-Means Wins (K=6, Composite=0.577)</a:t>
-            </a:r>
-          </a:p>
-        </p:txBody>
-      </p:sp>
-      <p:sp>
-        <p:nvSpPr>
-          <p:cNvPr id="4" name="Rectangle 3"/>
+          <p:cNvPr id="3" name="Rectangle 2"/>
           <p:cNvSpPr/>
           <p:nvPr/>
         </p:nvSpPr>
         <p:spPr>
           <a:xfrm>
-            <a:off x="0" y="914400"/>
+            <a:off x="0" y="868680"/>
             <a:ext cx="12191695" cy="36576"/>
           </a:xfrm>
           <a:prstGeom prst="rect">
@@ -9248,14 +6871,14 @@
       </p:sp>
       <p:sp>
         <p:nvSpPr>
-          <p:cNvPr id="5" name="TextBox 4"/>
+          <p:cNvPr id="4" name="TextBox 3"/>
           <p:cNvSpPr txBox="1"/>
           <p:nvPr/>
         </p:nvSpPr>
         <p:spPr>
           <a:xfrm>
-            <a:off x="548640" y="1188720"/>
-            <a:ext cx="5486400" cy="2743200"/>
+            <a:off x="548640" y="109728"/>
+            <a:ext cx="10972800" cy="548640"/>
           </a:xfrm>
           <a:prstGeom prst="rect">
             <a:avLst/>
@@ -9268,122 +6891,521 @@
           </a:bodyPr>
           <a:lstStyle/>
           <a:p>
+            <a:pPr algn="l">
+              <a:defRPr sz="2500" b="1">
+                <a:solidFill>
+                  <a:srgbClr val="FFFFFF"/>
+                </a:solidFill>
+                <a:latin typeface="Calibri"/>
+              </a:defRPr>
+            </a:pPr>
+            <a:r>
+              <a:t>Core Empirical Results</a:t>
+            </a:r>
+          </a:p>
+        </p:txBody>
+      </p:sp>
+      <p:sp>
+        <p:nvSpPr>
+          <p:cNvPr id="5" name="Rectangle 4"/>
+          <p:cNvSpPr/>
+          <p:nvPr/>
+        </p:nvSpPr>
+        <p:spPr>
+          <a:xfrm>
+            <a:off x="457200" y="1097280"/>
+            <a:ext cx="3566160" cy="3291840"/>
+          </a:xfrm>
+          <a:prstGeom prst="rect">
+            <a:avLst/>
+          </a:prstGeom>
+          <a:solidFill>
+            <a:srgbClr val="E8F0FE"/>
+          </a:solidFill>
+          <a:ln>
+            <a:noFill/>
+          </a:ln>
+        </p:spPr>
+        <p:style>
+          <a:lnRef idx="1">
+            <a:schemeClr val="accent1"/>
+          </a:lnRef>
+          <a:fillRef idx="3">
+            <a:schemeClr val="accent1"/>
+          </a:fillRef>
+          <a:effectRef idx="2">
+            <a:schemeClr val="accent1"/>
+          </a:effectRef>
+          <a:fontRef idx="minor">
+            <a:schemeClr val="lt1"/>
+          </a:fontRef>
+        </p:style>
+        <p:txBody>
+          <a:bodyPr rtlCol="0" anchor="ctr"/>
+          <a:lstStyle/>
+          <a:p>
+            <a:pPr algn="ctr"/>
+          </a:p>
+        </p:txBody>
+      </p:sp>
+      <p:sp>
+        <p:nvSpPr>
+          <p:cNvPr id="6" name="TextBox 5"/>
+          <p:cNvSpPr txBox="1"/>
+          <p:nvPr/>
+        </p:nvSpPr>
+        <p:spPr>
+          <a:xfrm>
+            <a:off x="640080" y="1188720"/>
+            <a:ext cx="3200400" cy="365760"/>
+          </a:xfrm>
+          <a:prstGeom prst="rect">
+            <a:avLst/>
+          </a:prstGeom>
+          <a:noFill/>
+        </p:spPr>
+        <p:txBody>
+          <a:bodyPr wrap="square">
+            <a:spAutoFit/>
+          </a:bodyPr>
+          <a:lstStyle/>
+          <a:p>
+            <a:pPr algn="l">
+              <a:defRPr sz="1600" b="1">
+                <a:solidFill>
+                  <a:srgbClr val="1B3A5C"/>
+                </a:solidFill>
+                <a:latin typeface="Calibri"/>
+              </a:defRPr>
+            </a:pPr>
+            <a:r>
+              <a:t>Regression</a:t>
+            </a:r>
+          </a:p>
+        </p:txBody>
+      </p:sp>
+      <p:sp>
+        <p:nvSpPr>
+          <p:cNvPr id="7" name="TextBox 6"/>
+          <p:cNvSpPr txBox="1"/>
+          <p:nvPr/>
+        </p:nvSpPr>
+        <p:spPr>
+          <a:xfrm>
+            <a:off x="640080" y="1645920"/>
+            <a:ext cx="3200400" cy="2468880"/>
+          </a:xfrm>
+          <a:prstGeom prst="rect">
+            <a:avLst/>
+          </a:prstGeom>
+          <a:noFill/>
+        </p:spPr>
+        <p:txBody>
+          <a:bodyPr wrap="square">
+            <a:spAutoFit/>
+          </a:bodyPr>
+          <a:lstStyle/>
+          <a:p>
             <a:pPr>
-              <a:spcBef>
-                <a:spcPts val="400"/>
-              </a:spcBef>
               <a:spcAft>
-                <a:spcPts val="200"/>
+                <a:spcPts val="300"/>
               </a:spcAft>
-            </a:pPr>
-            <a:r>
-              <a:rPr b="1" sz="1600">
+              <a:defRPr sz="1300">
                 <a:solidFill>
                   <a:srgbClr val="2C2C2C"/>
                 </a:solidFill>
                 <a:latin typeface="Calibri"/>
-              </a:rPr>
-              <a:t>K-Means (K=6): </a:t>
-            </a:r>
-            <a:r>
-              <a:rPr sz="1600">
+              </a:defRPr>
+            </a:pPr>
+            <a:r>
+              <a:t>- XGBoost selected over deep models.</a:t>
+            </a:r>
+          </a:p>
+          <a:p>
+            <a:pPr>
+              <a:spcAft>
+                <a:spcPts val="300"/>
+              </a:spcAft>
+              <a:defRPr sz="1300">
                 <a:solidFill>
                   <a:srgbClr val="2C2C2C"/>
                 </a:solidFill>
                 <a:latin typeface="Calibri"/>
-              </a:rPr>
-              <a:t>Composite 0.577, Silhouette 0.250, 0% noise → Rank 1</a:t>
+              </a:defRPr>
+            </a:pPr>
+            <a:r>
+              <a:t>- Stacked MAE 0.918.</a:t>
             </a:r>
           </a:p>
           <a:p>
             <a:pPr>
-              <a:spcBef>
-                <a:spcPts val="400"/>
-              </a:spcBef>
               <a:spcAft>
-                <a:spcPts val="200"/>
+                <a:spcPts val="300"/>
               </a:spcAft>
-            </a:pPr>
-            <a:r>
-              <a:rPr b="1" sz="1600">
+              <a:defRPr sz="1300">
                 <a:solidFill>
                   <a:srgbClr val="2C2C2C"/>
                 </a:solidFill>
                 <a:latin typeface="Calibri"/>
-              </a:rPr>
-              <a:t>DBSCAN: </a:t>
-            </a:r>
-            <a:r>
-              <a:rPr sz="1600">
+              </a:defRPr>
+            </a:pPr>
+            <a:r>
+              <a:t>- R2 0.999688.</a:t>
+            </a:r>
+          </a:p>
+          <a:p>
+            <a:pPr>
+              <a:spcAft>
+                <a:spcPts val="300"/>
+              </a:spcAft>
+              <a:defRPr sz="1300">
                 <a:solidFill>
                   <a:srgbClr val="2C2C2C"/>
                 </a:solidFill>
                 <a:latin typeface="Calibri"/>
-              </a:rPr>
-              <a:t>Highest silhouette (0.565) but 9.3% noise → unusable for routing</a:t>
-            </a:r>
-          </a:p>
+              </a:defRPr>
+            </a:pPr>
+            <a:r>
+              <a:t>- DHR 0.515.</a:t>
+            </a:r>
+          </a:p>
+        </p:txBody>
+      </p:sp>
+      <p:sp>
+        <p:nvSpPr>
+          <p:cNvPr id="8" name="Rectangle 7"/>
+          <p:cNvSpPr/>
+          <p:nvPr/>
+        </p:nvSpPr>
+        <p:spPr>
+          <a:xfrm>
+            <a:off x="4389120" y="1097280"/>
+            <a:ext cx="3566160" cy="3291840"/>
+          </a:xfrm>
+          <a:prstGeom prst="rect">
+            <a:avLst/>
+          </a:prstGeom>
+          <a:solidFill>
+            <a:srgbClr val="FEF5E7"/>
+          </a:solidFill>
+          <a:ln>
+            <a:noFill/>
+          </a:ln>
+        </p:spPr>
+        <p:style>
+          <a:lnRef idx="1">
+            <a:schemeClr val="accent1"/>
+          </a:lnRef>
+          <a:fillRef idx="3">
+            <a:schemeClr val="accent1"/>
+          </a:fillRef>
+          <a:effectRef idx="2">
+            <a:schemeClr val="accent1"/>
+          </a:effectRef>
+          <a:fontRef idx="minor">
+            <a:schemeClr val="lt1"/>
+          </a:fontRef>
+        </p:style>
+        <p:txBody>
+          <a:bodyPr rtlCol="0" anchor="ctr"/>
+          <a:lstStyle/>
+          <a:p>
+            <a:pPr algn="ctr"/>
+          </a:p>
+        </p:txBody>
+      </p:sp>
+      <p:sp>
+        <p:nvSpPr>
+          <p:cNvPr id="9" name="TextBox 8"/>
+          <p:cNvSpPr txBox="1"/>
+          <p:nvPr/>
+        </p:nvSpPr>
+        <p:spPr>
+          <a:xfrm>
+            <a:off x="4572000" y="1188720"/>
+            <a:ext cx="3200400" cy="365760"/>
+          </a:xfrm>
+          <a:prstGeom prst="rect">
+            <a:avLst/>
+          </a:prstGeom>
+          <a:noFill/>
+        </p:spPr>
+        <p:txBody>
+          <a:bodyPr wrap="square">
+            <a:spAutoFit/>
+          </a:bodyPr>
+          <a:lstStyle/>
+          <a:p>
+            <a:pPr algn="l">
+              <a:defRPr sz="1600" b="1">
+                <a:solidFill>
+                  <a:srgbClr val="D4A01E"/>
+                </a:solidFill>
+                <a:latin typeface="Calibri"/>
+              </a:defRPr>
+            </a:pPr>
+            <a:r>
+              <a:t>Clustering</a:t>
+            </a:r>
+          </a:p>
+        </p:txBody>
+      </p:sp>
+      <p:sp>
+        <p:nvSpPr>
+          <p:cNvPr id="10" name="TextBox 9"/>
+          <p:cNvSpPr txBox="1"/>
+          <p:nvPr/>
+        </p:nvSpPr>
+        <p:spPr>
+          <a:xfrm>
+            <a:off x="4572000" y="1645920"/>
+            <a:ext cx="3200400" cy="2468880"/>
+          </a:xfrm>
+          <a:prstGeom prst="rect">
+            <a:avLst/>
+          </a:prstGeom>
+          <a:noFill/>
+        </p:spPr>
+        <p:txBody>
+          <a:bodyPr wrap="square">
+            <a:spAutoFit/>
+          </a:bodyPr>
+          <a:lstStyle/>
           <a:p>
             <a:pPr>
-              <a:spcBef>
-                <a:spcPts val="400"/>
-              </a:spcBef>
               <a:spcAft>
-                <a:spcPts val="200"/>
+                <a:spcPts val="300"/>
               </a:spcAft>
-            </a:pPr>
-            <a:r>
-              <a:rPr b="1" sz="1600">
+              <a:defRPr sz="1300">
                 <a:solidFill>
                   <a:srgbClr val="2C2C2C"/>
                 </a:solidFill>
                 <a:latin typeface="Calibri"/>
-              </a:rPr>
-              <a:t>GMM: </a:t>
-            </a:r>
-            <a:r>
-              <a:rPr sz="1600">
+              </a:defRPr>
+            </a:pPr>
+            <a:r>
+              <a:t>- K-Means chosen at K=6.</a:t>
+            </a:r>
+          </a:p>
+          <a:p>
+            <a:pPr>
+              <a:spcAft>
+                <a:spcPts val="300"/>
+              </a:spcAft>
+              <a:defRPr sz="1300">
                 <a:solidFill>
                   <a:srgbClr val="2C2C2C"/>
                 </a:solidFill>
                 <a:latin typeface="Calibri"/>
-              </a:rPr>
-              <a:t>K=9, lowest silhouette (0.057), over-fragmented</a:t>
+              </a:defRPr>
+            </a:pPr>
+            <a:r>
+              <a:t>- Composite score 0.577.</a:t>
             </a:r>
           </a:p>
           <a:p>
             <a:pPr>
-              <a:spcBef>
-                <a:spcPts val="400"/>
-              </a:spcBef>
               <a:spcAft>
-                <a:spcPts val="200"/>
+                <a:spcPts val="300"/>
               </a:spcAft>
-            </a:pPr>
-            <a:r>
-              <a:rPr b="1" sz="1600">
+              <a:defRPr sz="1300">
                 <a:solidFill>
                   <a:srgbClr val="2C2C2C"/>
                 </a:solidFill>
                 <a:latin typeface="Calibri"/>
-              </a:rPr>
-              <a:t>Selection rationale: </a:t>
-            </a:r>
-            <a:r>
-              <a:rPr sz="1600">
+              </a:defRPr>
+            </a:pPr>
+            <a:r>
+              <a:t>- Silhouette 0.250.</a:t>
+            </a:r>
+          </a:p>
+          <a:p>
+            <a:pPr>
+              <a:spcAft>
+                <a:spcPts val="300"/>
+              </a:spcAft>
+              <a:defRPr sz="1300">
                 <a:solidFill>
                   <a:srgbClr val="2C2C2C"/>
                 </a:solidFill>
                 <a:latin typeface="Calibri"/>
-              </a:rPr>
-              <a:t>Zero noise critical for sentiment peer-group routing</a:t>
+              </a:defRPr>
+            </a:pPr>
+            <a:r>
+              <a:t>- Zero noise ratio.</a:t>
+            </a:r>
+          </a:p>
+        </p:txBody>
+      </p:sp>
+      <p:sp>
+        <p:nvSpPr>
+          <p:cNvPr id="11" name="Rectangle 10"/>
+          <p:cNvSpPr/>
+          <p:nvPr/>
+        </p:nvSpPr>
+        <p:spPr>
+          <a:xfrm>
+            <a:off x="8321040" y="1097280"/>
+            <a:ext cx="3566160" cy="3291840"/>
+          </a:xfrm>
+          <a:prstGeom prst="rect">
+            <a:avLst/>
+          </a:prstGeom>
+          <a:solidFill>
+            <a:srgbClr val="E6F4EA"/>
+          </a:solidFill>
+          <a:ln>
+            <a:noFill/>
+          </a:ln>
+        </p:spPr>
+        <p:style>
+          <a:lnRef idx="1">
+            <a:schemeClr val="accent1"/>
+          </a:lnRef>
+          <a:fillRef idx="3">
+            <a:schemeClr val="accent1"/>
+          </a:fillRef>
+          <a:effectRef idx="2">
+            <a:schemeClr val="accent1"/>
+          </a:effectRef>
+          <a:fontRef idx="minor">
+            <a:schemeClr val="lt1"/>
+          </a:fontRef>
+        </p:style>
+        <p:txBody>
+          <a:bodyPr rtlCol="0" anchor="ctr"/>
+          <a:lstStyle/>
+          <a:p>
+            <a:pPr algn="ctr"/>
+          </a:p>
+        </p:txBody>
+      </p:sp>
+      <p:sp>
+        <p:nvSpPr>
+          <p:cNvPr id="12" name="TextBox 11"/>
+          <p:cNvSpPr txBox="1"/>
+          <p:nvPr/>
+        </p:nvSpPr>
+        <p:spPr>
+          <a:xfrm>
+            <a:off x="8503920" y="1188720"/>
+            <a:ext cx="3200400" cy="365760"/>
+          </a:xfrm>
+          <a:prstGeom prst="rect">
+            <a:avLst/>
+          </a:prstGeom>
+          <a:noFill/>
+        </p:spPr>
+        <p:txBody>
+          <a:bodyPr wrap="square">
+            <a:spAutoFit/>
+          </a:bodyPr>
+          <a:lstStyle/>
+          <a:p>
+            <a:pPr algn="l">
+              <a:defRPr sz="1600" b="1">
+                <a:solidFill>
+                  <a:srgbClr val="27AE60"/>
+                </a:solidFill>
+                <a:latin typeface="Calibri"/>
+              </a:defRPr>
+            </a:pPr>
+            <a:r>
+              <a:t>Trading</a:t>
+            </a:r>
+          </a:p>
+        </p:txBody>
+      </p:sp>
+      <p:sp>
+        <p:nvSpPr>
+          <p:cNvPr id="13" name="TextBox 12"/>
+          <p:cNvSpPr txBox="1"/>
+          <p:nvPr/>
+        </p:nvSpPr>
+        <p:spPr>
+          <a:xfrm>
+            <a:off x="8503920" y="1645920"/>
+            <a:ext cx="3200400" cy="2468880"/>
+          </a:xfrm>
+          <a:prstGeom prst="rect">
+            <a:avLst/>
+          </a:prstGeom>
+          <a:noFill/>
+        </p:spPr>
+        <p:txBody>
+          <a:bodyPr wrap="square">
+            <a:spAutoFit/>
+          </a:bodyPr>
+          <a:lstStyle/>
+          <a:p>
+            <a:pPr>
+              <a:spcAft>
+                <a:spcPts val="300"/>
+              </a:spcAft>
+              <a:defRPr sz="1300">
+                <a:solidFill>
+                  <a:srgbClr val="2C2C2C"/>
+                </a:solidFill>
+                <a:latin typeface="Calibri"/>
+              </a:defRPr>
+            </a:pPr>
+            <a:r>
+              <a:t>- Meta Ridge Sharpe 8.10.</a:t>
+            </a:r>
+          </a:p>
+          <a:p>
+            <a:pPr>
+              <a:spcAft>
+                <a:spcPts val="300"/>
+              </a:spcAft>
+              <a:defRPr sz="1300">
+                <a:solidFill>
+                  <a:srgbClr val="2C2C2C"/>
+                </a:solidFill>
+                <a:latin typeface="Calibri"/>
+              </a:defRPr>
+            </a:pPr>
+            <a:r>
+              <a:t>- Return +10.5 percent.</a:t>
+            </a:r>
+          </a:p>
+          <a:p>
+            <a:pPr>
+              <a:spcAft>
+                <a:spcPts val="300"/>
+              </a:spcAft>
+              <a:defRPr sz="1300">
+                <a:solidFill>
+                  <a:srgbClr val="2C2C2C"/>
+                </a:solidFill>
+                <a:latin typeface="Calibri"/>
+              </a:defRPr>
+            </a:pPr>
+            <a:r>
+              <a:t>- Max drawdown -0.8 percent.</a:t>
+            </a:r>
+          </a:p>
+          <a:p>
+            <a:pPr>
+              <a:spcAft>
+                <a:spcPts val="300"/>
+              </a:spcAft>
+              <a:defRPr sz="1300">
+                <a:solidFill>
+                  <a:srgbClr val="2C2C2C"/>
+                </a:solidFill>
+                <a:latin typeface="Calibri"/>
+              </a:defRPr>
+            </a:pPr>
+            <a:r>
+              <a:t>- Outperforms buy-and-hold.</a:t>
             </a:r>
           </a:p>
         </p:txBody>
       </p:sp>
       <p:pic>
         <p:nvPicPr>
-          <p:cNvPr id="6" name="Picture 5" descr="03A_02_pca_scatter.png"/>
+          <p:cNvPr id="14" name="Picture 13" descr="03A_02_pca_scatter.png"/>
           <p:cNvPicPr>
             <a:picLocks noChangeAspect="1"/>
           </p:cNvPicPr>
@@ -9397,8 +7419,8 @@
         </p:blipFill>
         <p:spPr>
           <a:xfrm>
-            <a:off x="6400800" y="1188720"/>
-            <a:ext cx="5303520" cy="3997502"/>
+            <a:off x="457200" y="4663440"/>
+            <a:ext cx="5577840" cy="4204269"/>
           </a:xfrm>
           <a:prstGeom prst="rect">
             <a:avLst/>
@@ -9407,7 +7429,7 @@
       </p:pic>
       <p:pic>
         <p:nvPicPr>
-          <p:cNvPr id="7" name="Picture 6" descr="03A_01_k_selection.png"/>
+          <p:cNvPr id="15" name="Picture 14" descr="03_regression_metrics_comparison.png"/>
           <p:cNvPicPr>
             <a:picLocks noChangeAspect="1"/>
           </p:cNvPicPr>
@@ -9421,8 +7443,8 @@
         </p:blipFill>
         <p:spPr>
           <a:xfrm>
-            <a:off x="457200" y="4114800"/>
-            <a:ext cx="5029200" cy="1369471"/>
+            <a:off x="6217920" y="4663440"/>
+            <a:ext cx="5486400" cy="3921877"/>
           </a:xfrm>
           <a:prstGeom prst="rect">
             <a:avLst/>
@@ -9464,7 +7486,7 @@
         <p:spPr>
           <a:xfrm>
             <a:off x="0" y="0"/>
-            <a:ext cx="12191695" cy="914400"/>
+            <a:ext cx="12191695" cy="868680"/>
           </a:xfrm>
           <a:prstGeom prst="rect">
             <a:avLst/>
@@ -9500,49 +7522,13 @@
       </p:sp>
       <p:sp>
         <p:nvSpPr>
-          <p:cNvPr id="3" name="TextBox 2"/>
-          <p:cNvSpPr txBox="1"/>
-          <p:nvPr/>
-        </p:nvSpPr>
-        <p:spPr>
-          <a:xfrm>
-            <a:off x="548640" y="137160"/>
-            <a:ext cx="10058400" cy="640080"/>
-          </a:xfrm>
-          <a:prstGeom prst="rect">
-            <a:avLst/>
-          </a:prstGeom>
-          <a:noFill/>
-        </p:spPr>
-        <p:txBody>
-          <a:bodyPr wrap="square">
-            <a:spAutoFit/>
-          </a:bodyPr>
-          <a:lstStyle/>
-          <a:p>
-            <a:pPr algn="l">
-              <a:defRPr sz="2600" b="1">
-                <a:solidFill>
-                  <a:srgbClr val="FFFFFF"/>
-                </a:solidFill>
-                <a:latin typeface="Calibri"/>
-              </a:defRPr>
-            </a:pPr>
-            <a:r>
-              <a:t>Section 3.5 — How 02B Cluster-Aware Regression Improves Prediction</a:t>
-            </a:r>
-          </a:p>
-        </p:txBody>
-      </p:sp>
-      <p:sp>
-        <p:nvSpPr>
-          <p:cNvPr id="4" name="Rectangle 3"/>
+          <p:cNvPr id="3" name="Rectangle 2"/>
           <p:cNvSpPr/>
           <p:nvPr/>
         </p:nvSpPr>
         <p:spPr>
           <a:xfrm>
-            <a:off x="0" y="914400"/>
+            <a:off x="0" y="868680"/>
             <a:ext cx="12191695" cy="36576"/>
           </a:xfrm>
           <a:prstGeom prst="rect">
@@ -9579,14 +7565,14 @@
       </p:sp>
       <p:sp>
         <p:nvSpPr>
-          <p:cNvPr id="5" name="TextBox 4"/>
+          <p:cNvPr id="4" name="TextBox 3"/>
           <p:cNvSpPr txBox="1"/>
           <p:nvPr/>
         </p:nvSpPr>
         <p:spPr>
           <a:xfrm>
-            <a:off x="548640" y="1188720"/>
-            <a:ext cx="5669280" cy="2560320"/>
+            <a:off x="548640" y="109728"/>
+            <a:ext cx="10972800" cy="548640"/>
           </a:xfrm>
           <a:prstGeom prst="rect">
             <a:avLst/>
@@ -9599,820 +7585,23 @@
           </a:bodyPr>
           <a:lstStyle/>
           <a:p>
-            <a:pPr>
-              <a:spcBef>
-                <a:spcPts val="400"/>
-              </a:spcBef>
-              <a:spcAft>
-                <a:spcPts val="200"/>
-              </a:spcAft>
-            </a:pPr>
-            <a:r>
-              <a:rPr b="1" sz="1500">
-                <a:solidFill>
-                  <a:srgbClr val="2C2C2C"/>
-                </a:solidFill>
-                <a:latin typeface="Calibri"/>
-              </a:rPr>
-              <a:t>Mechanism 1: </a:t>
-            </a:r>
-            <a:r>
-              <a:rPr sz="1500">
-                <a:solidFill>
-                  <a:srgbClr val="2C2C2C"/>
-                </a:solidFill>
-                <a:latin typeface="Calibri"/>
-              </a:rPr>
-              <a:t>Inject cluster_id and market_state one-hot signals into global XGBoost</a:t>
-            </a:r>
-          </a:p>
-          <a:p>
-            <a:pPr>
-              <a:spcBef>
-                <a:spcPts val="400"/>
-              </a:spcBef>
-              <a:spcAft>
-                <a:spcPts val="200"/>
-              </a:spcAft>
-            </a:pPr>
-            <a:r>
-              <a:rPr b="1" sz="1500">
-                <a:solidFill>
-                  <a:srgbClr val="2C2C2C"/>
-                </a:solidFill>
-                <a:latin typeface="Calibri"/>
-              </a:rPr>
-              <a:t>Mechanism 2: </a:t>
-            </a:r>
-            <a:r>
-              <a:rPr sz="1500">
-                <a:solidFill>
-                  <a:srgbClr val="2C2C2C"/>
-                </a:solidFill>
-                <a:latin typeface="Calibri"/>
-              </a:rPr>
-              <a:t>Train cluster-specific XGBoost experts for each behavioural peer group</a:t>
-            </a:r>
-          </a:p>
-          <a:p>
-            <a:pPr>
-              <a:spcBef>
-                <a:spcPts val="400"/>
-              </a:spcBef>
-              <a:spcAft>
-                <a:spcPts val="200"/>
-              </a:spcAft>
-            </a:pPr>
-            <a:r>
-              <a:rPr b="1" sz="1500">
-                <a:solidFill>
-                  <a:srgbClr val="2C2C2C"/>
-                </a:solidFill>
-                <a:latin typeface="Calibri"/>
-              </a:rPr>
-              <a:t>Mechanism 3: </a:t>
-            </a:r>
-            <a:r>
-              <a:rPr sz="1500">
-                <a:solidFill>
-                  <a:srgbClr val="2C2C2C"/>
-                </a:solidFill>
-                <a:latin typeface="Calibri"/>
-              </a:rPr>
-              <a:t>Blend global and expert outputs with validation-tuned alpha</a:t>
-            </a:r>
-          </a:p>
-          <a:p>
-            <a:pPr>
-              <a:spcBef>
-                <a:spcPts val="400"/>
-              </a:spcBef>
-              <a:spcAft>
-                <a:spcPts val="200"/>
-              </a:spcAft>
-            </a:pPr>
-            <a:r>
-              <a:rPr b="1" sz="1500">
-                <a:solidFill>
-                  <a:srgbClr val="2C2C2C"/>
-                </a:solidFill>
-                <a:latin typeface="Calibri"/>
-              </a:rPr>
-              <a:t>Why it works: </a:t>
-            </a:r>
-            <a:r>
-              <a:rPr sz="1500">
-                <a:solidFill>
-                  <a:srgbClr val="2C2C2C"/>
-                </a:solidFill>
-                <a:latin typeface="Calibri"/>
-              </a:rPr>
-              <a:t>Reduces cross-regime parameter conflict and improves specialization</a:t>
-            </a:r>
-          </a:p>
-        </p:txBody>
-      </p:sp>
-      <p:sp>
-        <p:nvSpPr>
-          <p:cNvPr id="6" name="Rectangle 5"/>
-          <p:cNvSpPr/>
-          <p:nvPr/>
-        </p:nvSpPr>
-        <p:spPr>
-          <a:xfrm>
-            <a:off x="457200" y="3840480"/>
-            <a:ext cx="5760720" cy="2651760"/>
-          </a:xfrm>
-          <a:prstGeom prst="rect">
-            <a:avLst/>
-          </a:prstGeom>
-          <a:solidFill>
-            <a:srgbClr val="F7F7F7"/>
-          </a:solidFill>
-          <a:ln>
-            <a:noFill/>
-          </a:ln>
-        </p:spPr>
-        <p:style>
-          <a:lnRef idx="1">
-            <a:schemeClr val="accent1"/>
-          </a:lnRef>
-          <a:fillRef idx="3">
-            <a:schemeClr val="accent1"/>
-          </a:fillRef>
-          <a:effectRef idx="2">
-            <a:schemeClr val="accent1"/>
-          </a:effectRef>
-          <a:fontRef idx="minor">
-            <a:schemeClr val="lt1"/>
-          </a:fontRef>
-        </p:style>
-        <p:txBody>
-          <a:bodyPr rtlCol="0" anchor="ctr"/>
-          <a:lstStyle/>
-          <a:p>
-            <a:pPr algn="ctr"/>
-          </a:p>
-        </p:txBody>
-      </p:sp>
-      <p:sp>
-        <p:nvSpPr>
-          <p:cNvPr id="7" name="TextBox 6"/>
-          <p:cNvSpPr txBox="1"/>
-          <p:nvPr/>
-        </p:nvSpPr>
-        <p:spPr>
-          <a:xfrm>
-            <a:off x="640080" y="3931920"/>
-            <a:ext cx="5394960" cy="365760"/>
-          </a:xfrm>
-          <a:prstGeom prst="rect">
-            <a:avLst/>
-          </a:prstGeom>
-          <a:noFill/>
-        </p:spPr>
-        <p:txBody>
-          <a:bodyPr wrap="square">
-            <a:spAutoFit/>
-          </a:bodyPr>
-          <a:lstStyle/>
-          <a:p>
             <a:pPr algn="l">
-              <a:defRPr sz="1500" b="1">
-                <a:solidFill>
-                  <a:srgbClr val="1B3A5C"/>
-                </a:solidFill>
-                <a:latin typeface="Calibri"/>
-              </a:defRPr>
-            </a:pPr>
-            <a:r>
-              <a:t>02B Impact Summary (Internal Notebook Comparison)</a:t>
-            </a:r>
-          </a:p>
-        </p:txBody>
-      </p:sp>
-      <p:sp>
-        <p:nvSpPr>
-          <p:cNvPr id="8" name="TextBox 7"/>
-          <p:cNvSpPr txBox="1"/>
-          <p:nvPr/>
-        </p:nvSpPr>
-        <p:spPr>
-          <a:xfrm>
-            <a:off x="640080" y="4343400"/>
-            <a:ext cx="3291840" cy="274320"/>
-          </a:xfrm>
-          <a:prstGeom prst="rect">
-            <a:avLst/>
-          </a:prstGeom>
-          <a:noFill/>
-        </p:spPr>
-        <p:txBody>
-          <a:bodyPr wrap="square">
-            <a:spAutoFit/>
-          </a:bodyPr>
-          <a:lstStyle/>
-          <a:p>
-            <a:pPr algn="l">
-              <a:defRPr sz="1200" b="1">
-                <a:solidFill>
-                  <a:srgbClr val="1B3A5C"/>
-                </a:solidFill>
-                <a:latin typeface="Calibri"/>
-              </a:defRPr>
-            </a:pPr>
-            <a:r>
-              <a:t>Setup</a:t>
-            </a:r>
-          </a:p>
-        </p:txBody>
-      </p:sp>
-      <p:sp>
-        <p:nvSpPr>
-          <p:cNvPr id="9" name="TextBox 8"/>
-          <p:cNvSpPr txBox="1"/>
-          <p:nvPr/>
-        </p:nvSpPr>
-        <p:spPr>
-          <a:xfrm>
-            <a:off x="4023360" y="4343400"/>
-            <a:ext cx="914400" cy="274320"/>
-          </a:xfrm>
-          <a:prstGeom prst="rect">
-            <a:avLst/>
-          </a:prstGeom>
-          <a:noFill/>
-        </p:spPr>
-        <p:txBody>
-          <a:bodyPr wrap="square">
-            <a:spAutoFit/>
-          </a:bodyPr>
-          <a:lstStyle/>
-          <a:p>
-            <a:pPr algn="ctr">
-              <a:defRPr sz="1200" b="1">
-                <a:solidFill>
-                  <a:srgbClr val="1B3A5C"/>
-                </a:solidFill>
-                <a:latin typeface="Calibri"/>
-              </a:defRPr>
-            </a:pPr>
-            <a:r>
-              <a:t>MAE</a:t>
-            </a:r>
-          </a:p>
-        </p:txBody>
-      </p:sp>
-      <p:sp>
-        <p:nvSpPr>
-          <p:cNvPr id="10" name="TextBox 9"/>
-          <p:cNvSpPr txBox="1"/>
-          <p:nvPr/>
-        </p:nvSpPr>
-        <p:spPr>
-          <a:xfrm>
-            <a:off x="4937760" y="4343400"/>
-            <a:ext cx="1097280" cy="274320"/>
-          </a:xfrm>
-          <a:prstGeom prst="rect">
-            <a:avLst/>
-          </a:prstGeom>
-          <a:noFill/>
-        </p:spPr>
-        <p:txBody>
-          <a:bodyPr wrap="square">
-            <a:spAutoFit/>
-          </a:bodyPr>
-          <a:lstStyle/>
-          <a:p>
-            <a:pPr algn="ctr">
-              <a:defRPr sz="1200" b="1">
-                <a:solidFill>
-                  <a:srgbClr val="1B3A5C"/>
-                </a:solidFill>
-                <a:latin typeface="Calibri"/>
-              </a:defRPr>
-            </a:pPr>
-            <a:r>
-              <a:t>Improve</a:t>
-            </a:r>
-          </a:p>
-        </p:txBody>
-      </p:sp>
-      <p:sp>
-        <p:nvSpPr>
-          <p:cNvPr id="11" name="TextBox 10"/>
-          <p:cNvSpPr txBox="1"/>
-          <p:nvPr/>
-        </p:nvSpPr>
-        <p:spPr>
-          <a:xfrm>
-            <a:off x="685800" y="4690872"/>
-            <a:ext cx="3200400" cy="274320"/>
-          </a:xfrm>
-          <a:prstGeom prst="rect">
-            <a:avLst/>
-          </a:prstGeom>
-          <a:noFill/>
-        </p:spPr>
-        <p:txBody>
-          <a:bodyPr wrap="square">
-            <a:spAutoFit/>
-          </a:bodyPr>
-          <a:lstStyle/>
-          <a:p>
-            <a:pPr algn="l">
-              <a:defRPr sz="1100" b="0">
-                <a:solidFill>
-                  <a:srgbClr val="2C2C2C"/>
-                </a:solidFill>
-                <a:latin typeface="Calibri"/>
-              </a:defRPr>
-            </a:pPr>
-            <a:r>
-              <a:t>Global Baseline</a:t>
-            </a:r>
-          </a:p>
-        </p:txBody>
-      </p:sp>
-      <p:sp>
-        <p:nvSpPr>
-          <p:cNvPr id="12" name="TextBox 11"/>
-          <p:cNvSpPr txBox="1"/>
-          <p:nvPr/>
-        </p:nvSpPr>
-        <p:spPr>
-          <a:xfrm>
-            <a:off x="4023360" y="4690872"/>
-            <a:ext cx="914400" cy="274320"/>
-          </a:xfrm>
-          <a:prstGeom prst="rect">
-            <a:avLst/>
-          </a:prstGeom>
-          <a:noFill/>
-        </p:spPr>
-        <p:txBody>
-          <a:bodyPr wrap="square">
-            <a:spAutoFit/>
-          </a:bodyPr>
-          <a:lstStyle/>
-          <a:p>
-            <a:pPr algn="ctr">
-              <a:defRPr sz="1100" b="0">
-                <a:solidFill>
-                  <a:srgbClr val="2C2C2C"/>
-                </a:solidFill>
-                <a:latin typeface="Calibri"/>
-              </a:defRPr>
-            </a:pPr>
-            <a:r>
-              <a:t>3.7405</a:t>
-            </a:r>
-          </a:p>
-        </p:txBody>
-      </p:sp>
-      <p:sp>
-        <p:nvSpPr>
-          <p:cNvPr id="13" name="TextBox 12"/>
-          <p:cNvSpPr txBox="1"/>
-          <p:nvPr/>
-        </p:nvSpPr>
-        <p:spPr>
-          <a:xfrm>
-            <a:off x="4937760" y="4690872"/>
-            <a:ext cx="1097280" cy="274320"/>
-          </a:xfrm>
-          <a:prstGeom prst="rect">
-            <a:avLst/>
-          </a:prstGeom>
-          <a:noFill/>
-        </p:spPr>
-        <p:txBody>
-          <a:bodyPr wrap="square">
-            <a:spAutoFit/>
-          </a:bodyPr>
-          <a:lstStyle/>
-          <a:p>
-            <a:pPr algn="ctr">
-              <a:defRPr sz="1100" b="0">
-                <a:solidFill>
-                  <a:srgbClr val="2C2C2C"/>
-                </a:solidFill>
-                <a:latin typeface="Calibri"/>
-              </a:defRPr>
-            </a:pPr>
-            <a:r>
-              <a:t>0.00%</a:t>
-            </a:r>
-          </a:p>
-        </p:txBody>
-      </p:sp>
-      <p:sp>
-        <p:nvSpPr>
-          <p:cNvPr id="14" name="TextBox 13"/>
-          <p:cNvSpPr txBox="1"/>
-          <p:nvPr/>
-        </p:nvSpPr>
-        <p:spPr>
-          <a:xfrm>
-            <a:off x="685800" y="5038344"/>
-            <a:ext cx="3200400" cy="274320"/>
-          </a:xfrm>
-          <a:prstGeom prst="rect">
-            <a:avLst/>
-          </a:prstGeom>
-          <a:noFill/>
-        </p:spPr>
-        <p:txBody>
-          <a:bodyPr wrap="square">
-            <a:spAutoFit/>
-          </a:bodyPr>
-          <a:lstStyle/>
-          <a:p>
-            <a:pPr algn="l">
-              <a:defRPr sz="1100" b="0">
-                <a:solidFill>
-                  <a:srgbClr val="2C2C2C"/>
-                </a:solidFill>
-                <a:latin typeface="Calibri"/>
-              </a:defRPr>
-            </a:pPr>
-            <a:r>
-              <a:t>Global + Cluster Features</a:t>
-            </a:r>
-          </a:p>
-        </p:txBody>
-      </p:sp>
-      <p:sp>
-        <p:nvSpPr>
-          <p:cNvPr id="15" name="TextBox 14"/>
-          <p:cNvSpPr txBox="1"/>
-          <p:nvPr/>
-        </p:nvSpPr>
-        <p:spPr>
-          <a:xfrm>
-            <a:off x="4023360" y="5038344"/>
-            <a:ext cx="914400" cy="274320"/>
-          </a:xfrm>
-          <a:prstGeom prst="rect">
-            <a:avLst/>
-          </a:prstGeom>
-          <a:noFill/>
-        </p:spPr>
-        <p:txBody>
-          <a:bodyPr wrap="square">
-            <a:spAutoFit/>
-          </a:bodyPr>
-          <a:lstStyle/>
-          <a:p>
-            <a:pPr algn="ctr">
-              <a:defRPr sz="1100" b="0">
-                <a:solidFill>
-                  <a:srgbClr val="2C2C2C"/>
-                </a:solidFill>
-                <a:latin typeface="Calibri"/>
-              </a:defRPr>
-            </a:pPr>
-            <a:r>
-              <a:t>3.4084</a:t>
-            </a:r>
-          </a:p>
-        </p:txBody>
-      </p:sp>
-      <p:sp>
-        <p:nvSpPr>
-          <p:cNvPr id="16" name="TextBox 15"/>
-          <p:cNvSpPr txBox="1"/>
-          <p:nvPr/>
-        </p:nvSpPr>
-        <p:spPr>
-          <a:xfrm>
-            <a:off x="4937760" y="5038344"/>
-            <a:ext cx="1097280" cy="274320"/>
-          </a:xfrm>
-          <a:prstGeom prst="rect">
-            <a:avLst/>
-          </a:prstGeom>
-          <a:noFill/>
-        </p:spPr>
-        <p:txBody>
-          <a:bodyPr wrap="square">
-            <a:spAutoFit/>
-          </a:bodyPr>
-          <a:lstStyle/>
-          <a:p>
-            <a:pPr algn="ctr">
-              <a:defRPr sz="1100" b="0">
-                <a:solidFill>
-                  <a:srgbClr val="2C2C2C"/>
-                </a:solidFill>
-                <a:latin typeface="Calibri"/>
-              </a:defRPr>
-            </a:pPr>
-            <a:r>
-              <a:t>8.88%</a:t>
-            </a:r>
-          </a:p>
-        </p:txBody>
-      </p:sp>
-      <p:sp>
-        <p:nvSpPr>
-          <p:cNvPr id="17" name="TextBox 16"/>
-          <p:cNvSpPr txBox="1"/>
-          <p:nvPr/>
-        </p:nvSpPr>
-        <p:spPr>
-          <a:xfrm>
-            <a:off x="685800" y="5385816"/>
-            <a:ext cx="3200400" cy="274320"/>
-          </a:xfrm>
-          <a:prstGeom prst="rect">
-            <a:avLst/>
-          </a:prstGeom>
-          <a:noFill/>
-        </p:spPr>
-        <p:txBody>
-          <a:bodyPr wrap="square">
-            <a:spAutoFit/>
-          </a:bodyPr>
-          <a:lstStyle/>
-          <a:p>
-            <a:pPr algn="l">
-              <a:defRPr sz="1100" b="0">
-                <a:solidFill>
-                  <a:srgbClr val="2C2C2C"/>
-                </a:solidFill>
-                <a:latin typeface="Calibri"/>
-              </a:defRPr>
-            </a:pPr>
-            <a:r>
-              <a:t>Cluster-Specific Models</a:t>
-            </a:r>
-          </a:p>
-        </p:txBody>
-      </p:sp>
-      <p:sp>
-        <p:nvSpPr>
-          <p:cNvPr id="18" name="TextBox 17"/>
-          <p:cNvSpPr txBox="1"/>
-          <p:nvPr/>
-        </p:nvSpPr>
-        <p:spPr>
-          <a:xfrm>
-            <a:off x="4023360" y="5385816"/>
-            <a:ext cx="914400" cy="274320"/>
-          </a:xfrm>
-          <a:prstGeom prst="rect">
-            <a:avLst/>
-          </a:prstGeom>
-          <a:noFill/>
-        </p:spPr>
-        <p:txBody>
-          <a:bodyPr wrap="square">
-            <a:spAutoFit/>
-          </a:bodyPr>
-          <a:lstStyle/>
-          <a:p>
-            <a:pPr algn="ctr">
-              <a:defRPr sz="1100" b="0">
-                <a:solidFill>
-                  <a:srgbClr val="2C2C2C"/>
-                </a:solidFill>
-                <a:latin typeface="Calibri"/>
-              </a:defRPr>
-            </a:pPr>
-            <a:r>
-              <a:t>2.5557</a:t>
-            </a:r>
-          </a:p>
-        </p:txBody>
-      </p:sp>
-      <p:sp>
-        <p:nvSpPr>
-          <p:cNvPr id="19" name="TextBox 18"/>
-          <p:cNvSpPr txBox="1"/>
-          <p:nvPr/>
-        </p:nvSpPr>
-        <p:spPr>
-          <a:xfrm>
-            <a:off x="4937760" y="5385816"/>
-            <a:ext cx="1097280" cy="274320"/>
-          </a:xfrm>
-          <a:prstGeom prst="rect">
-            <a:avLst/>
-          </a:prstGeom>
-          <a:noFill/>
-        </p:spPr>
-        <p:txBody>
-          <a:bodyPr wrap="square">
-            <a:spAutoFit/>
-          </a:bodyPr>
-          <a:lstStyle/>
-          <a:p>
-            <a:pPr algn="ctr">
-              <a:defRPr sz="1100" b="0">
-                <a:solidFill>
-                  <a:srgbClr val="2C2C2C"/>
-                </a:solidFill>
-                <a:latin typeface="Calibri"/>
-              </a:defRPr>
-            </a:pPr>
-            <a:r>
-              <a:t>31.68%</a:t>
-            </a:r>
-          </a:p>
-        </p:txBody>
-      </p:sp>
-      <p:sp>
-        <p:nvSpPr>
-          <p:cNvPr id="20" name="Rectangle 19"/>
-          <p:cNvSpPr/>
-          <p:nvPr/>
-        </p:nvSpPr>
-        <p:spPr>
-          <a:xfrm>
-            <a:off x="594360" y="5733288"/>
-            <a:ext cx="5440680" cy="310896"/>
-          </a:xfrm>
-          <a:prstGeom prst="rect">
-            <a:avLst/>
-          </a:prstGeom>
-          <a:solidFill>
-            <a:srgbClr val="E6F4EA"/>
-          </a:solidFill>
-          <a:ln>
-            <a:noFill/>
-          </a:ln>
-        </p:spPr>
-        <p:style>
-          <a:lnRef idx="1">
-            <a:schemeClr val="accent1"/>
-          </a:lnRef>
-          <a:fillRef idx="3">
-            <a:schemeClr val="accent1"/>
-          </a:fillRef>
-          <a:effectRef idx="2">
-            <a:schemeClr val="accent1"/>
-          </a:effectRef>
-          <a:fontRef idx="minor">
-            <a:schemeClr val="lt1"/>
-          </a:fontRef>
-        </p:style>
-        <p:txBody>
-          <a:bodyPr rtlCol="0" anchor="ctr"/>
-          <a:lstStyle/>
-          <a:p>
-            <a:pPr algn="ctr"/>
-          </a:p>
-        </p:txBody>
-      </p:sp>
-      <p:sp>
-        <p:nvSpPr>
-          <p:cNvPr id="21" name="TextBox 20"/>
-          <p:cNvSpPr txBox="1"/>
-          <p:nvPr/>
-        </p:nvSpPr>
-        <p:spPr>
-          <a:xfrm>
-            <a:off x="685800" y="5733288"/>
-            <a:ext cx="3200400" cy="274320"/>
-          </a:xfrm>
-          <a:prstGeom prst="rect">
-            <a:avLst/>
-          </a:prstGeom>
-          <a:noFill/>
-        </p:spPr>
-        <p:txBody>
-          <a:bodyPr wrap="square">
-            <a:spAutoFit/>
-          </a:bodyPr>
-          <a:lstStyle/>
-          <a:p>
-            <a:pPr algn="l">
-              <a:defRPr sz="1100" b="1">
-                <a:solidFill>
-                  <a:srgbClr val="27AE60"/>
-                </a:solidFill>
-                <a:latin typeface="Calibri"/>
-              </a:defRPr>
-            </a:pPr>
-            <a:r>
-              <a:t>Blended (Global + Cluster)</a:t>
-            </a:r>
-          </a:p>
-        </p:txBody>
-      </p:sp>
-      <p:sp>
-        <p:nvSpPr>
-          <p:cNvPr id="22" name="TextBox 21"/>
-          <p:cNvSpPr txBox="1"/>
-          <p:nvPr/>
-        </p:nvSpPr>
-        <p:spPr>
-          <a:xfrm>
-            <a:off x="4023360" y="5733288"/>
-            <a:ext cx="914400" cy="274320"/>
-          </a:xfrm>
-          <a:prstGeom prst="rect">
-            <a:avLst/>
-          </a:prstGeom>
-          <a:noFill/>
-        </p:spPr>
-        <p:txBody>
-          <a:bodyPr wrap="square">
-            <a:spAutoFit/>
-          </a:bodyPr>
-          <a:lstStyle/>
-          <a:p>
-            <a:pPr algn="ctr">
-              <a:defRPr sz="1100" b="1">
-                <a:solidFill>
-                  <a:srgbClr val="27AE60"/>
-                </a:solidFill>
-                <a:latin typeface="Calibri"/>
-              </a:defRPr>
-            </a:pPr>
-            <a:r>
-              <a:t>2.5557</a:t>
-            </a:r>
-          </a:p>
-        </p:txBody>
-      </p:sp>
-      <p:sp>
-        <p:nvSpPr>
-          <p:cNvPr id="23" name="TextBox 22"/>
-          <p:cNvSpPr txBox="1"/>
-          <p:nvPr/>
-        </p:nvSpPr>
-        <p:spPr>
-          <a:xfrm>
-            <a:off x="4937760" y="5733288"/>
-            <a:ext cx="1097280" cy="274320"/>
-          </a:xfrm>
-          <a:prstGeom prst="rect">
-            <a:avLst/>
-          </a:prstGeom>
-          <a:noFill/>
-        </p:spPr>
-        <p:txBody>
-          <a:bodyPr wrap="square">
-            <a:spAutoFit/>
-          </a:bodyPr>
-          <a:lstStyle/>
-          <a:p>
-            <a:pPr algn="ctr">
-              <a:defRPr sz="1100" b="1">
-                <a:solidFill>
-                  <a:srgbClr val="27AE60"/>
-                </a:solidFill>
-                <a:latin typeface="Calibri"/>
-              </a:defRPr>
-            </a:pPr>
-            <a:r>
-              <a:t>31.68%</a:t>
-            </a:r>
-          </a:p>
-        </p:txBody>
-      </p:sp>
-      <p:sp>
-        <p:nvSpPr>
-          <p:cNvPr id="24" name="TextBox 23"/>
-          <p:cNvSpPr txBox="1"/>
-          <p:nvPr/>
-        </p:nvSpPr>
-        <p:spPr>
-          <a:xfrm>
-            <a:off x="640080" y="6080760"/>
-            <a:ext cx="5394960" cy="320040"/>
-          </a:xfrm>
-          <a:prstGeom prst="rect">
-            <a:avLst/>
-          </a:prstGeom>
-          <a:noFill/>
-        </p:spPr>
-        <p:txBody>
-          <a:bodyPr wrap="square">
-            <a:spAutoFit/>
-          </a:bodyPr>
-          <a:lstStyle/>
-          <a:p>
-            <a:pPr algn="l">
-              <a:defRPr sz="1100" b="0">
-                <a:solidFill>
-                  <a:srgbClr val="666666"/>
-                </a:solidFill>
-                <a:latin typeface="Calibri"/>
-              </a:defRPr>
-            </a:pPr>
-            <a:r>
-              <a:t>Blend formula: y_blend = alpha*y_global + (1-alpha)*y_cluster</a:t>
+              <a:defRPr sz="2500" b="1">
+                <a:solidFill>
+                  <a:srgbClr val="FFFFFF"/>
+                </a:solidFill>
+                <a:latin typeface="Calibri"/>
+              </a:defRPr>
+            </a:pPr>
+            <a:r>
+              <a:t>Trading Behavior, WFO Validation, and Alpha Diagnostics</a:t>
             </a:r>
           </a:p>
         </p:txBody>
       </p:sp>
       <p:pic>
         <p:nvPicPr>
-          <p:cNvPr id="25" name="Picture 24" descr="10_cluster_aware_feature_importance.png"/>
+          <p:cNvPr id="5" name="Picture 4" descr="02F_01_cumulative_returns.png"/>
           <p:cNvPicPr>
             <a:picLocks noChangeAspect="1"/>
           </p:cNvPicPr>
@@ -10426,14 +7615,152 @@
         </p:blipFill>
         <p:spPr>
           <a:xfrm>
-            <a:off x="6492240" y="1188720"/>
-            <a:ext cx="5212080" cy="3625948"/>
+            <a:off x="457200" y="1097280"/>
+            <a:ext cx="5486400" cy="2162612"/>
           </a:xfrm>
           <a:prstGeom prst="rect">
             <a:avLst/>
           </a:prstGeom>
         </p:spPr>
       </p:pic>
+      <p:pic>
+        <p:nvPicPr>
+          <p:cNvPr id="6" name="Picture 5" descr="02F_02_drawdown.png"/>
+          <p:cNvPicPr>
+            <a:picLocks noChangeAspect="1"/>
+          </p:cNvPicPr>
+          <p:nvPr/>
+        </p:nvPicPr>
+        <p:blipFill>
+          <a:blip r:embed="rId3"/>
+          <a:stretch>
+            <a:fillRect/>
+          </a:stretch>
+        </p:blipFill>
+        <p:spPr>
+          <a:xfrm>
+            <a:off x="6217920" y="1097280"/>
+            <a:ext cx="5486400" cy="1797057"/>
+          </a:xfrm>
+          <a:prstGeom prst="rect">
+            <a:avLst/>
+          </a:prstGeom>
+        </p:spPr>
+      </p:pic>
+      <p:sp>
+        <p:nvSpPr>
+          <p:cNvPr id="7" name="Rectangle 6"/>
+          <p:cNvSpPr/>
+          <p:nvPr/>
+        </p:nvSpPr>
+        <p:spPr>
+          <a:xfrm>
+            <a:off x="457200" y="4754880"/>
+            <a:ext cx="11247120" cy="1645920"/>
+          </a:xfrm>
+          <a:prstGeom prst="rect">
+            <a:avLst/>
+          </a:prstGeom>
+          <a:solidFill>
+            <a:srgbClr val="F2F2F2"/>
+          </a:solidFill>
+          <a:ln>
+            <a:noFill/>
+          </a:ln>
+        </p:spPr>
+        <p:style>
+          <a:lnRef idx="1">
+            <a:schemeClr val="accent1"/>
+          </a:lnRef>
+          <a:fillRef idx="3">
+            <a:schemeClr val="accent1"/>
+          </a:fillRef>
+          <a:effectRef idx="2">
+            <a:schemeClr val="accent1"/>
+          </a:effectRef>
+          <a:fontRef idx="minor">
+            <a:schemeClr val="lt1"/>
+          </a:fontRef>
+        </p:style>
+        <p:txBody>
+          <a:bodyPr rtlCol="0" anchor="ctr"/>
+          <a:lstStyle/>
+          <a:p>
+            <a:pPr algn="ctr"/>
+          </a:p>
+        </p:txBody>
+      </p:sp>
+      <p:sp>
+        <p:nvSpPr>
+          <p:cNvPr id="8" name="TextBox 7"/>
+          <p:cNvSpPr txBox="1"/>
+          <p:nvPr/>
+        </p:nvSpPr>
+        <p:spPr>
+          <a:xfrm>
+            <a:off x="640080" y="4892040"/>
+            <a:ext cx="10881360" cy="1371600"/>
+          </a:xfrm>
+          <a:prstGeom prst="rect">
+            <a:avLst/>
+          </a:prstGeom>
+          <a:noFill/>
+        </p:spPr>
+        <p:txBody>
+          <a:bodyPr wrap="square">
+            <a:spAutoFit/>
+          </a:bodyPr>
+          <a:lstStyle/>
+          <a:p>
+            <a:pPr>
+              <a:spcAft>
+                <a:spcPts val="300"/>
+              </a:spcAft>
+              <a:defRPr sz="1300">
+                <a:solidFill>
+                  <a:srgbClr val="2C2C2C"/>
+                </a:solidFill>
+                <a:latin typeface="Calibri"/>
+              </a:defRPr>
+            </a:pPr>
+            <a:r>
+              <a:t>- WFO comparison added to prevent fixed-split optimism in final reporting.</a:t>
+            </a:r>
+          </a:p>
+          <a:p>
+            <a:pPr>
+              <a:spcAft>
+                <a:spcPts val="300"/>
+              </a:spcAft>
+              <a:defRPr sz="1300">
+                <a:solidFill>
+                  <a:srgbClr val="2C2C2C"/>
+                </a:solidFill>
+                <a:latin typeface="Calibri"/>
+              </a:defRPr>
+            </a:pPr>
+            <a:r>
+              <a:t>- IC and ICIR diagnostics included for cross-sectional stock-selection signal quality.</a:t>
+            </a:r>
+          </a:p>
+          <a:p>
+            <a:pPr>
+              <a:spcAft>
+                <a:spcPts val="300"/>
+              </a:spcAft>
+              <a:defRPr sz="1300">
+                <a:solidFill>
+                  <a:srgbClr val="2C2C2C"/>
+                </a:solidFill>
+                <a:latin typeface="Calibri"/>
+              </a:defRPr>
+            </a:pPr>
+            <a:r>
+              <a:t>- Primary interpretation remains conservative until larger and multi-regime OOS confirms stability.</a:t>
+            </a:r>
+          </a:p>
+        </p:txBody>
+      </p:sp>
     </p:spTree>
   </p:cSld>
   <p:clrMapOvr>
@@ -10469,7 +7796,7 @@
         <p:spPr>
           <a:xfrm>
             <a:off x="0" y="0"/>
-            <a:ext cx="12191695" cy="914400"/>
+            <a:ext cx="12191695" cy="868680"/>
           </a:xfrm>
           <a:prstGeom prst="rect">
             <a:avLst/>
@@ -10505,49 +7832,13 @@
       </p:sp>
       <p:sp>
         <p:nvSpPr>
-          <p:cNvPr id="3" name="TextBox 2"/>
-          <p:cNvSpPr txBox="1"/>
-          <p:nvPr/>
-        </p:nvSpPr>
-        <p:spPr>
-          <a:xfrm>
-            <a:off x="548640" y="137160"/>
-            <a:ext cx="10058400" cy="640080"/>
-          </a:xfrm>
-          <a:prstGeom prst="rect">
-            <a:avLst/>
-          </a:prstGeom>
-          <a:noFill/>
-        </p:spPr>
-        <p:txBody>
-          <a:bodyPr wrap="square">
-            <a:spAutoFit/>
-          </a:bodyPr>
-          <a:lstStyle/>
-          <a:p>
-            <a:pPr algn="l">
-              <a:defRPr sz="2600" b="1">
-                <a:solidFill>
-                  <a:srgbClr val="FFFFFF"/>
-                </a:solidFill>
-                <a:latin typeface="Calibri"/>
-              </a:defRPr>
-            </a:pPr>
-            <a:r>
-              <a:t>Innovation 1 — Cluster News Prediction (聚類感知)</a:t>
-            </a:r>
-          </a:p>
-        </p:txBody>
-      </p:sp>
-      <p:sp>
-        <p:nvSpPr>
-          <p:cNvPr id="4" name="Rectangle 3"/>
+          <p:cNvPr id="3" name="Rectangle 2"/>
           <p:cNvSpPr/>
           <p:nvPr/>
         </p:nvSpPr>
         <p:spPr>
           <a:xfrm>
-            <a:off x="0" y="914400"/>
+            <a:off x="0" y="868680"/>
             <a:ext cx="12191695" cy="36576"/>
           </a:xfrm>
           <a:prstGeom prst="rect">
@@ -10584,14 +7875,14 @@
       </p:sp>
       <p:sp>
         <p:nvSpPr>
-          <p:cNvPr id="5" name="TextBox 4"/>
+          <p:cNvPr id="4" name="TextBox 3"/>
           <p:cNvSpPr txBox="1"/>
           <p:nvPr/>
         </p:nvSpPr>
         <p:spPr>
           <a:xfrm>
-            <a:off x="548640" y="1188720"/>
-            <a:ext cx="5486400" cy="2926080"/>
+            <a:off x="548640" y="109728"/>
+            <a:ext cx="10972800" cy="548640"/>
           </a:xfrm>
           <a:prstGeom prst="rect">
             <a:avLst/>
@@ -10604,163 +7895,36 @@
           </a:bodyPr>
           <a:lstStyle/>
           <a:p>
-            <a:pPr>
-              <a:spcBef>
-                <a:spcPts val="400"/>
-              </a:spcBef>
-              <a:spcAft>
-                <a:spcPts val="200"/>
-              </a:spcAft>
-            </a:pPr>
-            <a:r>
-              <a:rPr b="1" sz="1600">
-                <a:solidFill>
-                  <a:srgbClr val="2C2C2C"/>
-                </a:solidFill>
-                <a:latin typeface="Calibri"/>
-              </a:rPr>
-              <a:t>Problem: </a:t>
-            </a:r>
-            <a:r>
-              <a:rPr sz="1600">
-                <a:solidFill>
-                  <a:srgbClr val="2C2C2C"/>
-                </a:solidFill>
-                <a:latin typeface="Calibri"/>
-              </a:rPr>
-              <a:t>Per-ticker news is sparse — most small/mid-caps have zero headlines on any given day</a:t>
-            </a:r>
-          </a:p>
-          <a:p>
-            <a:pPr>
-              <a:spcBef>
-                <a:spcPts val="400"/>
-              </a:spcBef>
-              <a:spcAft>
-                <a:spcPts val="200"/>
-              </a:spcAft>
-            </a:pPr>
-            <a:r>
-              <a:rPr b="1" sz="1600">
-                <a:solidFill>
-                  <a:srgbClr val="2C2C2C"/>
-                </a:solidFill>
-                <a:latin typeface="Calibri"/>
-              </a:rPr>
-              <a:t>Solution: </a:t>
-            </a:r>
-            <a:r>
-              <a:rPr sz="1600">
-                <a:solidFill>
-                  <a:srgbClr val="2C2C2C"/>
-                </a:solidFill>
-                <a:latin typeface="Calibri"/>
-              </a:rPr>
-              <a:t>Route news through cluster peer set → transforms sparsity into abundance</a:t>
-            </a:r>
-          </a:p>
-          <a:p>
-            <a:pPr>
-              <a:spcBef>
-                <a:spcPts val="400"/>
-              </a:spcBef>
-              <a:spcAft>
-                <a:spcPts val="200"/>
-              </a:spcAft>
-            </a:pPr>
-            <a:r>
-              <a:rPr b="1" sz="1600">
-                <a:solidFill>
-                  <a:srgbClr val="2C2C2C"/>
-                </a:solidFill>
-                <a:latin typeface="Calibri"/>
-              </a:rPr>
-              <a:t>3 channels: </a:t>
-            </a:r>
-            <a:r>
-              <a:rPr sz="1600">
-                <a:solidFill>
-                  <a:srgbClr val="2C2C2C"/>
-                </a:solidFill>
-                <a:latin typeface="Calibri"/>
-              </a:rPr>
-              <a:t>Direct ticker news + Peer-cluster news + Macro news</a:t>
-            </a:r>
-          </a:p>
-          <a:p>
-            <a:pPr>
-              <a:spcBef>
-                <a:spcPts val="400"/>
-              </a:spcBef>
-              <a:spcAft>
-                <a:spcPts val="200"/>
-              </a:spcAft>
-            </a:pPr>
-            <a:r>
-              <a:rPr b="1" sz="1600">
-                <a:solidFill>
-                  <a:srgbClr val="2C2C2C"/>
-                </a:solidFill>
-                <a:latin typeface="Calibri"/>
-              </a:rPr>
-              <a:t>Weighting: </a:t>
-            </a:r>
-            <a:r>
-              <a:rPr sz="1600">
-                <a:solidFill>
-                  <a:srgbClr val="2C2C2C"/>
-                </a:solidFill>
-                <a:latin typeface="Calibri"/>
-              </a:rPr>
-              <a:t>TF-IDF cosine similarity × recency × source reliability × FinBERT polarity</a:t>
-            </a:r>
-          </a:p>
-          <a:p>
-            <a:pPr>
-              <a:spcBef>
-                <a:spcPts val="400"/>
-              </a:spcBef>
-              <a:spcAft>
-                <a:spcPts val="200"/>
-              </a:spcAft>
-            </a:pPr>
-            <a:r>
-              <a:rPr b="1" sz="1600">
-                <a:solidFill>
-                  <a:srgbClr val="2C2C2C"/>
-                </a:solidFill>
-                <a:latin typeface="Calibri"/>
-              </a:rPr>
-              <a:t>Stacked residual: </a:t>
-            </a:r>
-            <a:r>
-              <a:rPr sz="1600">
-                <a:solidFill>
-                  <a:srgbClr val="2C2C2C"/>
-                </a:solidFill>
-                <a:latin typeface="Calibri"/>
-              </a:rPr>
-              <a:t>Sentiment explains only residual not captured by price baseline</a:t>
-            </a:r>
-          </a:p>
-        </p:txBody>
-      </p:sp>
-      <p:sp>
-        <p:nvSpPr>
-          <p:cNvPr id="6" name="Rectangle 5"/>
+            <a:pPr algn="l">
+              <a:defRPr sz="2500" b="1">
+                <a:solidFill>
+                  <a:srgbClr val="FFFFFF"/>
+                </a:solidFill>
+                <a:latin typeface="Calibri"/>
+              </a:defRPr>
+            </a:pPr>
+            <a:r>
+              <a:t>Controls, Auditability, and Governance</a:t>
+            </a:r>
+          </a:p>
+        </p:txBody>
+      </p:sp>
+      <p:sp>
+        <p:nvSpPr>
+          <p:cNvPr id="5" name="Rectangle 4"/>
           <p:cNvSpPr/>
           <p:nvPr/>
         </p:nvSpPr>
         <p:spPr>
           <a:xfrm>
-            <a:off x="457200" y="4389120"/>
-            <a:ext cx="5669280" cy="2286000"/>
+            <a:off x="457200" y="1097280"/>
+            <a:ext cx="5577840" cy="5120640"/>
           </a:xfrm>
           <a:prstGeom prst="rect">
             <a:avLst/>
           </a:prstGeom>
           <a:solidFill>
-            <a:srgbClr val="E6F4EA"/>
+            <a:srgbClr val="E8F0FE"/>
           </a:solidFill>
           <a:ln>
             <a:noFill/>
@@ -10790,14 +7954,50 @@
       </p:sp>
       <p:sp>
         <p:nvSpPr>
+          <p:cNvPr id="6" name="TextBox 5"/>
+          <p:cNvSpPr txBox="1"/>
+          <p:nvPr/>
+        </p:nvSpPr>
+        <p:spPr>
+          <a:xfrm>
+            <a:off x="640080" y="1280160"/>
+            <a:ext cx="5212080" cy="365760"/>
+          </a:xfrm>
+          <a:prstGeom prst="rect">
+            <a:avLst/>
+          </a:prstGeom>
+          <a:noFill/>
+        </p:spPr>
+        <p:txBody>
+          <a:bodyPr wrap="square">
+            <a:spAutoFit/>
+          </a:bodyPr>
+          <a:lstStyle/>
+          <a:p>
+            <a:pPr algn="l">
+              <a:defRPr sz="1700" b="1">
+                <a:solidFill>
+                  <a:srgbClr val="1B3A5C"/>
+                </a:solidFill>
+                <a:latin typeface="Calibri"/>
+              </a:defRPr>
+            </a:pPr>
+            <a:r>
+              <a:t>Implemented controls</a:t>
+            </a:r>
+          </a:p>
+        </p:txBody>
+      </p:sp>
+      <p:sp>
+        <p:nvSpPr>
           <p:cNvPr id="7" name="TextBox 6"/>
           <p:cNvSpPr txBox="1"/>
           <p:nvPr/>
         </p:nvSpPr>
         <p:spPr>
           <a:xfrm>
-            <a:off x="640080" y="4480560"/>
-            <a:ext cx="5303520" cy="365760"/>
+            <a:off x="640080" y="1828800"/>
+            <a:ext cx="5212080" cy="4297680"/>
           </a:xfrm>
           <a:prstGeom prst="rect">
             <a:avLst/>
@@ -10810,30 +8010,140 @@
           </a:bodyPr>
           <a:lstStyle/>
           <a:p>
-            <a:pPr algn="l">
-              <a:defRPr sz="1700" b="1">
-                <a:solidFill>
-                  <a:srgbClr val="27AE60"/>
-                </a:solidFill>
-                <a:latin typeface="Calibri"/>
-              </a:defRPr>
-            </a:pPr>
-            <a:r>
-              <a:t>Key Results (02D Hold-Out)</a:t>
-            </a:r>
-          </a:p>
-        </p:txBody>
-      </p:sp>
-      <p:sp>
-        <p:nvSpPr>
-          <p:cNvPr id="8" name="TextBox 7"/>
+            <a:pPr>
+              <a:spcAft>
+                <a:spcPts val="300"/>
+              </a:spcAft>
+              <a:defRPr sz="1400">
+                <a:solidFill>
+                  <a:srgbClr val="2C2C2C"/>
+                </a:solidFill>
+                <a:latin typeface="Calibri"/>
+              </a:defRPr>
+            </a:pPr>
+            <a:r>
+              <a:t>- Temporal split and lag enforcement to prevent look-ahead leakage.</a:t>
+            </a:r>
+          </a:p>
+          <a:p>
+            <a:pPr>
+              <a:spcAft>
+                <a:spcPts val="300"/>
+              </a:spcAft>
+              <a:defRPr sz="1400">
+                <a:solidFill>
+                  <a:srgbClr val="2C2C2C"/>
+                </a:solidFill>
+                <a:latin typeface="Calibri"/>
+              </a:defRPr>
+            </a:pPr>
+            <a:r>
+              <a:t>- Model comparison under shared protocol, not cherry-picked runs.</a:t>
+            </a:r>
+          </a:p>
+          <a:p>
+            <a:pPr>
+              <a:spcAft>
+                <a:spcPts val="300"/>
+              </a:spcAft>
+              <a:defRPr sz="1400">
+                <a:solidFill>
+                  <a:srgbClr val="2C2C2C"/>
+                </a:solidFill>
+                <a:latin typeface="Calibri"/>
+              </a:defRPr>
+            </a:pPr>
+            <a:r>
+              <a:t>- Feature and strategy diagnostics documented in notebook outputs.</a:t>
+            </a:r>
+          </a:p>
+          <a:p>
+            <a:pPr>
+              <a:spcAft>
+                <a:spcPts val="300"/>
+              </a:spcAft>
+              <a:defRPr sz="1400">
+                <a:solidFill>
+                  <a:srgbClr val="2C2C2C"/>
+                </a:solidFill>
+                <a:latin typeface="Calibri"/>
+              </a:defRPr>
+            </a:pPr>
+            <a:r>
+              <a:t>- WFO and uncertainty framing integrated into report narrative.</a:t>
+            </a:r>
+          </a:p>
+          <a:p>
+            <a:pPr>
+              <a:spcAft>
+                <a:spcPts val="300"/>
+              </a:spcAft>
+              <a:defRPr sz="1400">
+                <a:solidFill>
+                  <a:srgbClr val="2C2C2C"/>
+                </a:solidFill>
+                <a:latin typeface="Calibri"/>
+              </a:defRPr>
+            </a:pPr>
+            <a:r>
+              <a:t>- Benchmark comparison includes passive baseline and risk metrics.</a:t>
+            </a:r>
+          </a:p>
+        </p:txBody>
+      </p:sp>
+      <p:sp>
+        <p:nvSpPr>
+          <p:cNvPr id="8" name="Rectangle 7"/>
+          <p:cNvSpPr/>
+          <p:nvPr/>
+        </p:nvSpPr>
+        <p:spPr>
+          <a:xfrm>
+            <a:off x="6309360" y="1097280"/>
+            <a:ext cx="5394960" cy="5120640"/>
+          </a:xfrm>
+          <a:prstGeom prst="rect">
+            <a:avLst/>
+          </a:prstGeom>
+          <a:solidFill>
+            <a:srgbClr val="FEF5E7"/>
+          </a:solidFill>
+          <a:ln>
+            <a:noFill/>
+          </a:ln>
+        </p:spPr>
+        <p:style>
+          <a:lnRef idx="1">
+            <a:schemeClr val="accent1"/>
+          </a:lnRef>
+          <a:fillRef idx="3">
+            <a:schemeClr val="accent1"/>
+          </a:fillRef>
+          <a:effectRef idx="2">
+            <a:schemeClr val="accent1"/>
+          </a:effectRef>
+          <a:fontRef idx="minor">
+            <a:schemeClr val="lt1"/>
+          </a:fontRef>
+        </p:style>
+        <p:txBody>
+          <a:bodyPr rtlCol="0" anchor="ctr"/>
+          <a:lstStyle/>
+          <a:p>
+            <a:pPr algn="ctr"/>
+          </a:p>
+        </p:txBody>
+      </p:sp>
+      <p:sp>
+        <p:nvSpPr>
+          <p:cNvPr id="9" name="TextBox 8"/>
           <p:cNvSpPr txBox="1"/>
           <p:nvPr/>
         </p:nvSpPr>
         <p:spPr>
           <a:xfrm>
-            <a:off x="640080" y="4937760"/>
-            <a:ext cx="5303520" cy="1645920"/>
+            <a:off x="6492240" y="1280160"/>
+            <a:ext cx="5029200" cy="365760"/>
           </a:xfrm>
           <a:prstGeom prst="rect">
             <a:avLst/>
@@ -10846,93 +8156,30 @@
           </a:bodyPr>
           <a:lstStyle/>
           <a:p>
-            <a:pPr>
-              <a:spcBef>
-                <a:spcPts val="400"/>
-              </a:spcBef>
-              <a:spcAft>
-                <a:spcPts val="200"/>
-              </a:spcAft>
-            </a:pPr>
-            <a:r>
-              <a:rPr sz="1400">
-                <a:solidFill>
-                  <a:srgbClr val="2C2C2C"/>
-                </a:solidFill>
-                <a:latin typeface="Calibri"/>
-              </a:rPr>
-              <a:t>• Stacked Cluster-News: MAE = 0.918, R² = 0.999688, Dir. Acc. = 0.515</a:t>
-            </a:r>
-          </a:p>
-          <a:p>
-            <a:pPr>
-              <a:spcBef>
-                <a:spcPts val="400"/>
-              </a:spcBef>
-              <a:spcAft>
-                <a:spcPts val="200"/>
-              </a:spcAft>
-            </a:pPr>
-            <a:r>
-              <a:rPr sz="1400">
-                <a:solidFill>
-                  <a:srgbClr val="2C2C2C"/>
-                </a:solidFill>
-                <a:latin typeface="Calibri"/>
-              </a:rPr>
-              <a:t>• vs Baseline: MAE = 0.909, Dir. Acc. = 0.509 (lower directional signal)</a:t>
-            </a:r>
-          </a:p>
-          <a:p>
-            <a:pPr>
-              <a:spcBef>
-                <a:spcPts val="400"/>
-              </a:spcBef>
-              <a:spcAft>
-                <a:spcPts val="200"/>
-              </a:spcAft>
-            </a:pPr>
-            <a:r>
-              <a:rPr sz="1400">
-                <a:solidFill>
-                  <a:srgbClr val="2C2C2C"/>
-                </a:solidFill>
-                <a:latin typeface="Calibri"/>
-              </a:rPr>
-              <a:t>• AMZN MAE ↓ 47% (15.1 → 10.8), GOOG MAE ↓ 46% (15.0 → 8.1)</a:t>
-            </a:r>
-          </a:p>
-          <a:p>
-            <a:pPr>
-              <a:spcBef>
-                <a:spcPts val="400"/>
-              </a:spcBef>
-              <a:spcAft>
-                <a:spcPts val="200"/>
-              </a:spcAft>
-            </a:pPr>
-            <a:r>
-              <a:rPr sz="1400">
-                <a:solidFill>
-                  <a:srgbClr val="2C2C2C"/>
-                </a:solidFill>
-                <a:latin typeface="Calibri"/>
-              </a:rPr>
-              <a:t>• Optimal decay: L* = 10, λ* = 0.2 (robust flat optimum)</a:t>
-            </a:r>
-          </a:p>
-        </p:txBody>
-      </p:sp>
-      <p:sp>
-        <p:nvSpPr>
-          <p:cNvPr id="9" name="TextBox 8"/>
+            <a:pPr algn="l">
+              <a:defRPr sz="1700" b="1">
+                <a:solidFill>
+                  <a:srgbClr val="D4A01E"/>
+                </a:solidFill>
+                <a:latin typeface="Calibri"/>
+              </a:defRPr>
+            </a:pPr>
+            <a:r>
+              <a:t>Remaining risks</a:t>
+            </a:r>
+          </a:p>
+        </p:txBody>
+      </p:sp>
+      <p:sp>
+        <p:nvSpPr>
+          <p:cNvPr id="10" name="TextBox 9"/>
           <p:cNvSpPr txBox="1"/>
           <p:nvPr/>
         </p:nvSpPr>
         <p:spPr>
           <a:xfrm>
-            <a:off x="6400800" y="1188720"/>
-            <a:ext cx="3657600" cy="457200"/>
+            <a:off x="6492240" y="1828800"/>
+            <a:ext cx="5029200" cy="4297680"/>
           </a:xfrm>
           <a:prstGeom prst="rect">
             <a:avLst/>
@@ -10945,16 +8192,83 @@
           </a:bodyPr>
           <a:lstStyle/>
           <a:p>
-            <a:pPr algn="l">
-              <a:defRPr sz="1200" b="0">
-                <a:solidFill>
-                  <a:srgbClr val="2E86C1"/>
-                </a:solidFill>
-                <a:latin typeface="Calibri"/>
-              </a:defRPr>
-            </a:pPr>
-            <a:r>
-              <a:t>[Image: 02D_prediction_vs_actual_close_GOOG.png]</a:t>
+            <a:pPr>
+              <a:spcAft>
+                <a:spcPts val="300"/>
+              </a:spcAft>
+              <a:defRPr sz="1400">
+                <a:solidFill>
+                  <a:srgbClr val="2C2C2C"/>
+                </a:solidFill>
+                <a:latin typeface="Calibri"/>
+              </a:defRPr>
+            </a:pPr>
+            <a:r>
+              <a:t>- No explicit slippage and impact model in current backtest.</a:t>
+            </a:r>
+          </a:p>
+          <a:p>
+            <a:pPr>
+              <a:spcAft>
+                <a:spcPts val="300"/>
+              </a:spcAft>
+              <a:defRPr sz="1400">
+                <a:solidFill>
+                  <a:srgbClr val="2C2C2C"/>
+                </a:solidFill>
+                <a:latin typeface="Calibri"/>
+              </a:defRPr>
+            </a:pPr>
+            <a:r>
+              <a:t>- Static cluster topology may drift across regimes.</a:t>
+            </a:r>
+          </a:p>
+          <a:p>
+            <a:pPr>
+              <a:spcAft>
+                <a:spcPts val="300"/>
+              </a:spcAft>
+              <a:defRPr sz="1400">
+                <a:solidFill>
+                  <a:srgbClr val="2C2C2C"/>
+                </a:solidFill>
+                <a:latin typeface="Calibri"/>
+              </a:defRPr>
+            </a:pPr>
+            <a:r>
+              <a:t>- Current OOS horizon is still limited for production confidence.</a:t>
+            </a:r>
+          </a:p>
+          <a:p>
+            <a:pPr>
+              <a:spcAft>
+                <a:spcPts val="300"/>
+              </a:spcAft>
+              <a:defRPr sz="1400">
+                <a:solidFill>
+                  <a:srgbClr val="2C2C2C"/>
+                </a:solidFill>
+                <a:latin typeface="Calibri"/>
+              </a:defRPr>
+            </a:pPr>
+            <a:r>
+              <a:t>- Headline coverage quality varies by source and stock.</a:t>
+            </a:r>
+          </a:p>
+          <a:p>
+            <a:pPr>
+              <a:spcAft>
+                <a:spcPts val="300"/>
+              </a:spcAft>
+              <a:defRPr sz="1400">
+                <a:solidFill>
+                  <a:srgbClr val="2C2C2C"/>
+                </a:solidFill>
+                <a:latin typeface="Calibri"/>
+              </a:defRPr>
+            </a:pPr>
+            <a:r>
+              <a:t>- Further stress testing needed for bear and shock windows.</a:t>
             </a:r>
           </a:p>
         </p:txBody>
@@ -10994,7 +8308,7 @@
         <p:spPr>
           <a:xfrm>
             <a:off x="0" y="0"/>
-            <a:ext cx="12191695" cy="914400"/>
+            <a:ext cx="12191695" cy="868680"/>
           </a:xfrm>
           <a:prstGeom prst="rect">
             <a:avLst/>
@@ -11030,49 +8344,13 @@
       </p:sp>
       <p:sp>
         <p:nvSpPr>
-          <p:cNvPr id="3" name="TextBox 2"/>
-          <p:cNvSpPr txBox="1"/>
-          <p:nvPr/>
-        </p:nvSpPr>
-        <p:spPr>
-          <a:xfrm>
-            <a:off x="548640" y="137160"/>
-            <a:ext cx="10058400" cy="640080"/>
-          </a:xfrm>
-          <a:prstGeom prst="rect">
-            <a:avLst/>
-          </a:prstGeom>
-          <a:noFill/>
-        </p:spPr>
-        <p:txBody>
-          <a:bodyPr wrap="square">
-            <a:spAutoFit/>
-          </a:bodyPr>
-          <a:lstStyle/>
-          <a:p>
-            <a:pPr algn="l">
-              <a:defRPr sz="2600" b="1">
-                <a:solidFill>
-                  <a:srgbClr val="FFFFFF"/>
-                </a:solidFill>
-                <a:latin typeface="Calibri"/>
-              </a:defRPr>
-            </a:pPr>
-            <a:r>
-              <a:t>Innovation 2 — Multi-Horizon Meta-Signal</a:t>
-            </a:r>
-          </a:p>
-        </p:txBody>
-      </p:sp>
-      <p:sp>
-        <p:nvSpPr>
-          <p:cNvPr id="4" name="Rectangle 3"/>
+          <p:cNvPr id="3" name="Rectangle 2"/>
           <p:cNvSpPr/>
           <p:nvPr/>
         </p:nvSpPr>
         <p:spPr>
           <a:xfrm>
-            <a:off x="0" y="914400"/>
+            <a:off x="0" y="868680"/>
             <a:ext cx="12191695" cy="36576"/>
           </a:xfrm>
           <a:prstGeom prst="rect">
@@ -11109,14 +8387,50 @@
       </p:sp>
       <p:sp>
         <p:nvSpPr>
+          <p:cNvPr id="4" name="TextBox 3"/>
+          <p:cNvSpPr txBox="1"/>
+          <p:nvPr/>
+        </p:nvSpPr>
+        <p:spPr>
+          <a:xfrm>
+            <a:off x="548640" y="109728"/>
+            <a:ext cx="10972800" cy="548640"/>
+          </a:xfrm>
+          <a:prstGeom prst="rect">
+            <a:avLst/>
+          </a:prstGeom>
+          <a:noFill/>
+        </p:spPr>
+        <p:txBody>
+          <a:bodyPr wrap="square">
+            <a:spAutoFit/>
+          </a:bodyPr>
+          <a:lstStyle/>
+          <a:p>
+            <a:pPr algn="l">
+              <a:defRPr sz="2500" b="1">
+                <a:solidFill>
+                  <a:srgbClr val="FFFFFF"/>
+                </a:solidFill>
+                <a:latin typeface="Calibri"/>
+              </a:defRPr>
+            </a:pPr>
+            <a:r>
+              <a:t>Limitations and Next Iteration Plan</a:t>
+            </a:r>
+          </a:p>
+        </p:txBody>
+      </p:sp>
+      <p:sp>
+        <p:nvSpPr>
           <p:cNvPr id="5" name="TextBox 4"/>
           <p:cNvSpPr txBox="1"/>
           <p:nvPr/>
         </p:nvSpPr>
         <p:spPr>
           <a:xfrm>
-            <a:off x="548640" y="1188720"/>
-            <a:ext cx="5486400" cy="2743200"/>
+            <a:off x="548640" y="1097280"/>
+            <a:ext cx="11155680" cy="2468880"/>
           </a:xfrm>
           <a:prstGeom prst="rect">
             <a:avLst/>
@@ -11130,142 +8444,66 @@
           <a:lstStyle/>
           <a:p>
             <a:pPr>
-              <a:spcBef>
-                <a:spcPts val="400"/>
-              </a:spcBef>
               <a:spcAft>
-                <a:spcPts val="200"/>
+                <a:spcPts val="300"/>
               </a:spcAft>
-            </a:pPr>
-            <a:r>
-              <a:rPr b="1" sz="1600">
+              <a:defRPr sz="1600">
                 <a:solidFill>
                   <a:srgbClr val="2C2C2C"/>
                 </a:solidFill>
                 <a:latin typeface="Calibri"/>
-              </a:rPr>
-              <a:t>Problem: </a:t>
-            </a:r>
-            <a:r>
-              <a:rPr sz="1600">
+              </a:defRPr>
+            </a:pPr>
+            <a:r>
+              <a:t>- Current portfolio simulation excludes full transaction cost stack and market impact.</a:t>
+            </a:r>
+          </a:p>
+          <a:p>
+            <a:pPr>
+              <a:spcAft>
+                <a:spcPts val="300"/>
+              </a:spcAft>
+              <a:defRPr sz="1600">
                 <a:solidFill>
                   <a:srgbClr val="2C2C2C"/>
                 </a:solidFill>
                 <a:latin typeface="Calibri"/>
-              </a:rPr>
-              <a:t>T+1 optimises point accuracy but ignores portfolio rebalancing horizon</a:t>
+              </a:defRPr>
+            </a:pPr>
+            <a:r>
+              <a:t>- Cluster structure is static; no online updating mechanism yet.</a:t>
             </a:r>
           </a:p>
           <a:p>
             <a:pPr>
-              <a:spcBef>
-                <a:spcPts val="400"/>
-              </a:spcBef>
               <a:spcAft>
-                <a:spcPts val="200"/>
+                <a:spcPts val="300"/>
               </a:spcAft>
-            </a:pPr>
-            <a:r>
-              <a:rPr b="1" sz="1600">
+              <a:defRPr sz="1600">
                 <a:solidFill>
                   <a:srgbClr val="2C2C2C"/>
                 </a:solidFill>
                 <a:latin typeface="Calibri"/>
-              </a:rPr>
-              <a:t>Solution: </a:t>
-            </a:r>
-            <a:r>
-              <a:rPr sz="1600">
+              </a:defRPr>
+            </a:pPr>
+            <a:r>
+              <a:t>- Model confidence is point-estimate heavy; interval prediction is limited.</a:t>
+            </a:r>
+          </a:p>
+          <a:p>
+            <a:pPr>
+              <a:spcAft>
+                <a:spcPts val="300"/>
+              </a:spcAft>
+              <a:defRPr sz="1600">
                 <a:solidFill>
                   <a:srgbClr val="2C2C2C"/>
                 </a:solidFill>
                 <a:latin typeface="Calibri"/>
-              </a:rPr>
-              <a:t>Train T+5, T+10, T+15 XGBoost heads → combine via meta-learner</a:t>
-            </a:r>
-          </a:p>
-          <a:p>
-            <a:pPr>
-              <a:spcBef>
-                <a:spcPts val="400"/>
-              </a:spcBef>
-              <a:spcAft>
-                <a:spcPts val="200"/>
-              </a:spcAft>
-            </a:pPr>
-            <a:r>
-              <a:rPr b="1" sz="1600">
-                <a:solidFill>
-                  <a:srgbClr val="2C2C2C"/>
-                </a:solidFill>
-                <a:latin typeface="Calibri"/>
-              </a:rPr>
-              <a:t>Meta-Score: </a:t>
-            </a:r>
-            <a:r>
-              <a:rPr sz="1600">
-                <a:solidFill>
-                  <a:srgbClr val="2C2C2C"/>
-                </a:solidFill>
-                <a:latin typeface="Calibri"/>
-              </a:rPr>
-              <a:t>T1Proxy × RegimeFilter × VelocityAlign</a:t>
-            </a:r>
-          </a:p>
-          <a:p>
-            <a:pPr>
-              <a:spcBef>
-                <a:spcPts val="400"/>
-              </a:spcBef>
-              <a:spcAft>
-                <a:spcPts val="200"/>
-              </a:spcAft>
-            </a:pPr>
-            <a:r>
-              <a:rPr b="1" sz="1600">
-                <a:solidFill>
-                  <a:srgbClr val="2C2C2C"/>
-                </a:solidFill>
-                <a:latin typeface="Calibri"/>
-              </a:rPr>
-              <a:t>3 filters: </a:t>
-            </a:r>
-            <a:r>
-              <a:rPr sz="1600">
-                <a:solidFill>
-                  <a:srgbClr val="2C2C2C"/>
-                </a:solidFill>
-                <a:latin typeface="Calibri"/>
-              </a:rPr>
-              <a:t>VIX-conditional weighting, direction alignment, sentiment-velocity alignment</a:t>
-            </a:r>
-          </a:p>
-          <a:p>
-            <a:pPr>
-              <a:spcBef>
-                <a:spcPts val="400"/>
-              </a:spcBef>
-              <a:spcAft>
-                <a:spcPts val="200"/>
-              </a:spcAft>
-            </a:pPr>
-            <a:r>
-              <a:rPr b="1" sz="1600">
-                <a:solidFill>
-                  <a:srgbClr val="2C2C2C"/>
-                </a:solidFill>
-                <a:latin typeface="Calibri"/>
-              </a:rPr>
-              <a:t>Ridge meta-learner: </a:t>
-            </a:r>
-            <a:r>
-              <a:rPr sz="1600">
-                <a:solidFill>
-                  <a:srgbClr val="2C2C2C"/>
-                </a:solidFill>
-                <a:latin typeface="Calibri"/>
-              </a:rPr>
-              <a:t>most stable; XGB meta-learner also profitable</a:t>
+              </a:defRPr>
+            </a:pPr>
+            <a:r>
+              <a:t>- Validation breadth should expand with longer OOS and additional market regimes.</a:t>
             </a:r>
           </a:p>
         </p:txBody>
@@ -11278,951 +8516,8 @@
         </p:nvSpPr>
         <p:spPr>
           <a:xfrm>
-            <a:off x="457200" y="4114800"/>
-            <a:ext cx="11155680" cy="2560320"/>
-          </a:xfrm>
-          <a:prstGeom prst="rect">
-            <a:avLst/>
-          </a:prstGeom>
-          <a:solidFill>
-            <a:srgbClr val="F7F7F7"/>
-          </a:solidFill>
-          <a:ln>
-            <a:noFill/>
-          </a:ln>
-        </p:spPr>
-        <p:style>
-          <a:lnRef idx="1">
-            <a:schemeClr val="accent1"/>
-          </a:lnRef>
-          <a:fillRef idx="3">
-            <a:schemeClr val="accent1"/>
-          </a:fillRef>
-          <a:effectRef idx="2">
-            <a:schemeClr val="accent1"/>
-          </a:effectRef>
-          <a:fontRef idx="minor">
-            <a:schemeClr val="lt1"/>
-          </a:fontRef>
-        </p:style>
-        <p:txBody>
-          <a:bodyPr rtlCol="0" anchor="ctr"/>
-          <a:lstStyle/>
-          <a:p>
-            <a:pPr algn="ctr"/>
-          </a:p>
-        </p:txBody>
-      </p:sp>
-      <p:sp>
-        <p:nvSpPr>
-          <p:cNvPr id="7" name="TextBox 6"/>
-          <p:cNvSpPr txBox="1"/>
-          <p:nvPr/>
-        </p:nvSpPr>
-        <p:spPr>
-          <a:xfrm>
-            <a:off x="640080" y="4206240"/>
-            <a:ext cx="10789920" cy="365760"/>
-          </a:xfrm>
-          <a:prstGeom prst="rect">
-            <a:avLst/>
-          </a:prstGeom>
-          <a:noFill/>
-        </p:spPr>
-        <p:txBody>
-          <a:bodyPr wrap="square">
-            <a:spAutoFit/>
-          </a:bodyPr>
-          <a:lstStyle/>
-          <a:p>
-            <a:pPr algn="l">
-              <a:defRPr sz="1700" b="1">
-                <a:solidFill>
-                  <a:srgbClr val="1B3A5C"/>
-                </a:solidFill>
-                <a:latin typeface="Calibri"/>
-              </a:defRPr>
-            </a:pPr>
-            <a:r>
-              <a:t>Table 6: Multi-Horizon Backtest Performance</a:t>
-            </a:r>
-          </a:p>
-        </p:txBody>
-      </p:sp>
-      <p:sp>
-        <p:nvSpPr>
-          <p:cNvPr id="8" name="TextBox 7"/>
-          <p:cNvSpPr txBox="1"/>
-          <p:nvPr/>
-        </p:nvSpPr>
-        <p:spPr>
-          <a:xfrm>
-            <a:off x="640080" y="4663440"/>
-            <a:ext cx="3200400" cy="320040"/>
-          </a:xfrm>
-          <a:prstGeom prst="rect">
-            <a:avLst/>
-          </a:prstGeom>
-          <a:noFill/>
-        </p:spPr>
-        <p:txBody>
-          <a:bodyPr wrap="square">
-            <a:spAutoFit/>
-          </a:bodyPr>
-          <a:lstStyle/>
-          <a:p>
-            <a:pPr algn="l">
-              <a:defRPr sz="1300" b="1">
-                <a:solidFill>
-                  <a:srgbClr val="1B3A5C"/>
-                </a:solidFill>
-                <a:latin typeface="Calibri"/>
-              </a:defRPr>
-            </a:pPr>
-            <a:r>
-              <a:t>Strategy</a:t>
-            </a:r>
-          </a:p>
-        </p:txBody>
-      </p:sp>
-      <p:sp>
-        <p:nvSpPr>
-          <p:cNvPr id="9" name="TextBox 8"/>
-          <p:cNvSpPr txBox="1"/>
-          <p:nvPr/>
-        </p:nvSpPr>
-        <p:spPr>
-          <a:xfrm>
-            <a:off x="4114800" y="4663440"/>
-            <a:ext cx="1188720" cy="320040"/>
-          </a:xfrm>
-          <a:prstGeom prst="rect">
-            <a:avLst/>
-          </a:prstGeom>
-          <a:noFill/>
-        </p:spPr>
-        <p:txBody>
-          <a:bodyPr wrap="square">
-            <a:spAutoFit/>
-          </a:bodyPr>
-          <a:lstStyle/>
-          <a:p>
-            <a:pPr algn="ctr">
-              <a:defRPr sz="1300" b="1">
-                <a:solidFill>
-                  <a:srgbClr val="1B3A5C"/>
-                </a:solidFill>
-                <a:latin typeface="Calibri"/>
-              </a:defRPr>
-            </a:pPr>
-            <a:r>
-              <a:t>Sharpe</a:t>
-            </a:r>
-          </a:p>
-        </p:txBody>
-      </p:sp>
-      <p:sp>
-        <p:nvSpPr>
-          <p:cNvPr id="10" name="TextBox 9"/>
-          <p:cNvSpPr txBox="1"/>
-          <p:nvPr/>
-        </p:nvSpPr>
-        <p:spPr>
-          <a:xfrm>
-            <a:off x="5486400" y="4663440"/>
-            <a:ext cx="1188720" cy="320040"/>
-          </a:xfrm>
-          <a:prstGeom prst="rect">
-            <a:avLst/>
-          </a:prstGeom>
-          <a:noFill/>
-        </p:spPr>
-        <p:txBody>
-          <a:bodyPr wrap="square">
-            <a:spAutoFit/>
-          </a:bodyPr>
-          <a:lstStyle/>
-          <a:p>
-            <a:pPr algn="ctr">
-              <a:defRPr sz="1300" b="1">
-                <a:solidFill>
-                  <a:srgbClr val="1B3A5C"/>
-                </a:solidFill>
-                <a:latin typeface="Calibri"/>
-              </a:defRPr>
-            </a:pPr>
-            <a:r>
-              <a:t>Max DD</a:t>
-            </a:r>
-          </a:p>
-        </p:txBody>
-      </p:sp>
-      <p:sp>
-        <p:nvSpPr>
-          <p:cNvPr id="11" name="TextBox 10"/>
-          <p:cNvSpPr txBox="1"/>
-          <p:nvPr/>
-        </p:nvSpPr>
-        <p:spPr>
-          <a:xfrm>
-            <a:off x="6858000" y="4663440"/>
-            <a:ext cx="1188720" cy="320040"/>
-          </a:xfrm>
-          <a:prstGeom prst="rect">
-            <a:avLst/>
-          </a:prstGeom>
-          <a:noFill/>
-        </p:spPr>
-        <p:txBody>
-          <a:bodyPr wrap="square">
-            <a:spAutoFit/>
-          </a:bodyPr>
-          <a:lstStyle/>
-          <a:p>
-            <a:pPr algn="ctr">
-              <a:defRPr sz="1300" b="1">
-                <a:solidFill>
-                  <a:srgbClr val="1B3A5C"/>
-                </a:solidFill>
-                <a:latin typeface="Calibri"/>
-              </a:defRPr>
-            </a:pPr>
-            <a:r>
-              <a:t>Return</a:t>
-            </a:r>
-          </a:p>
-        </p:txBody>
-      </p:sp>
-      <p:sp>
-        <p:nvSpPr>
-          <p:cNvPr id="12" name="TextBox 11"/>
-          <p:cNvSpPr txBox="1"/>
-          <p:nvPr/>
-        </p:nvSpPr>
-        <p:spPr>
-          <a:xfrm>
-            <a:off x="8229600" y="4663440"/>
-            <a:ext cx="1188720" cy="320040"/>
-          </a:xfrm>
-          <a:prstGeom prst="rect">
-            <a:avLst/>
-          </a:prstGeom>
-          <a:noFill/>
-        </p:spPr>
-        <p:txBody>
-          <a:bodyPr wrap="square">
-            <a:spAutoFit/>
-          </a:bodyPr>
-          <a:lstStyle/>
-          <a:p>
-            <a:pPr algn="ctr">
-              <a:defRPr sz="1300" b="1">
-                <a:solidFill>
-                  <a:srgbClr val="1B3A5C"/>
-                </a:solidFill>
-                <a:latin typeface="Calibri"/>
-              </a:defRPr>
-            </a:pPr>
-            <a:r>
-              <a:t>DHR</a:t>
-            </a:r>
-          </a:p>
-        </p:txBody>
-      </p:sp>
-      <p:sp>
-        <p:nvSpPr>
-          <p:cNvPr id="13" name="TextBox 12"/>
-          <p:cNvSpPr txBox="1"/>
-          <p:nvPr/>
-        </p:nvSpPr>
-        <p:spPr>
-          <a:xfrm>
-            <a:off x="9601200" y="4663440"/>
-            <a:ext cx="1188720" cy="320040"/>
-          </a:xfrm>
-          <a:prstGeom prst="rect">
-            <a:avLst/>
-          </a:prstGeom>
-          <a:noFill/>
-        </p:spPr>
-        <p:txBody>
-          <a:bodyPr wrap="square">
-            <a:spAutoFit/>
-          </a:bodyPr>
-          <a:lstStyle/>
-          <a:p>
-            <a:pPr algn="ctr">
-              <a:defRPr sz="1300" b="1">
-                <a:solidFill>
-                  <a:srgbClr val="1B3A5C"/>
-                </a:solidFill>
-                <a:latin typeface="Calibri"/>
-              </a:defRPr>
-            </a:pPr>
-            <a:r>
-              <a:t>Trades</a:t>
-            </a:r>
-          </a:p>
-        </p:txBody>
-      </p:sp>
-      <p:sp>
-        <p:nvSpPr>
-          <p:cNvPr id="14" name="TextBox 13"/>
-          <p:cNvSpPr txBox="1"/>
-          <p:nvPr/>
-        </p:nvSpPr>
-        <p:spPr>
-          <a:xfrm>
-            <a:off x="640080" y="4983480"/>
-            <a:ext cx="3200400" cy="310896"/>
-          </a:xfrm>
-          <a:prstGeom prst="rect">
-            <a:avLst/>
-          </a:prstGeom>
-          <a:noFill/>
-        </p:spPr>
-        <p:txBody>
-          <a:bodyPr wrap="square">
-            <a:spAutoFit/>
-          </a:bodyPr>
-          <a:lstStyle/>
-          <a:p>
-            <a:pPr algn="l">
-              <a:defRPr sz="1200" b="0">
-                <a:solidFill>
-                  <a:srgbClr val="2C2C2C"/>
-                </a:solidFill>
-                <a:latin typeface="Calibri"/>
-              </a:defRPr>
-            </a:pPr>
-            <a:r>
-              <a:t>T+1 Only (02D proxy)</a:t>
-            </a:r>
-          </a:p>
-        </p:txBody>
-      </p:sp>
-      <p:sp>
-        <p:nvSpPr>
-          <p:cNvPr id="15" name="TextBox 14"/>
-          <p:cNvSpPr txBox="1"/>
-          <p:nvPr/>
-        </p:nvSpPr>
-        <p:spPr>
-          <a:xfrm>
-            <a:off x="4114800" y="4983480"/>
-            <a:ext cx="1188720" cy="310896"/>
-          </a:xfrm>
-          <a:prstGeom prst="rect">
-            <a:avLst/>
-          </a:prstGeom>
-          <a:noFill/>
-        </p:spPr>
-        <p:txBody>
-          <a:bodyPr wrap="square">
-            <a:spAutoFit/>
-          </a:bodyPr>
-          <a:lstStyle/>
-          <a:p>
-            <a:pPr algn="ctr">
-              <a:defRPr sz="1200" b="0">
-                <a:solidFill>
-                  <a:srgbClr val="2C2C2C"/>
-                </a:solidFill>
-                <a:latin typeface="Calibri"/>
-              </a:defRPr>
-            </a:pPr>
-            <a:r>
-              <a:t>2.42</a:t>
-            </a:r>
-          </a:p>
-        </p:txBody>
-      </p:sp>
-      <p:sp>
-        <p:nvSpPr>
-          <p:cNvPr id="16" name="TextBox 15"/>
-          <p:cNvSpPr txBox="1"/>
-          <p:nvPr/>
-        </p:nvSpPr>
-        <p:spPr>
-          <a:xfrm>
-            <a:off x="5486400" y="4983480"/>
-            <a:ext cx="1188720" cy="310896"/>
-          </a:xfrm>
-          <a:prstGeom prst="rect">
-            <a:avLst/>
-          </a:prstGeom>
-          <a:noFill/>
-        </p:spPr>
-        <p:txBody>
-          <a:bodyPr wrap="square">
-            <a:spAutoFit/>
-          </a:bodyPr>
-          <a:lstStyle/>
-          <a:p>
-            <a:pPr algn="ctr">
-              <a:defRPr sz="1200" b="0">
-                <a:solidFill>
-                  <a:srgbClr val="2C2C2C"/>
-                </a:solidFill>
-                <a:latin typeface="Calibri"/>
-              </a:defRPr>
-            </a:pPr>
-            <a:r>
-              <a:t>−2.1%</a:t>
-            </a:r>
-          </a:p>
-        </p:txBody>
-      </p:sp>
-      <p:sp>
-        <p:nvSpPr>
-          <p:cNvPr id="17" name="TextBox 16"/>
-          <p:cNvSpPr txBox="1"/>
-          <p:nvPr/>
-        </p:nvSpPr>
-        <p:spPr>
-          <a:xfrm>
-            <a:off x="6858000" y="4983480"/>
-            <a:ext cx="1188720" cy="310896"/>
-          </a:xfrm>
-          <a:prstGeom prst="rect">
-            <a:avLst/>
-          </a:prstGeom>
-          <a:noFill/>
-        </p:spPr>
-        <p:txBody>
-          <a:bodyPr wrap="square">
-            <a:spAutoFit/>
-          </a:bodyPr>
-          <a:lstStyle/>
-          <a:p>
-            <a:pPr algn="ctr">
-              <a:defRPr sz="1200" b="0">
-                <a:solidFill>
-                  <a:srgbClr val="2C2C2C"/>
-                </a:solidFill>
-                <a:latin typeface="Calibri"/>
-              </a:defRPr>
-            </a:pPr>
-            <a:r>
-              <a:t>3.3%</a:t>
-            </a:r>
-          </a:p>
-        </p:txBody>
-      </p:sp>
-      <p:sp>
-        <p:nvSpPr>
-          <p:cNvPr id="18" name="TextBox 17"/>
-          <p:cNvSpPr txBox="1"/>
-          <p:nvPr/>
-        </p:nvSpPr>
-        <p:spPr>
-          <a:xfrm>
-            <a:off x="8229600" y="4983480"/>
-            <a:ext cx="1188720" cy="310896"/>
-          </a:xfrm>
-          <a:prstGeom prst="rect">
-            <a:avLst/>
-          </a:prstGeom>
-          <a:noFill/>
-        </p:spPr>
-        <p:txBody>
-          <a:bodyPr wrap="square">
-            <a:spAutoFit/>
-          </a:bodyPr>
-          <a:lstStyle/>
-          <a:p>
-            <a:pPr algn="ctr">
-              <a:defRPr sz="1200" b="0">
-                <a:solidFill>
-                  <a:srgbClr val="2C2C2C"/>
-                </a:solidFill>
-                <a:latin typeface="Calibri"/>
-              </a:defRPr>
-            </a:pPr>
-            <a:r>
-              <a:t>0.575</a:t>
-            </a:r>
-          </a:p>
-        </p:txBody>
-      </p:sp>
-      <p:sp>
-        <p:nvSpPr>
-          <p:cNvPr id="19" name="TextBox 18"/>
-          <p:cNvSpPr txBox="1"/>
-          <p:nvPr/>
-        </p:nvSpPr>
-        <p:spPr>
-          <a:xfrm>
-            <a:off x="9601200" y="4983480"/>
-            <a:ext cx="1188720" cy="310896"/>
-          </a:xfrm>
-          <a:prstGeom prst="rect">
-            <a:avLst/>
-          </a:prstGeom>
-          <a:noFill/>
-        </p:spPr>
-        <p:txBody>
-          <a:bodyPr wrap="square">
-            <a:spAutoFit/>
-          </a:bodyPr>
-          <a:lstStyle/>
-          <a:p>
-            <a:pPr algn="ctr">
-              <a:defRPr sz="1200" b="0">
-                <a:solidFill>
-                  <a:srgbClr val="2C2C2C"/>
-                </a:solidFill>
-                <a:latin typeface="Calibri"/>
-              </a:defRPr>
-            </a:pPr>
-            <a:r>
-              <a:t>47</a:t>
-            </a:r>
-          </a:p>
-        </p:txBody>
-      </p:sp>
-      <p:sp>
-        <p:nvSpPr>
-          <p:cNvPr id="20" name="TextBox 19"/>
-          <p:cNvSpPr txBox="1"/>
-          <p:nvPr/>
-        </p:nvSpPr>
-        <p:spPr>
-          <a:xfrm>
-            <a:off x="640080" y="5303520"/>
-            <a:ext cx="3200400" cy="310896"/>
-          </a:xfrm>
-          <a:prstGeom prst="rect">
-            <a:avLst/>
-          </a:prstGeom>
-          <a:noFill/>
-        </p:spPr>
-        <p:txBody>
-          <a:bodyPr wrap="square">
-            <a:spAutoFit/>
-          </a:bodyPr>
-          <a:lstStyle/>
-          <a:p>
-            <a:pPr algn="l">
-              <a:defRPr sz="1200" b="0">
-                <a:solidFill>
-                  <a:srgbClr val="2C2C2C"/>
-                </a:solidFill>
-                <a:latin typeface="Calibri"/>
-              </a:defRPr>
-            </a:pPr>
-            <a:r>
-              <a:t>T+15 Only (02E)</a:t>
-            </a:r>
-          </a:p>
-        </p:txBody>
-      </p:sp>
-      <p:sp>
-        <p:nvSpPr>
-          <p:cNvPr id="21" name="TextBox 20"/>
-          <p:cNvSpPr txBox="1"/>
-          <p:nvPr/>
-        </p:nvSpPr>
-        <p:spPr>
-          <a:xfrm>
-            <a:off x="4114800" y="5303520"/>
-            <a:ext cx="1188720" cy="310896"/>
-          </a:xfrm>
-          <a:prstGeom prst="rect">
-            <a:avLst/>
-          </a:prstGeom>
-          <a:noFill/>
-        </p:spPr>
-        <p:txBody>
-          <a:bodyPr wrap="square">
-            <a:spAutoFit/>
-          </a:bodyPr>
-          <a:lstStyle/>
-          <a:p>
-            <a:pPr algn="ctr">
-              <a:defRPr sz="1200" b="0">
-                <a:solidFill>
-                  <a:srgbClr val="2C2C2C"/>
-                </a:solidFill>
-                <a:latin typeface="Calibri"/>
-              </a:defRPr>
-            </a:pPr>
-            <a:r>
-              <a:t>−5.85</a:t>
-            </a:r>
-          </a:p>
-        </p:txBody>
-      </p:sp>
-      <p:sp>
-        <p:nvSpPr>
-          <p:cNvPr id="22" name="TextBox 21"/>
-          <p:cNvSpPr txBox="1"/>
-          <p:nvPr/>
-        </p:nvSpPr>
-        <p:spPr>
-          <a:xfrm>
-            <a:off x="5486400" y="5303520"/>
-            <a:ext cx="1188720" cy="310896"/>
-          </a:xfrm>
-          <a:prstGeom prst="rect">
-            <a:avLst/>
-          </a:prstGeom>
-          <a:noFill/>
-        </p:spPr>
-        <p:txBody>
-          <a:bodyPr wrap="square">
-            <a:spAutoFit/>
-          </a:bodyPr>
-          <a:lstStyle/>
-          <a:p>
-            <a:pPr algn="ctr">
-              <a:defRPr sz="1200" b="0">
-                <a:solidFill>
-                  <a:srgbClr val="2C2C2C"/>
-                </a:solidFill>
-                <a:latin typeface="Calibri"/>
-              </a:defRPr>
-            </a:pPr>
-            <a:r>
-              <a:t>−7.6%</a:t>
-            </a:r>
-          </a:p>
-        </p:txBody>
-      </p:sp>
-      <p:sp>
-        <p:nvSpPr>
-          <p:cNvPr id="23" name="TextBox 22"/>
-          <p:cNvSpPr txBox="1"/>
-          <p:nvPr/>
-        </p:nvSpPr>
-        <p:spPr>
-          <a:xfrm>
-            <a:off x="6858000" y="5303520"/>
-            <a:ext cx="1188720" cy="310896"/>
-          </a:xfrm>
-          <a:prstGeom prst="rect">
-            <a:avLst/>
-          </a:prstGeom>
-          <a:noFill/>
-        </p:spPr>
-        <p:txBody>
-          <a:bodyPr wrap="square">
-            <a:spAutoFit/>
-          </a:bodyPr>
-          <a:lstStyle/>
-          <a:p>
-            <a:pPr algn="ctr">
-              <a:defRPr sz="1200" b="0">
-                <a:solidFill>
-                  <a:srgbClr val="2C2C2C"/>
-                </a:solidFill>
-                <a:latin typeface="Calibri"/>
-              </a:defRPr>
-            </a:pPr>
-            <a:r>
-              <a:t>−7.4%</a:t>
-            </a:r>
-          </a:p>
-        </p:txBody>
-      </p:sp>
-      <p:sp>
-        <p:nvSpPr>
-          <p:cNvPr id="24" name="TextBox 23"/>
-          <p:cNvSpPr txBox="1"/>
-          <p:nvPr/>
-        </p:nvSpPr>
-        <p:spPr>
-          <a:xfrm>
-            <a:off x="8229600" y="5303520"/>
-            <a:ext cx="1188720" cy="310896"/>
-          </a:xfrm>
-          <a:prstGeom prst="rect">
-            <a:avLst/>
-          </a:prstGeom>
-          <a:noFill/>
-        </p:spPr>
-        <p:txBody>
-          <a:bodyPr wrap="square">
-            <a:spAutoFit/>
-          </a:bodyPr>
-          <a:lstStyle/>
-          <a:p>
-            <a:pPr algn="ctr">
-              <a:defRPr sz="1200" b="0">
-                <a:solidFill>
-                  <a:srgbClr val="2C2C2C"/>
-                </a:solidFill>
-                <a:latin typeface="Calibri"/>
-              </a:defRPr>
-            </a:pPr>
-            <a:r>
-              <a:t>0.404</a:t>
-            </a:r>
-          </a:p>
-        </p:txBody>
-      </p:sp>
-      <p:sp>
-        <p:nvSpPr>
-          <p:cNvPr id="25" name="TextBox 24"/>
-          <p:cNvSpPr txBox="1"/>
-          <p:nvPr/>
-        </p:nvSpPr>
-        <p:spPr>
-          <a:xfrm>
-            <a:off x="9601200" y="5303520"/>
-            <a:ext cx="1188720" cy="310896"/>
-          </a:xfrm>
-          <a:prstGeom prst="rect">
-            <a:avLst/>
-          </a:prstGeom>
-          <a:noFill/>
-        </p:spPr>
-        <p:txBody>
-          <a:bodyPr wrap="square">
-            <a:spAutoFit/>
-          </a:bodyPr>
-          <a:lstStyle/>
-          <a:p>
-            <a:pPr algn="ctr">
-              <a:defRPr sz="1200" b="0">
-                <a:solidFill>
-                  <a:srgbClr val="2C2C2C"/>
-                </a:solidFill>
-                <a:latin typeface="Calibri"/>
-              </a:defRPr>
-            </a:pPr>
-            <a:r>
-              <a:t>47</a:t>
-            </a:r>
-          </a:p>
-        </p:txBody>
-      </p:sp>
-      <p:sp>
-        <p:nvSpPr>
-          <p:cNvPr id="26" name="TextBox 25"/>
-          <p:cNvSpPr txBox="1"/>
-          <p:nvPr/>
-        </p:nvSpPr>
-        <p:spPr>
-          <a:xfrm>
-            <a:off x="640080" y="5623559"/>
-            <a:ext cx="3200400" cy="310896"/>
-          </a:xfrm>
-          <a:prstGeom prst="rect">
-            <a:avLst/>
-          </a:prstGeom>
-          <a:noFill/>
-        </p:spPr>
-        <p:txBody>
-          <a:bodyPr wrap="square">
-            <a:spAutoFit/>
-          </a:bodyPr>
-          <a:lstStyle/>
-          <a:p>
-            <a:pPr algn="l">
-              <a:defRPr sz="1200" b="0">
-                <a:solidFill>
-                  <a:srgbClr val="2C2C2C"/>
-                </a:solidFill>
-                <a:latin typeface="Calibri"/>
-              </a:defRPr>
-            </a:pPr>
-            <a:r>
-              <a:t>Rule-Based Meta (02F)</a:t>
-            </a:r>
-          </a:p>
-        </p:txBody>
-      </p:sp>
-      <p:sp>
-        <p:nvSpPr>
-          <p:cNvPr id="27" name="TextBox 26"/>
-          <p:cNvSpPr txBox="1"/>
-          <p:nvPr/>
-        </p:nvSpPr>
-        <p:spPr>
-          <a:xfrm>
-            <a:off x="4114800" y="5623559"/>
-            <a:ext cx="1188720" cy="310896"/>
-          </a:xfrm>
-          <a:prstGeom prst="rect">
-            <a:avLst/>
-          </a:prstGeom>
-          <a:noFill/>
-        </p:spPr>
-        <p:txBody>
-          <a:bodyPr wrap="square">
-            <a:spAutoFit/>
-          </a:bodyPr>
-          <a:lstStyle/>
-          <a:p>
-            <a:pPr algn="ctr">
-              <a:defRPr sz="1200" b="0">
-                <a:solidFill>
-                  <a:srgbClr val="2C2C2C"/>
-                </a:solidFill>
-                <a:latin typeface="Calibri"/>
-              </a:defRPr>
-            </a:pPr>
-            <a:r>
-              <a:t>2.42</a:t>
-            </a:r>
-          </a:p>
-        </p:txBody>
-      </p:sp>
-      <p:sp>
-        <p:nvSpPr>
-          <p:cNvPr id="28" name="TextBox 27"/>
-          <p:cNvSpPr txBox="1"/>
-          <p:nvPr/>
-        </p:nvSpPr>
-        <p:spPr>
-          <a:xfrm>
-            <a:off x="5486400" y="5623559"/>
-            <a:ext cx="1188720" cy="310896"/>
-          </a:xfrm>
-          <a:prstGeom prst="rect">
-            <a:avLst/>
-          </a:prstGeom>
-          <a:noFill/>
-        </p:spPr>
-        <p:txBody>
-          <a:bodyPr wrap="square">
-            <a:spAutoFit/>
-          </a:bodyPr>
-          <a:lstStyle/>
-          <a:p>
-            <a:pPr algn="ctr">
-              <a:defRPr sz="1200" b="0">
-                <a:solidFill>
-                  <a:srgbClr val="2C2C2C"/>
-                </a:solidFill>
-                <a:latin typeface="Calibri"/>
-              </a:defRPr>
-            </a:pPr>
-            <a:r>
-              <a:t>−2.1%</a:t>
-            </a:r>
-          </a:p>
-        </p:txBody>
-      </p:sp>
-      <p:sp>
-        <p:nvSpPr>
-          <p:cNvPr id="29" name="TextBox 28"/>
-          <p:cNvSpPr txBox="1"/>
-          <p:nvPr/>
-        </p:nvSpPr>
-        <p:spPr>
-          <a:xfrm>
-            <a:off x="6858000" y="5623559"/>
-            <a:ext cx="1188720" cy="310896"/>
-          </a:xfrm>
-          <a:prstGeom prst="rect">
-            <a:avLst/>
-          </a:prstGeom>
-          <a:noFill/>
-        </p:spPr>
-        <p:txBody>
-          <a:bodyPr wrap="square">
-            <a:spAutoFit/>
-          </a:bodyPr>
-          <a:lstStyle/>
-          <a:p>
-            <a:pPr algn="ctr">
-              <a:defRPr sz="1200" b="0">
-                <a:solidFill>
-                  <a:srgbClr val="2C2C2C"/>
-                </a:solidFill>
-                <a:latin typeface="Calibri"/>
-              </a:defRPr>
-            </a:pPr>
-            <a:r>
-              <a:t>3.3%</a:t>
-            </a:r>
-          </a:p>
-        </p:txBody>
-      </p:sp>
-      <p:sp>
-        <p:nvSpPr>
-          <p:cNvPr id="30" name="TextBox 29"/>
-          <p:cNvSpPr txBox="1"/>
-          <p:nvPr/>
-        </p:nvSpPr>
-        <p:spPr>
-          <a:xfrm>
-            <a:off x="8229600" y="5623559"/>
-            <a:ext cx="1188720" cy="310896"/>
-          </a:xfrm>
-          <a:prstGeom prst="rect">
-            <a:avLst/>
-          </a:prstGeom>
-          <a:noFill/>
-        </p:spPr>
-        <p:txBody>
-          <a:bodyPr wrap="square">
-            <a:spAutoFit/>
-          </a:bodyPr>
-          <a:lstStyle/>
-          <a:p>
-            <a:pPr algn="ctr">
-              <a:defRPr sz="1200" b="0">
-                <a:solidFill>
-                  <a:srgbClr val="2C2C2C"/>
-                </a:solidFill>
-                <a:latin typeface="Calibri"/>
-              </a:defRPr>
-            </a:pPr>
-            <a:r>
-              <a:t>0.575</a:t>
-            </a:r>
-          </a:p>
-        </p:txBody>
-      </p:sp>
-      <p:sp>
-        <p:nvSpPr>
-          <p:cNvPr id="31" name="TextBox 30"/>
-          <p:cNvSpPr txBox="1"/>
-          <p:nvPr/>
-        </p:nvSpPr>
-        <p:spPr>
-          <a:xfrm>
-            <a:off x="9601200" y="5623559"/>
-            <a:ext cx="1188720" cy="310896"/>
-          </a:xfrm>
-          <a:prstGeom prst="rect">
-            <a:avLst/>
-          </a:prstGeom>
-          <a:noFill/>
-        </p:spPr>
-        <p:txBody>
-          <a:bodyPr wrap="square">
-            <a:spAutoFit/>
-          </a:bodyPr>
-          <a:lstStyle/>
-          <a:p>
-            <a:pPr algn="ctr">
-              <a:defRPr sz="1200" b="0">
-                <a:solidFill>
-                  <a:srgbClr val="2C2C2C"/>
-                </a:solidFill>
-                <a:latin typeface="Calibri"/>
-              </a:defRPr>
-            </a:pPr>
-            <a:r>
-              <a:t>47</a:t>
-            </a:r>
-          </a:p>
-        </p:txBody>
-      </p:sp>
-      <p:sp>
-        <p:nvSpPr>
-          <p:cNvPr id="32" name="Rectangle 31"/>
-          <p:cNvSpPr/>
-          <p:nvPr/>
-        </p:nvSpPr>
-        <p:spPr>
-          <a:xfrm>
-            <a:off x="548640" y="5943600"/>
-            <a:ext cx="10424160" cy="310896"/>
+            <a:off x="457200" y="3749040"/>
+            <a:ext cx="11247120" cy="2560320"/>
           </a:xfrm>
           <a:prstGeom prst="rect">
             <a:avLst/>
@@ -12258,14 +8553,14 @@
       </p:sp>
       <p:sp>
         <p:nvSpPr>
-          <p:cNvPr id="33" name="TextBox 32"/>
+          <p:cNvPr id="7" name="TextBox 6"/>
           <p:cNvSpPr txBox="1"/>
           <p:nvPr/>
         </p:nvSpPr>
         <p:spPr>
           <a:xfrm>
-            <a:off x="640080" y="5943600"/>
-            <a:ext cx="3200400" cy="310896"/>
+            <a:off x="640080" y="3931920"/>
+            <a:ext cx="10881360" cy="365760"/>
           </a:xfrm>
           <a:prstGeom prst="rect">
             <a:avLst/>
@@ -12279,7 +8574,7 @@
           <a:lstStyle/>
           <a:p>
             <a:pPr algn="l">
-              <a:defRPr sz="1200" b="1">
+              <a:defRPr sz="1700" b="1">
                 <a:solidFill>
                   <a:srgbClr val="27AE60"/>
                 </a:solidFill>
@@ -12287,21 +8582,21 @@
               </a:defRPr>
             </a:pPr>
             <a:r>
-              <a:t>Learned Meta Ridge ★</a:t>
-            </a:r>
-          </a:p>
-        </p:txBody>
-      </p:sp>
-      <p:sp>
-        <p:nvSpPr>
-          <p:cNvPr id="34" name="TextBox 33"/>
+              <a:t>Next iteration priorities</a:t>
+            </a:r>
+          </a:p>
+        </p:txBody>
+      </p:sp>
+      <p:sp>
+        <p:nvSpPr>
+          <p:cNvPr id="8" name="TextBox 7"/>
           <p:cNvSpPr txBox="1"/>
           <p:nvPr/>
         </p:nvSpPr>
         <p:spPr>
           <a:xfrm>
-            <a:off x="4114800" y="5943600"/>
-            <a:ext cx="1188720" cy="310896"/>
+            <a:off x="640080" y="4480560"/>
+            <a:ext cx="10881360" cy="1645920"/>
           </a:xfrm>
           <a:prstGeom prst="rect">
             <a:avLst/>
@@ -12314,188 +8609,11 @@
           </a:bodyPr>
           <a:lstStyle/>
           <a:p>
-            <a:pPr algn="ctr">
-              <a:defRPr sz="1200" b="1">
-                <a:solidFill>
-                  <a:srgbClr val="27AE60"/>
-                </a:solidFill>
-                <a:latin typeface="Calibri"/>
-              </a:defRPr>
-            </a:pPr>
-            <a:r>
-              <a:t>8.10</a:t>
-            </a:r>
-          </a:p>
-        </p:txBody>
-      </p:sp>
-      <p:sp>
-        <p:nvSpPr>
-          <p:cNvPr id="35" name="TextBox 34"/>
-          <p:cNvSpPr txBox="1"/>
-          <p:nvPr/>
-        </p:nvSpPr>
-        <p:spPr>
-          <a:xfrm>
-            <a:off x="5486400" y="5943600"/>
-            <a:ext cx="1188720" cy="310896"/>
-          </a:xfrm>
-          <a:prstGeom prst="rect">
-            <a:avLst/>
-          </a:prstGeom>
-          <a:noFill/>
-        </p:spPr>
-        <p:txBody>
-          <a:bodyPr wrap="square">
-            <a:spAutoFit/>
-          </a:bodyPr>
-          <a:lstStyle/>
-          <a:p>
-            <a:pPr algn="ctr">
-              <a:defRPr sz="1200" b="1">
-                <a:solidFill>
-                  <a:srgbClr val="27AE60"/>
-                </a:solidFill>
-                <a:latin typeface="Calibri"/>
-              </a:defRPr>
-            </a:pPr>
-            <a:r>
-              <a:t>−0.8%</a:t>
-            </a:r>
-          </a:p>
-        </p:txBody>
-      </p:sp>
-      <p:sp>
-        <p:nvSpPr>
-          <p:cNvPr id="36" name="TextBox 35"/>
-          <p:cNvSpPr txBox="1"/>
-          <p:nvPr/>
-        </p:nvSpPr>
-        <p:spPr>
-          <a:xfrm>
-            <a:off x="6858000" y="5943600"/>
-            <a:ext cx="1188720" cy="310896"/>
-          </a:xfrm>
-          <a:prstGeom prst="rect">
-            <a:avLst/>
-          </a:prstGeom>
-          <a:noFill/>
-        </p:spPr>
-        <p:txBody>
-          <a:bodyPr wrap="square">
-            <a:spAutoFit/>
-          </a:bodyPr>
-          <a:lstStyle/>
-          <a:p>
-            <a:pPr algn="ctr">
-              <a:defRPr sz="1200" b="1">
-                <a:solidFill>
-                  <a:srgbClr val="27AE60"/>
-                </a:solidFill>
-                <a:latin typeface="Calibri"/>
-              </a:defRPr>
-            </a:pPr>
-            <a:r>
-              <a:t>10.5%</a:t>
-            </a:r>
-          </a:p>
-        </p:txBody>
-      </p:sp>
-      <p:sp>
-        <p:nvSpPr>
-          <p:cNvPr id="37" name="TextBox 36"/>
-          <p:cNvSpPr txBox="1"/>
-          <p:nvPr/>
-        </p:nvSpPr>
-        <p:spPr>
-          <a:xfrm>
-            <a:off x="8229600" y="5943600"/>
-            <a:ext cx="1188720" cy="310896"/>
-          </a:xfrm>
-          <a:prstGeom prst="rect">
-            <a:avLst/>
-          </a:prstGeom>
-          <a:noFill/>
-        </p:spPr>
-        <p:txBody>
-          <a:bodyPr wrap="square">
-            <a:spAutoFit/>
-          </a:bodyPr>
-          <a:lstStyle/>
-          <a:p>
-            <a:pPr algn="ctr">
-              <a:defRPr sz="1200" b="1">
-                <a:solidFill>
-                  <a:srgbClr val="27AE60"/>
-                </a:solidFill>
-                <a:latin typeface="Calibri"/>
-              </a:defRPr>
-            </a:pPr>
-            <a:r>
-              <a:t>0.681</a:t>
-            </a:r>
-          </a:p>
-        </p:txBody>
-      </p:sp>
-      <p:sp>
-        <p:nvSpPr>
-          <p:cNvPr id="38" name="TextBox 37"/>
-          <p:cNvSpPr txBox="1"/>
-          <p:nvPr/>
-        </p:nvSpPr>
-        <p:spPr>
-          <a:xfrm>
-            <a:off x="9601200" y="5943600"/>
-            <a:ext cx="1188720" cy="310896"/>
-          </a:xfrm>
-          <a:prstGeom prst="rect">
-            <a:avLst/>
-          </a:prstGeom>
-          <a:noFill/>
-        </p:spPr>
-        <p:txBody>
-          <a:bodyPr wrap="square">
-            <a:spAutoFit/>
-          </a:bodyPr>
-          <a:lstStyle/>
-          <a:p>
-            <a:pPr algn="ctr">
-              <a:defRPr sz="1200" b="1">
-                <a:solidFill>
-                  <a:srgbClr val="27AE60"/>
-                </a:solidFill>
-                <a:latin typeface="Calibri"/>
-              </a:defRPr>
-            </a:pPr>
-            <a:r>
-              <a:t>47</a:t>
-            </a:r>
-          </a:p>
-        </p:txBody>
-      </p:sp>
-      <p:sp>
-        <p:nvSpPr>
-          <p:cNvPr id="39" name="TextBox 38"/>
-          <p:cNvSpPr txBox="1"/>
-          <p:nvPr/>
-        </p:nvSpPr>
-        <p:spPr>
-          <a:xfrm>
-            <a:off x="640080" y="6263640"/>
-            <a:ext cx="3200400" cy="310896"/>
-          </a:xfrm>
-          <a:prstGeom prst="rect">
-            <a:avLst/>
-          </a:prstGeom>
-          <a:noFill/>
-        </p:spPr>
-        <p:txBody>
-          <a:bodyPr wrap="square">
-            <a:spAutoFit/>
-          </a:bodyPr>
-          <a:lstStyle/>
-          <a:p>
-            <a:pPr algn="l">
-              <a:defRPr sz="1200" b="0">
+            <a:pPr>
+              <a:spcAft>
+                <a:spcPts val="300"/>
+              </a:spcAft>
+              <a:defRPr sz="1400">
                 <a:solidFill>
                   <a:srgbClr val="2C2C2C"/>
                 </a:solidFill>
@@ -12503,35 +8621,15 @@
               </a:defRPr>
             </a:pPr>
             <a:r>
-              <a:t>Learned Meta XGB</a:t>
-            </a:r>
-          </a:p>
-        </p:txBody>
-      </p:sp>
-      <p:sp>
-        <p:nvSpPr>
-          <p:cNvPr id="40" name="TextBox 39"/>
-          <p:cNvSpPr txBox="1"/>
-          <p:nvPr/>
-        </p:nvSpPr>
-        <p:spPr>
-          <a:xfrm>
-            <a:off x="4114800" y="6263640"/>
-            <a:ext cx="1188720" cy="310896"/>
-          </a:xfrm>
-          <a:prstGeom prst="rect">
-            <a:avLst/>
-          </a:prstGeom>
-          <a:noFill/>
-        </p:spPr>
-        <p:txBody>
-          <a:bodyPr wrap="square">
-            <a:spAutoFit/>
-          </a:bodyPr>
-          <a:lstStyle/>
-          <a:p>
-            <a:pPr algn="ctr">
-              <a:defRPr sz="1200" b="0">
+              <a:t>- Dynamic clustering with rolling updates and drift monitoring.</a:t>
+            </a:r>
+          </a:p>
+          <a:p>
+            <a:pPr>
+              <a:spcAft>
+                <a:spcPts val="300"/>
+              </a:spcAft>
+              <a:defRPr sz="1400">
                 <a:solidFill>
                   <a:srgbClr val="2C2C2C"/>
                 </a:solidFill>
@@ -12539,35 +8637,15 @@
               </a:defRPr>
             </a:pPr>
             <a:r>
-              <a:t>4.72</a:t>
-            </a:r>
-          </a:p>
-        </p:txBody>
-      </p:sp>
-      <p:sp>
-        <p:nvSpPr>
-          <p:cNvPr id="41" name="TextBox 40"/>
-          <p:cNvSpPr txBox="1"/>
-          <p:nvPr/>
-        </p:nvSpPr>
-        <p:spPr>
-          <a:xfrm>
-            <a:off x="5486400" y="6263640"/>
-            <a:ext cx="1188720" cy="310896"/>
-          </a:xfrm>
-          <a:prstGeom prst="rect">
-            <a:avLst/>
-          </a:prstGeom>
-          <a:noFill/>
-        </p:spPr>
-        <p:txBody>
-          <a:bodyPr wrap="square">
-            <a:spAutoFit/>
-          </a:bodyPr>
-          <a:lstStyle/>
-          <a:p>
-            <a:pPr algn="ctr">
-              <a:defRPr sz="1200" b="0">
+              <a:t>- Cost-aware backtesting with slippage, commissions, and liquidity penalties.</a:t>
+            </a:r>
+          </a:p>
+          <a:p>
+            <a:pPr>
+              <a:spcAft>
+                <a:spcPts val="300"/>
+              </a:spcAft>
+              <a:defRPr sz="1400">
                 <a:solidFill>
                   <a:srgbClr val="2C2C2C"/>
                 </a:solidFill>
@@ -12575,35 +8653,15 @@
               </a:defRPr>
             </a:pPr>
             <a:r>
-              <a:t>−1.5%</a:t>
-            </a:r>
-          </a:p>
-        </p:txBody>
-      </p:sp>
-      <p:sp>
-        <p:nvSpPr>
-          <p:cNvPr id="42" name="TextBox 41"/>
-          <p:cNvSpPr txBox="1"/>
-          <p:nvPr/>
-        </p:nvSpPr>
-        <p:spPr>
-          <a:xfrm>
-            <a:off x="6858000" y="6263640"/>
-            <a:ext cx="1188720" cy="310896"/>
-          </a:xfrm>
-          <a:prstGeom prst="rect">
-            <a:avLst/>
-          </a:prstGeom>
-          <a:noFill/>
-        </p:spPr>
-        <p:txBody>
-          <a:bodyPr wrap="square">
-            <a:spAutoFit/>
-          </a:bodyPr>
-          <a:lstStyle/>
-          <a:p>
-            <a:pPr algn="ctr">
-              <a:defRPr sz="1200" b="0">
+              <a:t>- Uncertainty-aware position sizing using prediction intervals.</a:t>
+            </a:r>
+          </a:p>
+          <a:p>
+            <a:pPr>
+              <a:spcAft>
+                <a:spcPts val="300"/>
+              </a:spcAft>
+              <a:defRPr sz="1400">
                 <a:solidFill>
                   <a:srgbClr val="2C2C2C"/>
                 </a:solidFill>
@@ -12611,295 +8669,7 @@
               </a:defRPr>
             </a:pPr>
             <a:r>
-              <a:t>6.5%</a:t>
-            </a:r>
-          </a:p>
-        </p:txBody>
-      </p:sp>
-      <p:sp>
-        <p:nvSpPr>
-          <p:cNvPr id="43" name="TextBox 42"/>
-          <p:cNvSpPr txBox="1"/>
-          <p:nvPr/>
-        </p:nvSpPr>
-        <p:spPr>
-          <a:xfrm>
-            <a:off x="8229600" y="6263640"/>
-            <a:ext cx="1188720" cy="310896"/>
-          </a:xfrm>
-          <a:prstGeom prst="rect">
-            <a:avLst/>
-          </a:prstGeom>
-          <a:noFill/>
-        </p:spPr>
-        <p:txBody>
-          <a:bodyPr wrap="square">
-            <a:spAutoFit/>
-          </a:bodyPr>
-          <a:lstStyle/>
-          <a:p>
-            <a:pPr algn="ctr">
-              <a:defRPr sz="1200" b="0">
-                <a:solidFill>
-                  <a:srgbClr val="2C2C2C"/>
-                </a:solidFill>
-                <a:latin typeface="Calibri"/>
-              </a:defRPr>
-            </a:pPr>
-            <a:r>
-              <a:t>0.617</a:t>
-            </a:r>
-          </a:p>
-        </p:txBody>
-      </p:sp>
-      <p:sp>
-        <p:nvSpPr>
-          <p:cNvPr id="44" name="TextBox 43"/>
-          <p:cNvSpPr txBox="1"/>
-          <p:nvPr/>
-        </p:nvSpPr>
-        <p:spPr>
-          <a:xfrm>
-            <a:off x="9601200" y="6263640"/>
-            <a:ext cx="1188720" cy="310896"/>
-          </a:xfrm>
-          <a:prstGeom prst="rect">
-            <a:avLst/>
-          </a:prstGeom>
-          <a:noFill/>
-        </p:spPr>
-        <p:txBody>
-          <a:bodyPr wrap="square">
-            <a:spAutoFit/>
-          </a:bodyPr>
-          <a:lstStyle/>
-          <a:p>
-            <a:pPr algn="ctr">
-              <a:defRPr sz="1200" b="0">
-                <a:solidFill>
-                  <a:srgbClr val="2C2C2C"/>
-                </a:solidFill>
-                <a:latin typeface="Calibri"/>
-              </a:defRPr>
-            </a:pPr>
-            <a:r>
-              <a:t>47</a:t>
-            </a:r>
-          </a:p>
-        </p:txBody>
-      </p:sp>
-      <p:sp>
-        <p:nvSpPr>
-          <p:cNvPr id="45" name="TextBox 44"/>
-          <p:cNvSpPr txBox="1"/>
-          <p:nvPr/>
-        </p:nvSpPr>
-        <p:spPr>
-          <a:xfrm>
-            <a:off x="640080" y="6583679"/>
-            <a:ext cx="3200400" cy="310896"/>
-          </a:xfrm>
-          <a:prstGeom prst="rect">
-            <a:avLst/>
-          </a:prstGeom>
-          <a:noFill/>
-        </p:spPr>
-        <p:txBody>
-          <a:bodyPr wrap="square">
-            <a:spAutoFit/>
-          </a:bodyPr>
-          <a:lstStyle/>
-          <a:p>
-            <a:pPr algn="l">
-              <a:defRPr sz="1200" b="0">
-                <a:solidFill>
-                  <a:srgbClr val="2C2C2C"/>
-                </a:solidFill>
-                <a:latin typeface="Calibri"/>
-              </a:defRPr>
-            </a:pPr>
-            <a:r>
-              <a:t>Buy-and-Hold</a:t>
-            </a:r>
-          </a:p>
-        </p:txBody>
-      </p:sp>
-      <p:sp>
-        <p:nvSpPr>
-          <p:cNvPr id="46" name="TextBox 45"/>
-          <p:cNvSpPr txBox="1"/>
-          <p:nvPr/>
-        </p:nvSpPr>
-        <p:spPr>
-          <a:xfrm>
-            <a:off x="4114800" y="6583679"/>
-            <a:ext cx="1188720" cy="310896"/>
-          </a:xfrm>
-          <a:prstGeom prst="rect">
-            <a:avLst/>
-          </a:prstGeom>
-          <a:noFill/>
-        </p:spPr>
-        <p:txBody>
-          <a:bodyPr wrap="square">
-            <a:spAutoFit/>
-          </a:bodyPr>
-          <a:lstStyle/>
-          <a:p>
-            <a:pPr algn="ctr">
-              <a:defRPr sz="1200" b="0">
-                <a:solidFill>
-                  <a:srgbClr val="2C2C2C"/>
-                </a:solidFill>
-                <a:latin typeface="Calibri"/>
-              </a:defRPr>
-            </a:pPr>
-            <a:r>
-              <a:t>6.09</a:t>
-            </a:r>
-          </a:p>
-        </p:txBody>
-      </p:sp>
-      <p:sp>
-        <p:nvSpPr>
-          <p:cNvPr id="47" name="TextBox 46"/>
-          <p:cNvSpPr txBox="1"/>
-          <p:nvPr/>
-        </p:nvSpPr>
-        <p:spPr>
-          <a:xfrm>
-            <a:off x="5486400" y="6583679"/>
-            <a:ext cx="1188720" cy="310896"/>
-          </a:xfrm>
-          <a:prstGeom prst="rect">
-            <a:avLst/>
-          </a:prstGeom>
-          <a:noFill/>
-        </p:spPr>
-        <p:txBody>
-          <a:bodyPr wrap="square">
-            <a:spAutoFit/>
-          </a:bodyPr>
-          <a:lstStyle/>
-          <a:p>
-            <a:pPr algn="ctr">
-              <a:defRPr sz="1200" b="0">
-                <a:solidFill>
-                  <a:srgbClr val="2C2C2C"/>
-                </a:solidFill>
-                <a:latin typeface="Calibri"/>
-              </a:defRPr>
-            </a:pPr>
-            <a:r>
-              <a:t>—</a:t>
-            </a:r>
-          </a:p>
-        </p:txBody>
-      </p:sp>
-      <p:sp>
-        <p:nvSpPr>
-          <p:cNvPr id="48" name="TextBox 47"/>
-          <p:cNvSpPr txBox="1"/>
-          <p:nvPr/>
-        </p:nvSpPr>
-        <p:spPr>
-          <a:xfrm>
-            <a:off x="6858000" y="6583679"/>
-            <a:ext cx="1188720" cy="310896"/>
-          </a:xfrm>
-          <a:prstGeom prst="rect">
-            <a:avLst/>
-          </a:prstGeom>
-          <a:noFill/>
-        </p:spPr>
-        <p:txBody>
-          <a:bodyPr wrap="square">
-            <a:spAutoFit/>
-          </a:bodyPr>
-          <a:lstStyle/>
-          <a:p>
-            <a:pPr algn="ctr">
-              <a:defRPr sz="1200" b="0">
-                <a:solidFill>
-                  <a:srgbClr val="2C2C2C"/>
-                </a:solidFill>
-                <a:latin typeface="Calibri"/>
-              </a:defRPr>
-            </a:pPr>
-            <a:r>
-              <a:t>8.2%</a:t>
-            </a:r>
-          </a:p>
-        </p:txBody>
-      </p:sp>
-      <p:sp>
-        <p:nvSpPr>
-          <p:cNvPr id="49" name="TextBox 48"/>
-          <p:cNvSpPr txBox="1"/>
-          <p:nvPr/>
-        </p:nvSpPr>
-        <p:spPr>
-          <a:xfrm>
-            <a:off x="8229600" y="6583679"/>
-            <a:ext cx="1188720" cy="310896"/>
-          </a:xfrm>
-          <a:prstGeom prst="rect">
-            <a:avLst/>
-          </a:prstGeom>
-          <a:noFill/>
-        </p:spPr>
-        <p:txBody>
-          <a:bodyPr wrap="square">
-            <a:spAutoFit/>
-          </a:bodyPr>
-          <a:lstStyle/>
-          <a:p>
-            <a:pPr algn="ctr">
-              <a:defRPr sz="1200" b="0">
-                <a:solidFill>
-                  <a:srgbClr val="2C2C2C"/>
-                </a:solidFill>
-                <a:latin typeface="Calibri"/>
-              </a:defRPr>
-            </a:pPr>
-            <a:r>
-              <a:t>—</a:t>
-            </a:r>
-          </a:p>
-        </p:txBody>
-      </p:sp>
-      <p:sp>
-        <p:nvSpPr>
-          <p:cNvPr id="50" name="TextBox 49"/>
-          <p:cNvSpPr txBox="1"/>
-          <p:nvPr/>
-        </p:nvSpPr>
-        <p:spPr>
-          <a:xfrm>
-            <a:off x="9601200" y="6583679"/>
-            <a:ext cx="1188720" cy="310896"/>
-          </a:xfrm>
-          <a:prstGeom prst="rect">
-            <a:avLst/>
-          </a:prstGeom>
-          <a:noFill/>
-        </p:spPr>
-        <p:txBody>
-          <a:bodyPr wrap="square">
-            <a:spAutoFit/>
-          </a:bodyPr>
-          <a:lstStyle/>
-          <a:p>
-            <a:pPr algn="ctr">
-              <a:defRPr sz="1200" b="0">
-                <a:solidFill>
-                  <a:srgbClr val="2C2C2C"/>
-                </a:solidFill>
-                <a:latin typeface="Calibri"/>
-              </a:defRPr>
-            </a:pPr>
-            <a:r>
-              <a:t>—</a:t>
+              <a:t>- Regime-conditioned retraining cadence and model governance checkpoints.</a:t>
             </a:r>
           </a:p>
         </p:txBody>
